--- a/LLM工具檢索_入門簡報.pptx
+++ b/LLM工具檢索_入門簡報.pptx
@@ -26,6 +26,8 @@
     <p:sldId id="274" r:id="rId25"/>
     <p:sldId id="275" r:id="rId26"/>
     <p:sldId id="276" r:id="rId27"/>
+    <p:sldId id="277" r:id="rId28"/>
+    <p:sldId id="278" r:id="rId29"/>
   </p:sldIdLst>
   <p:sldSz cx="12191695" cy="6858000" type="screen4x3"/>
   <p:notesSz cx="6858000" cy="9144000"/>
@@ -11656,6 +11658,2077 @@
 </file>
 
 <file path=ppt/slides/slide16.xml><?xml version="1.0" encoding="utf-8"?>
+<p:sld xmlns:a="http://schemas.openxmlformats.org/drawingml/2006/main" xmlns:p="http://schemas.openxmlformats.org/presentationml/2006/main" xmlns:r="http://schemas.openxmlformats.org/officeDocument/2006/relationships">
+  <p:cSld>
+    <p:spTree>
+      <p:nvGrpSpPr>
+        <p:cNvPr id="1" name=""/>
+        <p:cNvGrpSpPr/>
+        <p:nvPr/>
+      </p:nvGrpSpPr>
+      <p:grpSpPr/>
+      <p:sp>
+        <p:nvSpPr>
+          <p:cNvPr id="2" name="TextBox 1"/>
+          <p:cNvSpPr txBox="1"/>
+          <p:nvPr/>
+        </p:nvSpPr>
+        <p:spPr>
+          <a:xfrm>
+            <a:off x="502920" y="256032"/>
+            <a:ext cx="11155680" cy="365760"/>
+          </a:xfrm>
+          <a:prstGeom prst="rect">
+            <a:avLst/>
+          </a:prstGeom>
+          <a:noFill/>
+        </p:spPr>
+        <p:txBody>
+          <a:bodyPr wrap="square" anchor="t" lIns="0" rIns="0" tIns="0" bIns="0">
+            <a:spAutoFit/>
+          </a:bodyPr>
+          <a:lstStyle/>
+          <a:p>
+            <a:pPr algn="l"/>
+            <a:r>
+              <a:rPr sz="1300" b="1">
+                <a:solidFill>
+                  <a:srgbClr val="4F46E5"/>
+                </a:solidFill>
+                <a:latin typeface="Microsoft JhengHei"/>
+                <a:ea typeface="Microsoft JhengHei"/>
+                <a:cs typeface="Microsoft JhengHei"/>
+              </a:rPr>
+              <a:t>新戰線 G|activation 注入(1/2)</a:t>
+            </a:r>
+          </a:p>
+        </p:txBody>
+      </p:sp>
+      <p:sp>
+        <p:nvSpPr>
+          <p:cNvPr id="3" name="TextBox 2"/>
+          <p:cNvSpPr txBox="1"/>
+          <p:nvPr/>
+        </p:nvSpPr>
+        <p:spPr>
+          <a:xfrm>
+            <a:off x="502920" y="566928"/>
+            <a:ext cx="11155680" cy="777240"/>
+          </a:xfrm>
+          <a:prstGeom prst="rect">
+            <a:avLst/>
+          </a:prstGeom>
+          <a:noFill/>
+        </p:spPr>
+        <p:txBody>
+          <a:bodyPr wrap="square" anchor="t" lIns="0" rIns="0" tIns="0" bIns="0">
+            <a:spAutoFit/>
+          </a:bodyPr>
+          <a:lstStyle/>
+          <a:p>
+            <a:pPr algn="l"/>
+            <a:r>
+              <a:rPr sz="2700" b="1">
+                <a:solidFill>
+                  <a:srgbClr val="1F2937"/>
+                </a:solidFill>
+                <a:latin typeface="Microsoft JhengHei"/>
+                <a:ea typeface="Microsoft JhengHei"/>
+                <a:cs typeface="Microsoft JhengHei"/>
+              </a:rPr>
+              <a:t>第三層注入:模型其實「早就知道」,只是沒「說出口」</a:t>
+            </a:r>
+          </a:p>
+        </p:txBody>
+      </p:sp>
+      <p:sp>
+        <p:nvSpPr>
+          <p:cNvPr id="4" name="Rounded Rectangle 3"/>
+          <p:cNvSpPr/>
+          <p:nvPr/>
+        </p:nvSpPr>
+        <p:spPr>
+          <a:xfrm>
+            <a:off x="521207" y="1298448"/>
+            <a:ext cx="1051560" cy="41148"/>
+          </a:xfrm>
+          <a:prstGeom prst="roundRect">
+            <a:avLst>
+              <a:gd name="adj" fmla="val 50000"/>
+            </a:avLst>
+          </a:prstGeom>
+          <a:solidFill>
+            <a:srgbClr val="4F46E5"/>
+          </a:solidFill>
+          <a:ln>
+            <a:noFill/>
+          </a:ln>
+          <a:effectLst/>
+        </p:spPr>
+        <p:style>
+          <a:lnRef idx="1">
+            <a:schemeClr val="accent1"/>
+          </a:lnRef>
+          <a:fillRef idx="3">
+            <a:schemeClr val="accent1"/>
+          </a:fillRef>
+          <a:effectRef idx="2">
+            <a:schemeClr val="accent1"/>
+          </a:effectRef>
+          <a:fontRef idx="minor">
+            <a:schemeClr val="lt1"/>
+          </a:fontRef>
+        </p:style>
+        <p:txBody>
+          <a:bodyPr rtlCol="0" anchor="ctr"/>
+          <a:lstStyle/>
+          <a:p>
+            <a:pPr algn="ctr"/>
+          </a:p>
+        </p:txBody>
+      </p:sp>
+      <p:sp>
+        <p:nvSpPr>
+          <p:cNvPr id="5" name="Rounded Rectangle 4"/>
+          <p:cNvSpPr/>
+          <p:nvPr/>
+        </p:nvSpPr>
+        <p:spPr>
+          <a:xfrm>
+            <a:off x="502920" y="1554480"/>
+            <a:ext cx="4937760" cy="3291840"/>
+          </a:xfrm>
+          <a:prstGeom prst="roundRect">
+            <a:avLst>
+              <a:gd name="adj" fmla="val 10000"/>
+            </a:avLst>
+          </a:prstGeom>
+          <a:solidFill>
+            <a:srgbClr val="F3F4F6"/>
+          </a:solidFill>
+          <a:ln>
+            <a:noFill/>
+          </a:ln>
+          <a:effectLst/>
+        </p:spPr>
+        <p:style>
+          <a:lnRef idx="1">
+            <a:schemeClr val="accent1"/>
+          </a:lnRef>
+          <a:fillRef idx="3">
+            <a:schemeClr val="accent1"/>
+          </a:fillRef>
+          <a:effectRef idx="2">
+            <a:schemeClr val="accent1"/>
+          </a:effectRef>
+          <a:fontRef idx="minor">
+            <a:schemeClr val="lt1"/>
+          </a:fontRef>
+        </p:style>
+        <p:txBody>
+          <a:bodyPr rtlCol="0" anchor="ctr"/>
+          <a:lstStyle/>
+          <a:p>
+            <a:pPr algn="ctr"/>
+          </a:p>
+        </p:txBody>
+      </p:sp>
+      <p:sp>
+        <p:nvSpPr>
+          <p:cNvPr id="6" name="TextBox 5"/>
+          <p:cNvSpPr txBox="1"/>
+          <p:nvPr/>
+        </p:nvSpPr>
+        <p:spPr>
+          <a:xfrm>
+            <a:off x="713232" y="1664208"/>
+            <a:ext cx="4572000" cy="365760"/>
+          </a:xfrm>
+          <a:prstGeom prst="rect">
+            <a:avLst/>
+          </a:prstGeom>
+          <a:noFill/>
+        </p:spPr>
+        <p:txBody>
+          <a:bodyPr wrap="square" anchor="t" lIns="0" rIns="0" tIns="0" bIns="0">
+            <a:spAutoFit/>
+          </a:bodyPr>
+          <a:lstStyle/>
+          <a:p>
+            <a:pPr algn="l"/>
+            <a:r>
+              <a:rPr sz="1300" b="1">
+                <a:solidFill>
+                  <a:srgbClr val="1F2937"/>
+                </a:solidFill>
+                <a:latin typeface="Microsoft JhengHei"/>
+                <a:ea typeface="Microsoft JhengHei"/>
+                <a:cs typeface="Microsoft JhengHei"/>
+              </a:rPr>
+              <a:t>把「工具知識」放進模型的三個入口</a:t>
+            </a:r>
+          </a:p>
+        </p:txBody>
+      </p:sp>
+      <p:sp>
+        <p:nvSpPr>
+          <p:cNvPr id="7" name="Rounded Rectangle 6"/>
+          <p:cNvSpPr/>
+          <p:nvPr/>
+        </p:nvSpPr>
+        <p:spPr>
+          <a:xfrm>
+            <a:off x="731520" y="2148840"/>
+            <a:ext cx="4480560" cy="777240"/>
+          </a:xfrm>
+          <a:prstGeom prst="roundRect">
+            <a:avLst>
+              <a:gd name="adj" fmla="val 10000"/>
+            </a:avLst>
+          </a:prstGeom>
+          <a:solidFill>
+            <a:srgbClr val="FFFFFF"/>
+          </a:solidFill>
+          <a:ln w="12700">
+            <a:solidFill>
+              <a:srgbClr val="6B7280"/>
+            </a:solidFill>
+          </a:ln>
+          <a:effectLst/>
+        </p:spPr>
+        <p:style>
+          <a:lnRef idx="1">
+            <a:schemeClr val="accent1"/>
+          </a:lnRef>
+          <a:fillRef idx="3">
+            <a:schemeClr val="accent1"/>
+          </a:fillRef>
+          <a:effectRef idx="2">
+            <a:schemeClr val="accent1"/>
+          </a:effectRef>
+          <a:fontRef idx="minor">
+            <a:schemeClr val="lt1"/>
+          </a:fontRef>
+        </p:style>
+        <p:txBody>
+          <a:bodyPr rtlCol="0" anchor="ctr"/>
+          <a:lstStyle/>
+          <a:p>
+            <a:pPr algn="ctr"/>
+          </a:p>
+        </p:txBody>
+      </p:sp>
+      <p:sp>
+        <p:nvSpPr>
+          <p:cNvPr id="8" name="TextBox 7"/>
+          <p:cNvSpPr txBox="1"/>
+          <p:nvPr/>
+        </p:nvSpPr>
+        <p:spPr>
+          <a:xfrm>
+            <a:off x="868680" y="2221992"/>
+            <a:ext cx="4206240" cy="640080"/>
+          </a:xfrm>
+          <a:prstGeom prst="rect">
+            <a:avLst/>
+          </a:prstGeom>
+          <a:noFill/>
+        </p:spPr>
+        <p:txBody>
+          <a:bodyPr wrap="square" anchor="t" lIns="0" rIns="0" tIns="0" bIns="0">
+            <a:spAutoFit/>
+          </a:bodyPr>
+          <a:lstStyle/>
+          <a:p>
+            <a:pPr algn="l">
+              <a:spcAft>
+                <a:spcPts val="100"/>
+              </a:spcAft>
+            </a:pPr>
+            <a:r>
+              <a:rPr sz="1200" b="1">
+                <a:solidFill>
+                  <a:srgbClr val="1F2937"/>
+                </a:solidFill>
+                <a:latin typeface="Microsoft JhengHei"/>
+                <a:ea typeface="Microsoft JhengHei"/>
+                <a:cs typeface="Microsoft JhengHei"/>
+              </a:rPr>
+              <a:t>① 權重層(D/E 類)</a:t>
+            </a:r>
+          </a:p>
+          <a:p>
+            <a:pPr algn="l"/>
+            <a:r>
+              <a:rPr sz="1050" b="0">
+                <a:solidFill>
+                  <a:srgbClr val="6B7280"/>
+                </a:solidFill>
+                <a:latin typeface="Microsoft JhengHei"/>
+                <a:ea typeface="Microsoft JhengHei"/>
+                <a:cs typeface="Microsoft JhengHei"/>
+              </a:rPr>
+              <a:t>微調 / 加詞元 —— 要訓練、要資料</a:t>
+            </a:r>
+          </a:p>
+        </p:txBody>
+      </p:sp>
+      <p:sp>
+        <p:nvSpPr>
+          <p:cNvPr id="9" name="Rounded Rectangle 8"/>
+          <p:cNvSpPr/>
+          <p:nvPr/>
+        </p:nvSpPr>
+        <p:spPr>
+          <a:xfrm>
+            <a:off x="731520" y="3044952"/>
+            <a:ext cx="4480560" cy="777240"/>
+          </a:xfrm>
+          <a:prstGeom prst="roundRect">
+            <a:avLst>
+              <a:gd name="adj" fmla="val 10000"/>
+            </a:avLst>
+          </a:prstGeom>
+          <a:solidFill>
+            <a:srgbClr val="FFFFFF"/>
+          </a:solidFill>
+          <a:ln w="12700">
+            <a:solidFill>
+              <a:srgbClr val="6B7280"/>
+            </a:solidFill>
+          </a:ln>
+          <a:effectLst/>
+        </p:spPr>
+        <p:style>
+          <a:lnRef idx="1">
+            <a:schemeClr val="accent1"/>
+          </a:lnRef>
+          <a:fillRef idx="3">
+            <a:schemeClr val="accent1"/>
+          </a:fillRef>
+          <a:effectRef idx="2">
+            <a:schemeClr val="accent1"/>
+          </a:effectRef>
+          <a:fontRef idx="minor">
+            <a:schemeClr val="lt1"/>
+          </a:fontRef>
+        </p:style>
+        <p:txBody>
+          <a:bodyPr rtlCol="0" anchor="ctr"/>
+          <a:lstStyle/>
+          <a:p>
+            <a:pPr algn="ctr"/>
+          </a:p>
+        </p:txBody>
+      </p:sp>
+      <p:sp>
+        <p:nvSpPr>
+          <p:cNvPr id="10" name="TextBox 9"/>
+          <p:cNvSpPr txBox="1"/>
+          <p:nvPr/>
+        </p:nvSpPr>
+        <p:spPr>
+          <a:xfrm>
+            <a:off x="868680" y="3118104"/>
+            <a:ext cx="4206240" cy="640080"/>
+          </a:xfrm>
+          <a:prstGeom prst="rect">
+            <a:avLst/>
+          </a:prstGeom>
+          <a:noFill/>
+        </p:spPr>
+        <p:txBody>
+          <a:bodyPr wrap="square" anchor="t" lIns="0" rIns="0" tIns="0" bIns="0">
+            <a:spAutoFit/>
+          </a:bodyPr>
+          <a:lstStyle/>
+          <a:p>
+            <a:pPr algn="l">
+              <a:spcAft>
+                <a:spcPts val="100"/>
+              </a:spcAft>
+            </a:pPr>
+            <a:r>
+              <a:rPr sz="1200" b="1">
+                <a:solidFill>
+                  <a:srgbClr val="1F2937"/>
+                </a:solidFill>
+                <a:latin typeface="Microsoft JhengHei"/>
+                <a:ea typeface="Microsoft JhengHei"/>
+                <a:cs typeface="Microsoft JhengHei"/>
+              </a:rPr>
+              <a:t>② prompt 層(A/F 類)</a:t>
+            </a:r>
+          </a:p>
+          <a:p>
+            <a:pPr algn="l"/>
+            <a:r>
+              <a:rPr sz="1050" b="0">
+                <a:solidFill>
+                  <a:srgbClr val="6B7280"/>
+                </a:solidFill>
+                <a:latin typeface="Microsoft JhengHei"/>
+                <a:ea typeface="Microsoft JhengHei"/>
+                <a:cs typeface="Microsoft JhengHei"/>
+              </a:rPr>
+              <a:t>把清單 / 文件 / 檢索結果塞進字面 —— 佔 context、稀釋注意力</a:t>
+            </a:r>
+          </a:p>
+        </p:txBody>
+      </p:sp>
+      <p:sp>
+        <p:nvSpPr>
+          <p:cNvPr id="11" name="Rounded Rectangle 10"/>
+          <p:cNvSpPr/>
+          <p:nvPr/>
+        </p:nvSpPr>
+        <p:spPr>
+          <a:xfrm>
+            <a:off x="731520" y="3941064"/>
+            <a:ext cx="4480560" cy="777240"/>
+          </a:xfrm>
+          <a:prstGeom prst="roundRect">
+            <a:avLst>
+              <a:gd name="adj" fmla="val 10000"/>
+            </a:avLst>
+          </a:prstGeom>
+          <a:solidFill>
+            <a:srgbClr val="FFFFFF"/>
+          </a:solidFill>
+          <a:ln w="12700">
+            <a:solidFill>
+              <a:srgbClr val="4F46E5"/>
+            </a:solidFill>
+          </a:ln>
+          <a:effectLst/>
+        </p:spPr>
+        <p:style>
+          <a:lnRef idx="1">
+            <a:schemeClr val="accent1"/>
+          </a:lnRef>
+          <a:fillRef idx="3">
+            <a:schemeClr val="accent1"/>
+          </a:fillRef>
+          <a:effectRef idx="2">
+            <a:schemeClr val="accent1"/>
+          </a:effectRef>
+          <a:fontRef idx="minor">
+            <a:schemeClr val="lt1"/>
+          </a:fontRef>
+        </p:style>
+        <p:txBody>
+          <a:bodyPr rtlCol="0" anchor="ctr"/>
+          <a:lstStyle/>
+          <a:p>
+            <a:pPr algn="ctr"/>
+          </a:p>
+        </p:txBody>
+      </p:sp>
+      <p:sp>
+        <p:nvSpPr>
+          <p:cNvPr id="12" name="TextBox 11"/>
+          <p:cNvSpPr txBox="1"/>
+          <p:nvPr/>
+        </p:nvSpPr>
+        <p:spPr>
+          <a:xfrm>
+            <a:off x="868680" y="4014216"/>
+            <a:ext cx="4206240" cy="640080"/>
+          </a:xfrm>
+          <a:prstGeom prst="rect">
+            <a:avLst/>
+          </a:prstGeom>
+          <a:noFill/>
+        </p:spPr>
+        <p:txBody>
+          <a:bodyPr wrap="square" anchor="t" lIns="0" rIns="0" tIns="0" bIns="0">
+            <a:spAutoFit/>
+          </a:bodyPr>
+          <a:lstStyle/>
+          <a:p>
+            <a:pPr algn="l">
+              <a:spcAft>
+                <a:spcPts val="100"/>
+              </a:spcAft>
+            </a:pPr>
+            <a:r>
+              <a:rPr sz="1200" b="1">
+                <a:solidFill>
+                  <a:srgbClr val="4F46E5"/>
+                </a:solidFill>
+                <a:latin typeface="Microsoft JhengHei"/>
+                <a:ea typeface="Microsoft JhengHei"/>
+                <a:cs typeface="Microsoft JhengHei"/>
+              </a:rPr>
+              <a:t>③ activation 層(G 類,新)</a:t>
+            </a:r>
+          </a:p>
+          <a:p>
+            <a:pPr algn="l"/>
+            <a:r>
+              <a:rPr sz="1050" b="0">
+                <a:solidFill>
+                  <a:srgbClr val="6B7280"/>
+                </a:solidFill>
+                <a:latin typeface="Microsoft JhengHei"/>
+                <a:ea typeface="Microsoft JhengHei"/>
+                <a:cs typeface="Microsoft JhengHei"/>
+              </a:rPr>
+              <a:t>直接在前向傳播的隱狀態上加一根向量 —— 零訓練、零 context</a:t>
+            </a:r>
+          </a:p>
+        </p:txBody>
+      </p:sp>
+      <p:sp>
+        <p:nvSpPr>
+          <p:cNvPr id="13" name="TextBox 12"/>
+          <p:cNvSpPr txBox="1"/>
+          <p:nvPr/>
+        </p:nvSpPr>
+        <p:spPr>
+          <a:xfrm>
+            <a:off x="5669280" y="1572768"/>
+            <a:ext cx="5989320" cy="365760"/>
+          </a:xfrm>
+          <a:prstGeom prst="rect">
+            <a:avLst/>
+          </a:prstGeom>
+          <a:noFill/>
+        </p:spPr>
+        <p:txBody>
+          <a:bodyPr wrap="square" anchor="t" lIns="0" rIns="0" tIns="0" bIns="0">
+            <a:spAutoFit/>
+          </a:bodyPr>
+          <a:lstStyle/>
+          <a:p>
+            <a:pPr algn="l"/>
+            <a:r>
+              <a:rPr sz="1250" b="1">
+                <a:solidFill>
+                  <a:srgbClr val="1F2937"/>
+                </a:solidFill>
+                <a:latin typeface="Microsoft JhengHei"/>
+                <a:ea typeface="Microsoft JhengHei"/>
+                <a:cs typeface="Microsoft JhengHei"/>
+              </a:rPr>
+              <a:t>為什麼敢這樣做?四篇獨立研究「讀腦」得到同一結論(皆 2026 preprint)</a:t>
+            </a:r>
+          </a:p>
+        </p:txBody>
+      </p:sp>
+      <p:sp>
+        <p:nvSpPr>
+          <p:cNvPr id="14" name="Rounded Rectangle 13"/>
+          <p:cNvSpPr/>
+          <p:nvPr/>
+        </p:nvSpPr>
+        <p:spPr>
+          <a:xfrm>
+            <a:off x="5669280" y="2057400"/>
+            <a:ext cx="5989320" cy="658368"/>
+          </a:xfrm>
+          <a:prstGeom prst="roundRect">
+            <a:avLst>
+              <a:gd name="adj" fmla="val 10000"/>
+            </a:avLst>
+          </a:prstGeom>
+          <a:solidFill>
+            <a:srgbClr val="E0E7FF"/>
+          </a:solidFill>
+          <a:ln>
+            <a:noFill/>
+          </a:ln>
+          <a:effectLst/>
+        </p:spPr>
+        <p:style>
+          <a:lnRef idx="1">
+            <a:schemeClr val="accent1"/>
+          </a:lnRef>
+          <a:fillRef idx="3">
+            <a:schemeClr val="accent1"/>
+          </a:fillRef>
+          <a:effectRef idx="2">
+            <a:schemeClr val="accent1"/>
+          </a:effectRef>
+          <a:fontRef idx="minor">
+            <a:schemeClr val="lt1"/>
+          </a:fontRef>
+        </p:style>
+        <p:txBody>
+          <a:bodyPr rtlCol="0" anchor="ctr"/>
+          <a:lstStyle/>
+          <a:p>
+            <a:pPr algn="ctr"/>
+          </a:p>
+        </p:txBody>
+      </p:sp>
+      <p:sp>
+        <p:nvSpPr>
+          <p:cNvPr id="15" name="TextBox 14"/>
+          <p:cNvSpPr txBox="1"/>
+          <p:nvPr/>
+        </p:nvSpPr>
+        <p:spPr>
+          <a:xfrm>
+            <a:off x="5833872" y="2112264"/>
+            <a:ext cx="5669280" cy="566928"/>
+          </a:xfrm>
+          <a:prstGeom prst="rect">
+            <a:avLst/>
+          </a:prstGeom>
+          <a:noFill/>
+        </p:spPr>
+        <p:txBody>
+          <a:bodyPr wrap="square" anchor="ctr" lIns="0" rIns="0" tIns="0" bIns="0">
+            <a:spAutoFit/>
+          </a:bodyPr>
+          <a:lstStyle/>
+          <a:p>
+            <a:pPr algn="l"/>
+            <a:r>
+              <a:rPr sz="1050" b="0">
+                <a:solidFill>
+                  <a:srgbClr val="1F2937"/>
+                </a:solidFill>
+                <a:latin typeface="Microsoft JhengHei"/>
+                <a:ea typeface="Microsoft JhengHei"/>
+                <a:cs typeface="Microsoft JhengHei"/>
+              </a:rPr>
+              <a:t>ASA:probe 讀中層激活判「要不要工具」AUC 0.999,行為 F1 卻只有 0.18 —— 知道,但不出手</a:t>
+            </a:r>
+          </a:p>
+        </p:txBody>
+      </p:sp>
+      <p:sp>
+        <p:nvSpPr>
+          <p:cNvPr id="16" name="Rounded Rectangle 15"/>
+          <p:cNvSpPr/>
+          <p:nvPr/>
+        </p:nvSpPr>
+        <p:spPr>
+          <a:xfrm>
+            <a:off x="5669280" y="2807208"/>
+            <a:ext cx="5989320" cy="658368"/>
+          </a:xfrm>
+          <a:prstGeom prst="roundRect">
+            <a:avLst>
+              <a:gd name="adj" fmla="val 10000"/>
+            </a:avLst>
+          </a:prstGeom>
+          <a:solidFill>
+            <a:srgbClr val="E0E7FF"/>
+          </a:solidFill>
+          <a:ln>
+            <a:noFill/>
+          </a:ln>
+          <a:effectLst/>
+        </p:spPr>
+        <p:style>
+          <a:lnRef idx="1">
+            <a:schemeClr val="accent1"/>
+          </a:lnRef>
+          <a:fillRef idx="3">
+            <a:schemeClr val="accent1"/>
+          </a:fillRef>
+          <a:effectRef idx="2">
+            <a:schemeClr val="accent1"/>
+          </a:effectRef>
+          <a:fontRef idx="minor">
+            <a:schemeClr val="lt1"/>
+          </a:fontRef>
+        </p:style>
+        <p:txBody>
+          <a:bodyPr rtlCol="0" anchor="ctr"/>
+          <a:lstStyle/>
+          <a:p>
+            <a:pPr algn="ctr"/>
+          </a:p>
+        </p:txBody>
+      </p:sp>
+      <p:sp>
+        <p:nvSpPr>
+          <p:cNvPr id="17" name="TextBox 16"/>
+          <p:cNvSpPr txBox="1"/>
+          <p:nvPr/>
+        </p:nvSpPr>
+        <p:spPr>
+          <a:xfrm>
+            <a:off x="5833872" y="2862072"/>
+            <a:ext cx="5669280" cy="566928"/>
+          </a:xfrm>
+          <a:prstGeom prst="rect">
+            <a:avLst/>
+          </a:prstGeom>
+          <a:noFill/>
+        </p:spPr>
+        <p:txBody>
+          <a:bodyPr wrap="square" anchor="ctr" lIns="0" rIns="0" tIns="0" bIns="0">
+            <a:spAutoFit/>
+          </a:bodyPr>
+          <a:lstStyle/>
+          <a:p>
+            <a:pPr algn="l"/>
+            <a:r>
+              <a:rPr sz="1050" b="0">
+                <a:solidFill>
+                  <a:srgbClr val="1F2937"/>
+                </a:solidFill>
+                <a:latin typeface="Microsoft JhengHei"/>
+                <a:ea typeface="Microsoft JhengHei"/>
+                <a:cs typeface="Microsoft JhengHei"/>
+              </a:rPr>
+              <a:t>KnowWhen:last-token probe AUROC 0.89–0.96,比模型自己用文字推理判斷還準</a:t>
+            </a:r>
+          </a:p>
+        </p:txBody>
+      </p:sp>
+      <p:sp>
+        <p:nvSpPr>
+          <p:cNvPr id="18" name="Rounded Rectangle 17"/>
+          <p:cNvSpPr/>
+          <p:nvPr/>
+        </p:nvSpPr>
+        <p:spPr>
+          <a:xfrm>
+            <a:off x="5669280" y="3557015"/>
+            <a:ext cx="5989320" cy="658368"/>
+          </a:xfrm>
+          <a:prstGeom prst="roundRect">
+            <a:avLst>
+              <a:gd name="adj" fmla="val 10000"/>
+            </a:avLst>
+          </a:prstGeom>
+          <a:solidFill>
+            <a:srgbClr val="E0E7FF"/>
+          </a:solidFill>
+          <a:ln>
+            <a:noFill/>
+          </a:ln>
+          <a:effectLst/>
+        </p:spPr>
+        <p:style>
+          <a:lnRef idx="1">
+            <a:schemeClr val="accent1"/>
+          </a:lnRef>
+          <a:fillRef idx="3">
+            <a:schemeClr val="accent1"/>
+          </a:fillRef>
+          <a:effectRef idx="2">
+            <a:schemeClr val="accent1"/>
+          </a:effectRef>
+          <a:fontRef idx="minor">
+            <a:schemeClr val="lt1"/>
+          </a:fontRef>
+        </p:style>
+        <p:txBody>
+          <a:bodyPr rtlCol="0" anchor="ctr"/>
+          <a:lstStyle/>
+          <a:p>
+            <a:pPr algn="ctr"/>
+          </a:p>
+        </p:txBody>
+      </p:sp>
+      <p:sp>
+        <p:nvSpPr>
+          <p:cNvPr id="19" name="TextBox 18"/>
+          <p:cNvSpPr txBox="1"/>
+          <p:nvPr/>
+        </p:nvSpPr>
+        <p:spPr>
+          <a:xfrm>
+            <a:off x="5833872" y="3611879"/>
+            <a:ext cx="5669280" cy="566928"/>
+          </a:xfrm>
+          <a:prstGeom prst="rect">
+            <a:avLst/>
+          </a:prstGeom>
+          <a:noFill/>
+        </p:spPr>
+        <p:txBody>
+          <a:bodyPr wrap="square" anchor="ctr" lIns="0" rIns="0" tIns="0" bIns="0">
+            <a:spAutoFit/>
+          </a:bodyPr>
+          <a:lstStyle/>
+          <a:p>
+            <a:pPr algn="l"/>
+            <a:r>
+              <a:rPr sz="1050" b="0">
+                <a:solidFill>
+                  <a:srgbClr val="1F2937"/>
+                </a:solidFill>
+                <a:latin typeface="Microsoft JhengHei"/>
+                <a:ea typeface="Microsoft JhengHei"/>
+                <a:cs typeface="Microsoft JhengHei"/>
+              </a:rPr>
+              <a:t>KDGap:「知道要用」vs「真的去叫」不一致率 26.5–54%;兩個方向在決策點幾乎垂直</a:t>
+            </a:r>
+          </a:p>
+        </p:txBody>
+      </p:sp>
+      <p:sp>
+        <p:nvSpPr>
+          <p:cNvPr id="20" name="Rounded Rectangle 19"/>
+          <p:cNvSpPr/>
+          <p:nvPr/>
+        </p:nvSpPr>
+        <p:spPr>
+          <a:xfrm>
+            <a:off x="5669280" y="4306824"/>
+            <a:ext cx="5989320" cy="658368"/>
+          </a:xfrm>
+          <a:prstGeom prst="roundRect">
+            <a:avLst>
+              <a:gd name="adj" fmla="val 10000"/>
+            </a:avLst>
+          </a:prstGeom>
+          <a:solidFill>
+            <a:srgbClr val="E0E7FF"/>
+          </a:solidFill>
+          <a:ln>
+            <a:noFill/>
+          </a:ln>
+          <a:effectLst/>
+        </p:spPr>
+        <p:style>
+          <a:lnRef idx="1">
+            <a:schemeClr val="accent1"/>
+          </a:lnRef>
+          <a:fillRef idx="3">
+            <a:schemeClr val="accent1"/>
+          </a:fillRef>
+          <a:effectRef idx="2">
+            <a:schemeClr val="accent1"/>
+          </a:effectRef>
+          <a:fontRef idx="minor">
+            <a:schemeClr val="lt1"/>
+          </a:fontRef>
+        </p:style>
+        <p:txBody>
+          <a:bodyPr rtlCol="0" anchor="ctr"/>
+          <a:lstStyle/>
+          <a:p>
+            <a:pPr algn="ctr"/>
+          </a:p>
+        </p:txBody>
+      </p:sp>
+      <p:sp>
+        <p:nvSpPr>
+          <p:cNvPr id="21" name="TextBox 20"/>
+          <p:cNvSpPr txBox="1"/>
+          <p:nvPr/>
+        </p:nvSpPr>
+        <p:spPr>
+          <a:xfrm>
+            <a:off x="5833872" y="4361688"/>
+            <a:ext cx="5669280" cy="566928"/>
+          </a:xfrm>
+          <a:prstGeom prst="rect">
+            <a:avLst/>
+          </a:prstGeom>
+          <a:noFill/>
+        </p:spPr>
+        <p:txBody>
+          <a:bodyPr wrap="square" anchor="ctr" lIns="0" rIns="0" tIns="0" bIns="0">
+            <a:spAutoFit/>
+          </a:bodyPr>
+          <a:lstStyle/>
+          <a:p>
+            <a:pPr algn="l"/>
+            <a:r>
+              <a:rPr sz="1050" b="0">
+                <a:solidFill>
+                  <a:srgbClr val="1F2937"/>
+                </a:solidFill>
+                <a:latin typeface="Microsoft JhengHei"/>
+                <a:ea typeface="Microsoft JhengHei"/>
+                <a:cs typeface="Microsoft JhengHei"/>
+              </a:rPr>
+              <a:t>Looking:選錯工具的失敗案例中,注意力其實 80% 已聚焦在正確工具上(隨機 21%)</a:t>
+            </a:r>
+          </a:p>
+        </p:txBody>
+      </p:sp>
+      <p:sp>
+        <p:nvSpPr>
+          <p:cNvPr id="22" name="Rounded Rectangle 21"/>
+          <p:cNvSpPr/>
+          <p:nvPr/>
+        </p:nvSpPr>
+        <p:spPr>
+          <a:xfrm>
+            <a:off x="502920" y="5074920"/>
+            <a:ext cx="11155680" cy="1051560"/>
+          </a:xfrm>
+          <a:prstGeom prst="roundRect">
+            <a:avLst>
+              <a:gd name="adj" fmla="val 10000"/>
+            </a:avLst>
+          </a:prstGeom>
+          <a:solidFill>
+            <a:srgbClr val="E0E7FF"/>
+          </a:solidFill>
+          <a:ln>
+            <a:noFill/>
+          </a:ln>
+          <a:effectLst/>
+        </p:spPr>
+        <p:style>
+          <a:lnRef idx="1">
+            <a:schemeClr val="accent1"/>
+          </a:lnRef>
+          <a:fillRef idx="3">
+            <a:schemeClr val="accent1"/>
+          </a:fillRef>
+          <a:effectRef idx="2">
+            <a:schemeClr val="accent1"/>
+          </a:effectRef>
+          <a:fontRef idx="minor">
+            <a:schemeClr val="lt1"/>
+          </a:fontRef>
+        </p:style>
+        <p:txBody>
+          <a:bodyPr rtlCol="0" anchor="ctr"/>
+          <a:lstStyle/>
+          <a:p>
+            <a:pPr algn="ctr"/>
+          </a:p>
+        </p:txBody>
+      </p:sp>
+      <p:sp>
+        <p:nvSpPr>
+          <p:cNvPr id="23" name="TextBox 22"/>
+          <p:cNvSpPr txBox="1"/>
+          <p:nvPr/>
+        </p:nvSpPr>
+        <p:spPr>
+          <a:xfrm>
+            <a:off x="731520" y="5193792"/>
+            <a:ext cx="10698480" cy="868680"/>
+          </a:xfrm>
+          <a:prstGeom prst="rect">
+            <a:avLst/>
+          </a:prstGeom>
+          <a:noFill/>
+        </p:spPr>
+        <p:txBody>
+          <a:bodyPr wrap="square" anchor="t" lIns="0" rIns="0" tIns="0" bIns="0">
+            <a:spAutoFit/>
+          </a:bodyPr>
+          <a:lstStyle/>
+          <a:p>
+            <a:pPr algn="l">
+              <a:spcAft>
+                <a:spcPts val="300"/>
+              </a:spcAft>
+            </a:pPr>
+            <a:r>
+              <a:rPr sz="1250" b="1">
+                <a:solidFill>
+                  <a:srgbClr val="4F46E5"/>
+                </a:solidFill>
+                <a:latin typeface="Microsoft JhengHei"/>
+                <a:ea typeface="Microsoft JhengHei"/>
+                <a:cs typeface="Microsoft JhengHei"/>
+              </a:rPr>
+              <a:t>共同結論:「該用哪個工具」的訊號早就在模型腦內(probe / attention 都讀得到),卡在「表達成行為」那一步。</a:t>
+            </a:r>
+          </a:p>
+          <a:p>
+            <a:pPr algn="l"/>
+            <a:r>
+              <a:rPr sz="1200" b="0">
+                <a:solidFill>
+                  <a:srgbClr val="1F2937"/>
+                </a:solidFill>
+                <a:latin typeface="Microsoft JhengHei"/>
+                <a:ea typeface="Microsoft JhengHei"/>
+                <a:cs typeface="Microsoft JhengHei"/>
+              </a:rPr>
+              <a:t>所以第三層的解法是:不重訓能力、不塞字面 —— 直接在腦內把那個狀態「推」出來。</a:t>
+            </a:r>
+          </a:p>
+        </p:txBody>
+      </p:sp>
+      <p:sp>
+        <p:nvSpPr>
+          <p:cNvPr id="24" name="TextBox 23"/>
+          <p:cNvSpPr txBox="1"/>
+          <p:nvPr/>
+        </p:nvSpPr>
+        <p:spPr>
+          <a:xfrm>
+            <a:off x="502920" y="6473952"/>
+            <a:ext cx="10241280" cy="320040"/>
+          </a:xfrm>
+          <a:prstGeom prst="rect">
+            <a:avLst/>
+          </a:prstGeom>
+          <a:noFill/>
+        </p:spPr>
+        <p:txBody>
+          <a:bodyPr wrap="square" anchor="t" lIns="0" rIns="0" tIns="0" bIns="0">
+            <a:spAutoFit/>
+          </a:bodyPr>
+          <a:lstStyle/>
+          <a:p>
+            <a:pPr algn="l"/>
+            <a:r>
+              <a:rPr sz="950" b="0">
+                <a:solidFill>
+                  <a:srgbClr val="6B7280"/>
+                </a:solidFill>
+                <a:latin typeface="Microsoft JhengHei"/>
+                <a:ea typeface="Microsoft JhengHei"/>
+                <a:cs typeface="Microsoft JhengHei"/>
+              </a:rPr>
+              <a:t>出處:ASA (arXiv:2602.04935)、KnowWhen (2605.09252)、KDGap (2605.14038)、Looking (2606.16364)</a:t>
+            </a:r>
+          </a:p>
+        </p:txBody>
+      </p:sp>
+      <p:sp>
+        <p:nvSpPr>
+          <p:cNvPr id="25" name="TextBox 24"/>
+          <p:cNvSpPr txBox="1"/>
+          <p:nvPr/>
+        </p:nvSpPr>
+        <p:spPr>
+          <a:xfrm>
+            <a:off x="11292840" y="6473952"/>
+            <a:ext cx="457200" cy="320040"/>
+          </a:xfrm>
+          <a:prstGeom prst="rect">
+            <a:avLst/>
+          </a:prstGeom>
+          <a:noFill/>
+        </p:spPr>
+        <p:txBody>
+          <a:bodyPr wrap="square" anchor="t" lIns="0" rIns="0" tIns="0" bIns="0">
+            <a:spAutoFit/>
+          </a:bodyPr>
+          <a:lstStyle/>
+          <a:p>
+            <a:pPr algn="r"/>
+            <a:r>
+              <a:rPr sz="1100" b="0">
+                <a:solidFill>
+                  <a:srgbClr val="6B7280"/>
+                </a:solidFill>
+                <a:latin typeface="Microsoft JhengHei"/>
+                <a:ea typeface="Microsoft JhengHei"/>
+                <a:cs typeface="Microsoft JhengHei"/>
+              </a:rPr>
+              <a:t>16</a:t>
+            </a:r>
+          </a:p>
+        </p:txBody>
+      </p:sp>
+    </p:spTree>
+  </p:cSld>
+  <p:clrMapOvr>
+    <a:masterClrMapping/>
+  </p:clrMapOvr>
+</p:sld>
+</file>
+
+<file path=ppt/slides/slide17.xml><?xml version="1.0" encoding="utf-8"?>
+<p:sld xmlns:a="http://schemas.openxmlformats.org/drawingml/2006/main" xmlns:p="http://schemas.openxmlformats.org/presentationml/2006/main" xmlns:r="http://schemas.openxmlformats.org/officeDocument/2006/relationships">
+  <p:cSld>
+    <p:spTree>
+      <p:nvGrpSpPr>
+        <p:cNvPr id="1" name=""/>
+        <p:cNvGrpSpPr/>
+        <p:nvPr/>
+      </p:nvGrpSpPr>
+      <p:grpSpPr/>
+      <p:sp>
+        <p:nvSpPr>
+          <p:cNvPr id="2" name="TextBox 1"/>
+          <p:cNvSpPr txBox="1"/>
+          <p:nvPr/>
+        </p:nvSpPr>
+        <p:spPr>
+          <a:xfrm>
+            <a:off x="502920" y="256032"/>
+            <a:ext cx="11155680" cy="365760"/>
+          </a:xfrm>
+          <a:prstGeom prst="rect">
+            <a:avLst/>
+          </a:prstGeom>
+          <a:noFill/>
+        </p:spPr>
+        <p:txBody>
+          <a:bodyPr wrap="square" anchor="t" lIns="0" rIns="0" tIns="0" bIns="0">
+            <a:spAutoFit/>
+          </a:bodyPr>
+          <a:lstStyle/>
+          <a:p>
+            <a:pPr algn="l"/>
+            <a:r>
+              <a:rPr sz="1300" b="1">
+                <a:solidFill>
+                  <a:srgbClr val="4F46E5"/>
+                </a:solidFill>
+                <a:latin typeface="Microsoft JhengHei"/>
+                <a:ea typeface="Microsoft JhengHei"/>
+                <a:cs typeface="Microsoft JhengHei"/>
+              </a:rPr>
+              <a:t>新戰線 G|activation 注入(2/2)</a:t>
+            </a:r>
+          </a:p>
+        </p:txBody>
+      </p:sp>
+      <p:sp>
+        <p:nvSpPr>
+          <p:cNvPr id="3" name="TextBox 2"/>
+          <p:cNvSpPr txBox="1"/>
+          <p:nvPr/>
+        </p:nvSpPr>
+        <p:spPr>
+          <a:xfrm>
+            <a:off x="502920" y="566928"/>
+            <a:ext cx="11155680" cy="777240"/>
+          </a:xfrm>
+          <a:prstGeom prst="rect">
+            <a:avLst/>
+          </a:prstGeom>
+          <a:noFill/>
+        </p:spPr>
+        <p:txBody>
+          <a:bodyPr wrap="square" anchor="t" lIns="0" rIns="0" tIns="0" bIns="0">
+            <a:spAutoFit/>
+          </a:bodyPr>
+          <a:lstStyle/>
+          <a:p>
+            <a:pPr algn="l"/>
+            <a:r>
+              <a:rPr sz="2700" b="1">
+                <a:solidFill>
+                  <a:srgbClr val="1F2937"/>
+                </a:solidFill>
+                <a:latin typeface="Microsoft JhengHei"/>
+                <a:ea typeface="Microsoft JhengHei"/>
+                <a:cs typeface="Microsoft JhengHei"/>
+              </a:rPr>
+              <a:t>代表方法與戰績(全部免訓練、KB 級資產)</a:t>
+            </a:r>
+          </a:p>
+        </p:txBody>
+      </p:sp>
+      <p:sp>
+        <p:nvSpPr>
+          <p:cNvPr id="4" name="Rounded Rectangle 3"/>
+          <p:cNvSpPr/>
+          <p:nvPr/>
+        </p:nvSpPr>
+        <p:spPr>
+          <a:xfrm>
+            <a:off x="521207" y="1298448"/>
+            <a:ext cx="1051560" cy="41148"/>
+          </a:xfrm>
+          <a:prstGeom prst="roundRect">
+            <a:avLst>
+              <a:gd name="adj" fmla="val 50000"/>
+            </a:avLst>
+          </a:prstGeom>
+          <a:solidFill>
+            <a:srgbClr val="4F46E5"/>
+          </a:solidFill>
+          <a:ln>
+            <a:noFill/>
+          </a:ln>
+          <a:effectLst/>
+        </p:spPr>
+        <p:style>
+          <a:lnRef idx="1">
+            <a:schemeClr val="accent1"/>
+          </a:lnRef>
+          <a:fillRef idx="3">
+            <a:schemeClr val="accent1"/>
+          </a:fillRef>
+          <a:effectRef idx="2">
+            <a:schemeClr val="accent1"/>
+          </a:effectRef>
+          <a:fontRef idx="minor">
+            <a:schemeClr val="lt1"/>
+          </a:fontRef>
+        </p:style>
+        <p:txBody>
+          <a:bodyPr rtlCol="0" anchor="ctr"/>
+          <a:lstStyle/>
+          <a:p>
+            <a:pPr algn="ctr"/>
+          </a:p>
+        </p:txBody>
+      </p:sp>
+      <p:sp>
+        <p:nvSpPr>
+          <p:cNvPr id="5" name="Rounded Rectangle 4"/>
+          <p:cNvSpPr/>
+          <p:nvPr/>
+        </p:nvSpPr>
+        <p:spPr>
+          <a:xfrm>
+            <a:off x="502920" y="1463040"/>
+            <a:ext cx="5440680" cy="2194560"/>
+          </a:xfrm>
+          <a:prstGeom prst="roundRect">
+            <a:avLst>
+              <a:gd name="adj" fmla="val 10000"/>
+            </a:avLst>
+          </a:prstGeom>
+          <a:solidFill>
+            <a:srgbClr val="E0E7FF"/>
+          </a:solidFill>
+          <a:ln>
+            <a:noFill/>
+          </a:ln>
+          <a:effectLst/>
+        </p:spPr>
+        <p:style>
+          <a:lnRef idx="1">
+            <a:schemeClr val="accent1"/>
+          </a:lnRef>
+          <a:fillRef idx="3">
+            <a:schemeClr val="accent1"/>
+          </a:fillRef>
+          <a:effectRef idx="2">
+            <a:schemeClr val="accent1"/>
+          </a:effectRef>
+          <a:fontRef idx="minor">
+            <a:schemeClr val="lt1"/>
+          </a:fontRef>
+        </p:style>
+        <p:txBody>
+          <a:bodyPr rtlCol="0" anchor="ctr"/>
+          <a:lstStyle/>
+          <a:p>
+            <a:pPr algn="ctr"/>
+          </a:p>
+        </p:txBody>
+      </p:sp>
+      <p:sp>
+        <p:nvSpPr>
+          <p:cNvPr id="6" name="Rounded Rectangle 5"/>
+          <p:cNvSpPr/>
+          <p:nvPr/>
+        </p:nvSpPr>
+        <p:spPr>
+          <a:xfrm>
+            <a:off x="502920" y="1463040"/>
+            <a:ext cx="5440680" cy="82296"/>
+          </a:xfrm>
+          <a:prstGeom prst="roundRect">
+            <a:avLst>
+              <a:gd name="adj" fmla="val 50000"/>
+            </a:avLst>
+          </a:prstGeom>
+          <a:solidFill>
+            <a:srgbClr val="4F46E5"/>
+          </a:solidFill>
+          <a:ln>
+            <a:noFill/>
+          </a:ln>
+          <a:effectLst/>
+        </p:spPr>
+        <p:style>
+          <a:lnRef idx="1">
+            <a:schemeClr val="accent1"/>
+          </a:lnRef>
+          <a:fillRef idx="3">
+            <a:schemeClr val="accent1"/>
+          </a:fillRef>
+          <a:effectRef idx="2">
+            <a:schemeClr val="accent1"/>
+          </a:effectRef>
+          <a:fontRef idx="minor">
+            <a:schemeClr val="lt1"/>
+          </a:fontRef>
+        </p:style>
+        <p:txBody>
+          <a:bodyPr rtlCol="0" anchor="ctr"/>
+          <a:lstStyle/>
+          <a:p>
+            <a:pPr algn="ctr"/>
+          </a:p>
+        </p:txBody>
+      </p:sp>
+      <p:sp>
+        <p:nvSpPr>
+          <p:cNvPr id="7" name="TextBox 6"/>
+          <p:cNvSpPr txBox="1"/>
+          <p:nvPr/>
+        </p:nvSpPr>
+        <p:spPr>
+          <a:xfrm>
+            <a:off x="667512" y="1664208"/>
+            <a:ext cx="5111496" cy="1865376"/>
+          </a:xfrm>
+          <a:prstGeom prst="rect">
+            <a:avLst/>
+          </a:prstGeom>
+          <a:noFill/>
+        </p:spPr>
+        <p:txBody>
+          <a:bodyPr wrap="square" anchor="t" lIns="0" rIns="0" tIns="0" bIns="0">
+            <a:spAutoFit/>
+          </a:bodyPr>
+          <a:lstStyle/>
+          <a:p>
+            <a:pPr algn="l">
+              <a:spcAft>
+                <a:spcPts val="400"/>
+              </a:spcAft>
+            </a:pPr>
+            <a:r>
+              <a:rPr sz="1500" b="1">
+                <a:solidFill>
+                  <a:srgbClr val="4F46E5"/>
+                </a:solidFill>
+                <a:latin typeface="Microsoft JhengHei"/>
+                <a:ea typeface="Microsoft JhengHei"/>
+                <a:cs typeface="Microsoft JhengHei"/>
+              </a:rPr>
+              <a:t>ASA —— 給模型裝「出手開關」(arXiv 2026/02)</a:t>
+            </a:r>
+          </a:p>
+          <a:p>
+            <a:pPr algn="l">
+              <a:spcAft>
+                <a:spcPts val="200"/>
+              </a:spcAft>
+            </a:pPr>
+            <a:r>
+              <a:rPr sz="1100" b="0">
+                <a:solidFill>
+                  <a:srgbClr val="1F2937"/>
+                </a:solidFill>
+                <a:latin typeface="Microsoft JhengHei"/>
+                <a:ea typeface="Microsoft JhengHei"/>
+                <a:cs typeface="Microsoft JhengHei"/>
+              </a:rPr>
+              <a:t>做法:「要工具的題」和「不用的題」各取中層激活、平均相減 = 一根方向;</a:t>
+            </a:r>
+          </a:p>
+          <a:p>
+            <a:pPr algn="l">
+              <a:spcAft>
+                <a:spcPts val="200"/>
+              </a:spcAft>
+            </a:pPr>
+            <a:r>
+              <a:rPr sz="1100" b="0">
+                <a:solidFill>
+                  <a:srgbClr val="1F2937"/>
+                </a:solidFill>
+                <a:latin typeface="Microsoft JhengHei"/>
+                <a:ea typeface="Microsoft JhengHei"/>
+                <a:cs typeface="Microsoft JhengHei"/>
+              </a:rPr>
+              <a:t>小 probe 判信心:夠高 → h += α·v 推它出手;反向注入壓誤觸;不確定就不動。</a:t>
+            </a:r>
+          </a:p>
+          <a:p>
+            <a:pPr algn="l">
+              <a:spcAft>
+                <a:spcPts val="200"/>
+              </a:spcAft>
+            </a:pPr>
+            <a:r>
+              <a:rPr sz="1100" b="0">
+                <a:solidFill>
+                  <a:srgbClr val="1F2937"/>
+                </a:solidFill>
+                <a:latin typeface="Microsoft JhengHei"/>
+                <a:ea typeface="Microsoft JhengHei"/>
+                <a:cs typeface="Microsoft JhengHei"/>
+              </a:rPr>
+              <a:t>戰績:Qwen2.5-1.5B strict F1 0.18→0.50、誤觸率 0.146→0.052 —— 與 LoRA 相當但免訓練(~20KB)。</a:t>
+            </a:r>
+          </a:p>
+        </p:txBody>
+      </p:sp>
+      <p:sp>
+        <p:nvSpPr>
+          <p:cNvPr id="8" name="Rounded Rectangle 7"/>
+          <p:cNvSpPr/>
+          <p:nvPr/>
+        </p:nvSpPr>
+        <p:spPr>
+          <a:xfrm>
+            <a:off x="6217920" y="1463040"/>
+            <a:ext cx="5440680" cy="2194560"/>
+          </a:xfrm>
+          <a:prstGeom prst="roundRect">
+            <a:avLst>
+              <a:gd name="adj" fmla="val 10000"/>
+            </a:avLst>
+          </a:prstGeom>
+          <a:solidFill>
+            <a:srgbClr val="E0E7FF"/>
+          </a:solidFill>
+          <a:ln>
+            <a:noFill/>
+          </a:ln>
+          <a:effectLst/>
+        </p:spPr>
+        <p:style>
+          <a:lnRef idx="1">
+            <a:schemeClr val="accent1"/>
+          </a:lnRef>
+          <a:fillRef idx="3">
+            <a:schemeClr val="accent1"/>
+          </a:fillRef>
+          <a:effectRef idx="2">
+            <a:schemeClr val="accent1"/>
+          </a:effectRef>
+          <a:fontRef idx="minor">
+            <a:schemeClr val="lt1"/>
+          </a:fontRef>
+        </p:style>
+        <p:txBody>
+          <a:bodyPr rtlCol="0" anchor="ctr"/>
+          <a:lstStyle/>
+          <a:p>
+            <a:pPr algn="ctr"/>
+          </a:p>
+        </p:txBody>
+      </p:sp>
+      <p:sp>
+        <p:nvSpPr>
+          <p:cNvPr id="9" name="Rounded Rectangle 8"/>
+          <p:cNvSpPr/>
+          <p:nvPr/>
+        </p:nvSpPr>
+        <p:spPr>
+          <a:xfrm>
+            <a:off x="6217920" y="1463040"/>
+            <a:ext cx="5440680" cy="82296"/>
+          </a:xfrm>
+          <a:prstGeom prst="roundRect">
+            <a:avLst>
+              <a:gd name="adj" fmla="val 50000"/>
+            </a:avLst>
+          </a:prstGeom>
+          <a:solidFill>
+            <a:srgbClr val="4F46E5"/>
+          </a:solidFill>
+          <a:ln>
+            <a:noFill/>
+          </a:ln>
+          <a:effectLst/>
+        </p:spPr>
+        <p:style>
+          <a:lnRef idx="1">
+            <a:schemeClr val="accent1"/>
+          </a:lnRef>
+          <a:fillRef idx="3">
+            <a:schemeClr val="accent1"/>
+          </a:fillRef>
+          <a:effectRef idx="2">
+            <a:schemeClr val="accent1"/>
+          </a:effectRef>
+          <a:fontRef idx="minor">
+            <a:schemeClr val="lt1"/>
+          </a:fontRef>
+        </p:style>
+        <p:txBody>
+          <a:bodyPr rtlCol="0" anchor="ctr"/>
+          <a:lstStyle/>
+          <a:p>
+            <a:pPr algn="ctr"/>
+          </a:p>
+        </p:txBody>
+      </p:sp>
+      <p:sp>
+        <p:nvSpPr>
+          <p:cNvPr id="10" name="TextBox 9"/>
+          <p:cNvSpPr txBox="1"/>
+          <p:nvPr/>
+        </p:nvSpPr>
+        <p:spPr>
+          <a:xfrm>
+            <a:off x="6382512" y="1664208"/>
+            <a:ext cx="5111496" cy="1865376"/>
+          </a:xfrm>
+          <a:prstGeom prst="rect">
+            <a:avLst/>
+          </a:prstGeom>
+          <a:noFill/>
+        </p:spPr>
+        <p:txBody>
+          <a:bodyPr wrap="square" anchor="t" lIns="0" rIns="0" tIns="0" bIns="0">
+            <a:spAutoFit/>
+          </a:bodyPr>
+          <a:lstStyle/>
+          <a:p>
+            <a:pPr algn="l">
+              <a:spcAft>
+                <a:spcPts val="400"/>
+              </a:spcAft>
+            </a:pPr>
+            <a:r>
+              <a:rPr sz="1500" b="1">
+                <a:solidFill>
+                  <a:srgbClr val="4F46E5"/>
+                </a:solidFill>
+                <a:latin typeface="Microsoft JhengHei"/>
+                <a:ea typeface="Microsoft JhengHei"/>
+                <a:cs typeface="Microsoft JhengHei"/>
+              </a:rPr>
+              <a:t>KnowWhen —— probe 讀心 + 幫它起筆(arXiv 2026/05)</a:t>
+            </a:r>
+          </a:p>
+          <a:p>
+            <a:pPr algn="l">
+              <a:spcAft>
+                <a:spcPts val="200"/>
+              </a:spcAft>
+            </a:pPr>
+            <a:r>
+              <a:rPr sz="1100" b="0">
+                <a:solidFill>
+                  <a:srgbClr val="1F2937"/>
+                </a:solidFill>
+                <a:latin typeface="Microsoft JhengHei"/>
+                <a:ea typeface="Microsoft JhengHei"/>
+                <a:cs typeface="Microsoft JhengHei"/>
+              </a:rPr>
+              <a:t>做法:last-token 隱狀態訓線性 probe(AUROC 0.89–0.96);判「不用工具」</a:t>
+            </a:r>
+          </a:p>
+          <a:p>
+            <a:pPr algn="l">
+              <a:spcAft>
+                <a:spcPts val="200"/>
+              </a:spcAft>
+            </a:pPr>
+            <a:r>
+              <a:rPr sz="1100" b="0">
+                <a:solidFill>
+                  <a:srgbClr val="1F2937"/>
+                </a:solidFill>
+                <a:latin typeface="Microsoft JhengHei"/>
+                <a:ea typeface="Microsoft JhengHei"/>
+                <a:cs typeface="Microsoft JhengHei"/>
+              </a:rPr>
+              <a:t>就把回覆開頭先填上「I can solve this directly without using a tool.」讓模型接著寫。</a:t>
+            </a:r>
+          </a:p>
+          <a:p>
+            <a:pPr algn="l">
+              <a:spcAft>
+                <a:spcPts val="200"/>
+              </a:spcAft>
+            </a:pPr>
+            <a:r>
+              <a:rPr sz="1100" b="0">
+                <a:solidFill>
+                  <a:srgbClr val="1F2937"/>
+                </a:solidFill>
+                <a:latin typeface="Microsoft JhengHei"/>
+                <a:ea typeface="Microsoft JhengHei"/>
+                <a:cs typeface="Microsoft JhengHei"/>
+              </a:rPr>
+              <a:t>戰績:省 48% 工具呼叫、準確率只 −1.7%;最佳 prompt baseline 同準確率下只能省 6%。</a:t>
+            </a:r>
+          </a:p>
+        </p:txBody>
+      </p:sp>
+      <p:sp>
+        <p:nvSpPr>
+          <p:cNvPr id="11" name="Rounded Rectangle 10"/>
+          <p:cNvSpPr/>
+          <p:nvPr/>
+        </p:nvSpPr>
+        <p:spPr>
+          <a:xfrm>
+            <a:off x="502920" y="3840480"/>
+            <a:ext cx="5440680" cy="2194560"/>
+          </a:xfrm>
+          <a:prstGeom prst="roundRect">
+            <a:avLst>
+              <a:gd name="adj" fmla="val 10000"/>
+            </a:avLst>
+          </a:prstGeom>
+          <a:solidFill>
+            <a:srgbClr val="E0E7FF"/>
+          </a:solidFill>
+          <a:ln>
+            <a:noFill/>
+          </a:ln>
+          <a:effectLst/>
+        </p:spPr>
+        <p:style>
+          <a:lnRef idx="1">
+            <a:schemeClr val="accent1"/>
+          </a:lnRef>
+          <a:fillRef idx="3">
+            <a:schemeClr val="accent1"/>
+          </a:fillRef>
+          <a:effectRef idx="2">
+            <a:schemeClr val="accent1"/>
+          </a:effectRef>
+          <a:fontRef idx="minor">
+            <a:schemeClr val="lt1"/>
+          </a:fontRef>
+        </p:style>
+        <p:txBody>
+          <a:bodyPr rtlCol="0" anchor="ctr"/>
+          <a:lstStyle/>
+          <a:p>
+            <a:pPr algn="ctr"/>
+          </a:p>
+        </p:txBody>
+      </p:sp>
+      <p:sp>
+        <p:nvSpPr>
+          <p:cNvPr id="12" name="Rounded Rectangle 11"/>
+          <p:cNvSpPr/>
+          <p:nvPr/>
+        </p:nvSpPr>
+        <p:spPr>
+          <a:xfrm>
+            <a:off x="502920" y="3840480"/>
+            <a:ext cx="5440680" cy="82296"/>
+          </a:xfrm>
+          <a:prstGeom prst="roundRect">
+            <a:avLst>
+              <a:gd name="adj" fmla="val 50000"/>
+            </a:avLst>
+          </a:prstGeom>
+          <a:solidFill>
+            <a:srgbClr val="4F46E5"/>
+          </a:solidFill>
+          <a:ln>
+            <a:noFill/>
+          </a:ln>
+          <a:effectLst/>
+        </p:spPr>
+        <p:style>
+          <a:lnRef idx="1">
+            <a:schemeClr val="accent1"/>
+          </a:lnRef>
+          <a:fillRef idx="3">
+            <a:schemeClr val="accent1"/>
+          </a:fillRef>
+          <a:effectRef idx="2">
+            <a:schemeClr val="accent1"/>
+          </a:effectRef>
+          <a:fontRef idx="minor">
+            <a:schemeClr val="lt1"/>
+          </a:fontRef>
+        </p:style>
+        <p:txBody>
+          <a:bodyPr rtlCol="0" anchor="ctr"/>
+          <a:lstStyle/>
+          <a:p>
+            <a:pPr algn="ctr"/>
+          </a:p>
+        </p:txBody>
+      </p:sp>
+      <p:sp>
+        <p:nvSpPr>
+          <p:cNvPr id="13" name="TextBox 12"/>
+          <p:cNvSpPr txBox="1"/>
+          <p:nvPr/>
+        </p:nvSpPr>
+        <p:spPr>
+          <a:xfrm>
+            <a:off x="667512" y="4041648"/>
+            <a:ext cx="5111496" cy="1865376"/>
+          </a:xfrm>
+          <a:prstGeom prst="rect">
+            <a:avLst/>
+          </a:prstGeom>
+          <a:noFill/>
+        </p:spPr>
+        <p:txBody>
+          <a:bodyPr wrap="square" anchor="t" lIns="0" rIns="0" tIns="0" bIns="0">
+            <a:spAutoFit/>
+          </a:bodyPr>
+          <a:lstStyle/>
+          <a:p>
+            <a:pPr algn="l">
+              <a:spcAft>
+                <a:spcPts val="400"/>
+              </a:spcAft>
+            </a:pPr>
+            <a:r>
+              <a:rPr sz="1500" b="1">
+                <a:solidFill>
+                  <a:srgbClr val="4F46E5"/>
+                </a:solidFill>
+                <a:latin typeface="Microsoft JhengHei"/>
+                <a:ea typeface="Microsoft JhengHei"/>
+                <a:cs typeface="Microsoft JhengHei"/>
+              </a:rPr>
+              <a:t>Looking —— 看到 ≠ 選到:修「讀出」不修 prompt(arXiv 2026/06)</a:t>
+            </a:r>
+          </a:p>
+          <a:p>
+            <a:pPr algn="l">
+              <a:spcAft>
+                <a:spcPts val="200"/>
+              </a:spcAft>
+            </a:pPr>
+            <a:r>
+              <a:rPr sz="1100" b="0">
+                <a:solidFill>
+                  <a:srgbClr val="1F2937"/>
+                </a:solidFill>
+                <a:latin typeface="Microsoft JhengHei"/>
+                <a:ea typeface="Microsoft JhengHei"/>
+                <a:cs typeface="Microsoft JhengHei"/>
+              </a:rPr>
+              <a:t>做法:把 prompt 按工具定義切段、量注意力;介入加在 attention logits 或殘差流上。</a:t>
+            </a:r>
+          </a:p>
+          <a:p>
+            <a:pPr algn="l">
+              <a:spcAft>
+                <a:spcPts val="200"/>
+              </a:spcAft>
+            </a:pPr>
+            <a:r>
+              <a:rPr sz="1100" b="0">
+                <a:solidFill>
+                  <a:srgbClr val="1F2937"/>
+                </a:solidFill>
+                <a:latin typeface="Microsoft JhengHei"/>
+                <a:ea typeface="Microsoft JhengHei"/>
+                <a:cs typeface="Microsoft JhengHei"/>
+              </a:rPr>
+              <a:t>戰績:內部介入救回 59–91% 的選錯案例;改 prompt(重排/複製正確工具)只救 ≤23%;</a:t>
+            </a:r>
+          </a:p>
+          <a:p>
+            <a:pPr algn="l">
+              <a:spcAft>
+                <a:spcPts val="200"/>
+              </a:spcAft>
+            </a:pPr>
+            <a:r>
+              <a:rPr sz="1100" b="0">
+                <a:solidFill>
+                  <a:srgbClr val="1F2937"/>
+                </a:solidFill>
+                <a:latin typeface="Microsoft JhengHei"/>
+                <a:ea typeface="Microsoft JhengHei"/>
+                <a:cs typeface="Microsoft JhengHei"/>
+              </a:rPr>
+              <a:t>免答案實用版(讀模型自己的注意力當選擇器)BFCL +11.9 pts、Seal-Tools +14.9 pts。</a:t>
+            </a:r>
+          </a:p>
+        </p:txBody>
+      </p:sp>
+      <p:sp>
+        <p:nvSpPr>
+          <p:cNvPr id="14" name="Rounded Rectangle 13"/>
+          <p:cNvSpPr/>
+          <p:nvPr/>
+        </p:nvSpPr>
+        <p:spPr>
+          <a:xfrm>
+            <a:off x="6217920" y="3840480"/>
+            <a:ext cx="5440680" cy="2194560"/>
+          </a:xfrm>
+          <a:prstGeom prst="roundRect">
+            <a:avLst>
+              <a:gd name="adj" fmla="val 10000"/>
+            </a:avLst>
+          </a:prstGeom>
+          <a:solidFill>
+            <a:srgbClr val="E0E7FF"/>
+          </a:solidFill>
+          <a:ln>
+            <a:noFill/>
+          </a:ln>
+          <a:effectLst/>
+        </p:spPr>
+        <p:style>
+          <a:lnRef idx="1">
+            <a:schemeClr val="accent1"/>
+          </a:lnRef>
+          <a:fillRef idx="3">
+            <a:schemeClr val="accent1"/>
+          </a:fillRef>
+          <a:effectRef idx="2">
+            <a:schemeClr val="accent1"/>
+          </a:effectRef>
+          <a:fontRef idx="minor">
+            <a:schemeClr val="lt1"/>
+          </a:fontRef>
+        </p:style>
+        <p:txBody>
+          <a:bodyPr rtlCol="0" anchor="ctr"/>
+          <a:lstStyle/>
+          <a:p>
+            <a:pPr algn="ctr"/>
+          </a:p>
+        </p:txBody>
+      </p:sp>
+      <p:sp>
+        <p:nvSpPr>
+          <p:cNvPr id="15" name="Rounded Rectangle 14"/>
+          <p:cNvSpPr/>
+          <p:nvPr/>
+        </p:nvSpPr>
+        <p:spPr>
+          <a:xfrm>
+            <a:off x="6217920" y="3840480"/>
+            <a:ext cx="5440680" cy="82296"/>
+          </a:xfrm>
+          <a:prstGeom prst="roundRect">
+            <a:avLst>
+              <a:gd name="adj" fmla="val 50000"/>
+            </a:avLst>
+          </a:prstGeom>
+          <a:solidFill>
+            <a:srgbClr val="4F46E5"/>
+          </a:solidFill>
+          <a:ln>
+            <a:noFill/>
+          </a:ln>
+          <a:effectLst/>
+        </p:spPr>
+        <p:style>
+          <a:lnRef idx="1">
+            <a:schemeClr val="accent1"/>
+          </a:lnRef>
+          <a:fillRef idx="3">
+            <a:schemeClr val="accent1"/>
+          </a:fillRef>
+          <a:effectRef idx="2">
+            <a:schemeClr val="accent1"/>
+          </a:effectRef>
+          <a:fontRef idx="minor">
+            <a:schemeClr val="lt1"/>
+          </a:fontRef>
+        </p:style>
+        <p:txBody>
+          <a:bodyPr rtlCol="0" anchor="ctr"/>
+          <a:lstStyle/>
+          <a:p>
+            <a:pPr algn="ctr"/>
+          </a:p>
+        </p:txBody>
+      </p:sp>
+      <p:sp>
+        <p:nvSpPr>
+          <p:cNvPr id="16" name="TextBox 15"/>
+          <p:cNvSpPr txBox="1"/>
+          <p:nvPr/>
+        </p:nvSpPr>
+        <p:spPr>
+          <a:xfrm>
+            <a:off x="6382512" y="4041648"/>
+            <a:ext cx="5111496" cy="1865376"/>
+          </a:xfrm>
+          <a:prstGeom prst="rect">
+            <a:avLst/>
+          </a:prstGeom>
+          <a:noFill/>
+        </p:spPr>
+        <p:txBody>
+          <a:bodyPr wrap="square" anchor="t" lIns="0" rIns="0" tIns="0" bIns="0">
+            <a:spAutoFit/>
+          </a:bodyPr>
+          <a:lstStyle/>
+          <a:p>
+            <a:pPr algn="l">
+              <a:spcAft>
+                <a:spcPts val="400"/>
+              </a:spcAft>
+            </a:pPr>
+            <a:r>
+              <a:rPr sz="1500" b="1">
+                <a:solidFill>
+                  <a:srgbClr val="4F46E5"/>
+                </a:solidFill>
+                <a:latin typeface="Microsoft JhengHei"/>
+                <a:ea typeface="Microsoft JhengHei"/>
+                <a:cs typeface="Microsoft JhengHei"/>
+              </a:rPr>
+              <a:t>KDGap —— 純診斷,但給了設計準則(arXiv 2026/05)</a:t>
+            </a:r>
+          </a:p>
+          <a:p>
+            <a:pPr algn="l">
+              <a:spcAft>
+                <a:spcPts val="200"/>
+              </a:spcAft>
+            </a:pPr>
+            <a:r>
+              <a:rPr sz="1100" b="0">
+                <a:solidFill>
+                  <a:srgbClr val="1F2937"/>
+                </a:solidFill>
+                <a:latin typeface="Microsoft JhengHei"/>
+                <a:ea typeface="Microsoft JhengHei"/>
+                <a:cs typeface="Microsoft JhengHei"/>
+              </a:rPr>
+              <a:t>做法:同一題無工具跑 10 次定義「這個模型需不需要工具」,再對照實際行為;雙 probe 解剖。</a:t>
+            </a:r>
+          </a:p>
+          <a:p>
+            <a:pPr algn="l">
+              <a:spcAft>
+                <a:spcPts val="200"/>
+              </a:spcAft>
+            </a:pPr>
+            <a:r>
+              <a:rPr sz="1100" b="0">
+                <a:solidFill>
+                  <a:srgbClr val="1F2937"/>
+                </a:solidFill>
+                <a:latin typeface="Microsoft JhengHei"/>
+                <a:ea typeface="Microsoft JhengHei"/>
+                <a:cs typeface="Microsoft JhengHei"/>
+              </a:rPr>
+              <a:t>發現:「認為需要」和「真的去叫」是兩個幾乎垂直的方向;多數失敗在認知→行動的轉換。</a:t>
+            </a:r>
+          </a:p>
+          <a:p>
+            <a:pPr algn="l">
+              <a:spcAft>
+                <a:spcPts val="200"/>
+              </a:spcAft>
+            </a:pPr>
+            <a:r>
+              <a:rPr sz="1100" b="0">
+                <a:solidFill>
+                  <a:srgbClr val="1F2937"/>
+                </a:solidFill>
+                <a:latin typeface="Microsoft JhengHei"/>
+                <a:ea typeface="Microsoft JhengHei"/>
+                <a:cs typeface="Microsoft JhengHei"/>
+              </a:rPr>
+              <a:t>啟示:注入要瞄「行動」方向,或把「知識歸向量、決策歸模型」分工 —— 別只放大知識。</a:t>
+            </a:r>
+          </a:p>
+        </p:txBody>
+      </p:sp>
+      <p:sp>
+        <p:nvSpPr>
+          <p:cNvPr id="17" name="TextBox 16"/>
+          <p:cNvSpPr txBox="1"/>
+          <p:nvPr/>
+        </p:nvSpPr>
+        <p:spPr>
+          <a:xfrm>
+            <a:off x="502920" y="6144768"/>
+            <a:ext cx="11155680" cy="320040"/>
+          </a:xfrm>
+          <a:prstGeom prst="rect">
+            <a:avLst/>
+          </a:prstGeom>
+          <a:noFill/>
+        </p:spPr>
+        <p:txBody>
+          <a:bodyPr wrap="square" anchor="t" lIns="0" rIns="0" tIns="0" bIns="0">
+            <a:spAutoFit/>
+          </a:bodyPr>
+          <a:lstStyle/>
+          <a:p>
+            <a:pPr algn="l"/>
+            <a:r>
+              <a:rPr sz="1150" b="1">
+                <a:solidFill>
+                  <a:srgbClr val="4F46E5"/>
+                </a:solidFill>
+                <a:latin typeface="Microsoft JhengHei"/>
+                <a:ea typeface="Microsoft JhengHei"/>
+                <a:cs typeface="Microsoft JhengHei"/>
+              </a:rPr>
+              <a:t>與 A 類同樣免訓練,但注入點從「字面」下探到「腦內」;皆為 preprint、多在單步觸發/選擇場景 —— 多步規劃上的 activation 注入仍是開放地帶。</a:t>
+            </a:r>
+          </a:p>
+        </p:txBody>
+      </p:sp>
+      <p:sp>
+        <p:nvSpPr>
+          <p:cNvPr id="18" name="TextBox 17"/>
+          <p:cNvSpPr txBox="1"/>
+          <p:nvPr/>
+        </p:nvSpPr>
+        <p:spPr>
+          <a:xfrm>
+            <a:off x="502920" y="6473952"/>
+            <a:ext cx="10241280" cy="320040"/>
+          </a:xfrm>
+          <a:prstGeom prst="rect">
+            <a:avLst/>
+          </a:prstGeom>
+          <a:noFill/>
+        </p:spPr>
+        <p:txBody>
+          <a:bodyPr wrap="square" anchor="t" lIns="0" rIns="0" tIns="0" bIns="0">
+            <a:spAutoFit/>
+          </a:bodyPr>
+          <a:lstStyle/>
+          <a:p>
+            <a:pPr algn="l"/>
+            <a:r>
+              <a:rPr sz="950" b="0">
+                <a:solidFill>
+                  <a:srgbClr val="6B7280"/>
+                </a:solidFill>
+                <a:latin typeface="Microsoft JhengHei"/>
+                <a:ea typeface="Microsoft JhengHei"/>
+                <a:cs typeface="Microsoft JhengHei"/>
+              </a:rPr>
+              <a:t>數字皆原論文;ASA 表格數字部分轉引自第三方重現(官方未開源)</a:t>
+            </a:r>
+          </a:p>
+        </p:txBody>
+      </p:sp>
+      <p:sp>
+        <p:nvSpPr>
+          <p:cNvPr id="19" name="TextBox 18"/>
+          <p:cNvSpPr txBox="1"/>
+          <p:nvPr/>
+        </p:nvSpPr>
+        <p:spPr>
+          <a:xfrm>
+            <a:off x="11292840" y="6473952"/>
+            <a:ext cx="457200" cy="320040"/>
+          </a:xfrm>
+          <a:prstGeom prst="rect">
+            <a:avLst/>
+          </a:prstGeom>
+          <a:noFill/>
+        </p:spPr>
+        <p:txBody>
+          <a:bodyPr wrap="square" anchor="t" lIns="0" rIns="0" tIns="0" bIns="0">
+            <a:spAutoFit/>
+          </a:bodyPr>
+          <a:lstStyle/>
+          <a:p>
+            <a:pPr algn="r"/>
+            <a:r>
+              <a:rPr sz="1100" b="0">
+                <a:solidFill>
+                  <a:srgbClr val="6B7280"/>
+                </a:solidFill>
+                <a:latin typeface="Microsoft JhengHei"/>
+                <a:ea typeface="Microsoft JhengHei"/>
+                <a:cs typeface="Microsoft JhengHei"/>
+              </a:rPr>
+              <a:t>17</a:t>
+            </a:r>
+          </a:p>
+        </p:txBody>
+      </p:sp>
+    </p:spTree>
+  </p:cSld>
+  <p:clrMapOvr>
+    <a:masterClrMapping/>
+  </p:clrMapOvr>
+</p:sld>
+</file>
+
+<file path=ppt/slides/slide18.xml><?xml version="1.0" encoding="utf-8"?>
 <p:sld xmlns:a="http://schemas.openxmlformats.org/drawingml/2006/main" xmlns:p="http://schemas.openxmlformats.org/presentationml/2006/main" xmlns:r="http://schemas.openxmlformats.org/officeDocument/2006/relationships">
   <p:cSld>
     <p:spTree>
@@ -12695,7 +14768,7 @@
                 <a:ea typeface="Microsoft JhengHei"/>
                 <a:cs typeface="Microsoft JhengHei"/>
               </a:rPr>
-              <a:t>16</a:t>
+              <a:t>18</a:t>
             </a:r>
           </a:p>
         </p:txBody>
@@ -12708,7 +14781,7 @@
 </p:sld>
 </file>
 
-<file path=ppt/slides/slide17.xml><?xml version="1.0" encoding="utf-8"?>
+<file path=ppt/slides/slide19.xml><?xml version="1.0" encoding="utf-8"?>
 <p:sld xmlns:a="http://schemas.openxmlformats.org/drawingml/2006/main" xmlns:p="http://schemas.openxmlformats.org/presentationml/2006/main" xmlns:r="http://schemas.openxmlformats.org/officeDocument/2006/relationships">
   <p:cSld>
     <p:spTree>
@@ -13537,7 +15610,7 @@
                 <a:ea typeface="Microsoft JhengHei"/>
                 <a:cs typeface="Microsoft JhengHei"/>
               </a:rPr>
-              <a:t>17</a:t>
+              <a:t>19</a:t>
             </a:r>
           </a:p>
         </p:txBody>
@@ -13550,7 +15623,7 @@
 </p:sld>
 </file>
 
-<file path=ppt/slides/slide18.xml><?xml version="1.0" encoding="utf-8"?>
+<file path=ppt/slides/slide2.xml><?xml version="1.0" encoding="utf-8"?>
 <p:sld xmlns:a="http://schemas.openxmlformats.org/drawingml/2006/main" xmlns:p="http://schemas.openxmlformats.org/presentationml/2006/main" xmlns:r="http://schemas.openxmlformats.org/officeDocument/2006/relationships">
   <p:cSld>
     <p:spTree>
@@ -13592,7 +15665,7 @@
                 <a:ea typeface="Microsoft JhengHei"/>
                 <a:cs typeface="Microsoft JhengHei"/>
               </a:rPr>
-              <a:t>總結(1/2)</a:t>
+              <a:t>背景</a:t>
             </a:r>
           </a:p>
         </p:txBody>
@@ -13629,7 +15702,7 @@
                 <a:ea typeface="Microsoft JhengHei"/>
                 <a:cs typeface="Microsoft JhengHei"/>
               </a:rPr>
-              <a:t>讀完 30 篇論文的五條主線</a:t>
+              <a:t>LLM 不只會聊天:它可以「呼叫工具」做事</a:t>
             </a:r>
           </a:p>
         </p:txBody>
@@ -13682,14 +15755,69 @@
       </p:sp>
       <p:sp>
         <p:nvSpPr>
-          <p:cNvPr id="5" name="Rounded Rectangle 4"/>
+          <p:cNvPr id="5" name="TextBox 4"/>
+          <p:cNvSpPr txBox="1"/>
+          <p:nvPr/>
+        </p:nvSpPr>
+        <p:spPr>
+          <a:xfrm>
+            <a:off x="502920" y="1481328"/>
+            <a:ext cx="5852160" cy="914400"/>
+          </a:xfrm>
+          <a:prstGeom prst="rect">
+            <a:avLst/>
+          </a:prstGeom>
+          <a:noFill/>
+        </p:spPr>
+        <p:txBody>
+          <a:bodyPr wrap="square" anchor="t" lIns="0" rIns="0" tIns="0" bIns="0">
+            <a:spAutoFit/>
+          </a:bodyPr>
+          <a:lstStyle/>
+          <a:p>
+            <a:pPr algn="l">
+              <a:spcAft>
+                <a:spcPts val="200"/>
+              </a:spcAft>
+            </a:pPr>
+            <a:r>
+              <a:rPr sz="1350" b="0">
+                <a:solidFill>
+                  <a:srgbClr val="1F2937"/>
+                </a:solidFill>
+                <a:latin typeface="Microsoft JhengHei"/>
+                <a:ea typeface="Microsoft JhengHei"/>
+                <a:cs typeface="Microsoft JhengHei"/>
+              </a:rPr>
+              <a:t>使用者說「幫我查明天台北天氣再寄給小王」,LLM 不自己瞎編,</a:t>
+            </a:r>
+          </a:p>
+          <a:p>
+            <a:pPr algn="l"/>
+            <a:r>
+              <a:rPr sz="1350" b="0">
+                <a:solidFill>
+                  <a:srgbClr val="1F2937"/>
+                </a:solidFill>
+                <a:latin typeface="Microsoft JhengHei"/>
+                <a:ea typeface="Microsoft JhengHei"/>
+                <a:cs typeface="Microsoft JhengHei"/>
+              </a:rPr>
+              <a:t>而是挑出對的工具(查天氣、寄郵件)、填好參數、依序呼叫 —— 這叫「函式呼叫(function calling)」。</a:t>
+            </a:r>
+          </a:p>
+        </p:txBody>
+      </p:sp>
+      <p:sp>
+        <p:nvSpPr>
+          <p:cNvPr id="6" name="Rounded Rectangle 5"/>
           <p:cNvSpPr/>
           <p:nvPr/>
         </p:nvSpPr>
         <p:spPr>
           <a:xfrm>
-            <a:off x="502920" y="1554480"/>
-            <a:ext cx="11201400" cy="822960"/>
+            <a:off x="731520" y="2880360"/>
+            <a:ext cx="2103120" cy="914400"/>
           </a:xfrm>
           <a:prstGeom prst="roundRect">
             <a:avLst>
@@ -13698,6 +15826,89 @@
           </a:prstGeom>
           <a:solidFill>
             <a:srgbClr val="DBEAFE"/>
+          </a:solidFill>
+          <a:ln w="12700">
+            <a:solidFill>
+              <a:srgbClr val="2563EB"/>
+            </a:solidFill>
+          </a:ln>
+          <a:effectLst/>
+        </p:spPr>
+        <p:style>
+          <a:lnRef idx="1">
+            <a:schemeClr val="accent1"/>
+          </a:lnRef>
+          <a:fillRef idx="3">
+            <a:schemeClr val="accent1"/>
+          </a:fillRef>
+          <a:effectRef idx="2">
+            <a:schemeClr val="accent1"/>
+          </a:effectRef>
+          <a:fontRef idx="minor">
+            <a:schemeClr val="lt1"/>
+          </a:fontRef>
+        </p:style>
+        <p:txBody>
+          <a:bodyPr rtlCol="0" anchor="ctr"/>
+          <a:lstStyle/>
+          <a:p>
+            <a:pPr algn="ctr"/>
+          </a:p>
+        </p:txBody>
+      </p:sp>
+      <p:sp>
+        <p:nvSpPr>
+          <p:cNvPr id="7" name="TextBox 6"/>
+          <p:cNvSpPr txBox="1"/>
+          <p:nvPr/>
+        </p:nvSpPr>
+        <p:spPr>
+          <a:xfrm>
+            <a:off x="777240" y="2880360"/>
+            <a:ext cx="2011679" cy="914400"/>
+          </a:xfrm>
+          <a:prstGeom prst="rect">
+            <a:avLst/>
+          </a:prstGeom>
+          <a:noFill/>
+        </p:spPr>
+        <p:txBody>
+          <a:bodyPr wrap="square" anchor="ctr" lIns="0" rIns="0" tIns="0" bIns="0">
+            <a:spAutoFit/>
+          </a:bodyPr>
+          <a:lstStyle/>
+          <a:p>
+            <a:pPr algn="ctr"/>
+            <a:r>
+              <a:rPr sz="1500" b="1">
+                <a:solidFill>
+                  <a:srgbClr val="2563EB"/>
+                </a:solidFill>
+                <a:latin typeface="Microsoft JhengHei"/>
+                <a:ea typeface="Microsoft JhengHei"/>
+                <a:cs typeface="Microsoft JhengHei"/>
+              </a:rPr>
+              <a:t>LLM(大腦)</a:t>
+            </a:r>
+          </a:p>
+        </p:txBody>
+      </p:sp>
+      <p:sp>
+        <p:nvSpPr>
+          <p:cNvPr id="8" name="Right Arrow 7"/>
+          <p:cNvSpPr/>
+          <p:nvPr/>
+        </p:nvSpPr>
+        <p:spPr>
+          <a:xfrm>
+            <a:off x="2971800" y="3200400"/>
+            <a:ext cx="548640" cy="310896"/>
+          </a:xfrm>
+          <a:prstGeom prst="rightArrow">
+            <a:avLst/>
+          </a:prstGeom>
+          <a:solidFill>
+            <a:srgbClr val="6B7280"/>
           </a:solidFill>
           <a:ln>
             <a:noFill/>
@@ -13728,14 +15939,14 @@
       </p:sp>
       <p:sp>
         <p:nvSpPr>
-          <p:cNvPr id="6" name="Rounded Rectangle 5"/>
+          <p:cNvPr id="9" name="Rounded Rectangle 8"/>
           <p:cNvSpPr/>
           <p:nvPr/>
         </p:nvSpPr>
         <p:spPr>
           <a:xfrm>
-            <a:off x="502920" y="1554480"/>
-            <a:ext cx="566928" cy="822960"/>
+            <a:off x="3703320" y="2121408"/>
+            <a:ext cx="2103120" cy="457200"/>
           </a:xfrm>
           <a:prstGeom prst="roundRect">
             <a:avLst>
@@ -13743,7 +15954,432 @@
             </a:avLst>
           </a:prstGeom>
           <a:solidFill>
-            <a:srgbClr val="2563EB"/>
+            <a:srgbClr val="F3F4F6"/>
+          </a:solidFill>
+          <a:ln w="12700">
+            <a:solidFill>
+              <a:srgbClr val="6B7280"/>
+            </a:solidFill>
+          </a:ln>
+          <a:effectLst/>
+        </p:spPr>
+        <p:style>
+          <a:lnRef idx="1">
+            <a:schemeClr val="accent1"/>
+          </a:lnRef>
+          <a:fillRef idx="3">
+            <a:schemeClr val="accent1"/>
+          </a:fillRef>
+          <a:effectRef idx="2">
+            <a:schemeClr val="accent1"/>
+          </a:effectRef>
+          <a:fontRef idx="minor">
+            <a:schemeClr val="lt1"/>
+          </a:fontRef>
+        </p:style>
+        <p:txBody>
+          <a:bodyPr rtlCol="0" anchor="ctr"/>
+          <a:lstStyle/>
+          <a:p>
+            <a:pPr algn="ctr"/>
+          </a:p>
+        </p:txBody>
+      </p:sp>
+      <p:sp>
+        <p:nvSpPr>
+          <p:cNvPr id="10" name="TextBox 9"/>
+          <p:cNvSpPr txBox="1"/>
+          <p:nvPr/>
+        </p:nvSpPr>
+        <p:spPr>
+          <a:xfrm>
+            <a:off x="3749039" y="2121408"/>
+            <a:ext cx="2011679" cy="457200"/>
+          </a:xfrm>
+          <a:prstGeom prst="rect">
+            <a:avLst/>
+          </a:prstGeom>
+          <a:noFill/>
+        </p:spPr>
+        <p:txBody>
+          <a:bodyPr wrap="square" anchor="ctr" lIns="0" rIns="0" tIns="0" bIns="0">
+            <a:spAutoFit/>
+          </a:bodyPr>
+          <a:lstStyle/>
+          <a:p>
+            <a:pPr algn="ctr"/>
+            <a:r>
+              <a:rPr sz="1150" b="0">
+                <a:solidFill>
+                  <a:srgbClr val="1F2937"/>
+                </a:solidFill>
+                <a:latin typeface="Microsoft JhengHei"/>
+                <a:ea typeface="Microsoft JhengHei"/>
+                <a:cs typeface="Microsoft JhengHei"/>
+              </a:rPr>
+              <a:t>查天氣 API</a:t>
+            </a:r>
+          </a:p>
+        </p:txBody>
+      </p:sp>
+      <p:sp>
+        <p:nvSpPr>
+          <p:cNvPr id="11" name="Rounded Rectangle 10"/>
+          <p:cNvSpPr/>
+          <p:nvPr/>
+        </p:nvSpPr>
+        <p:spPr>
+          <a:xfrm>
+            <a:off x="3703320" y="2688336"/>
+            <a:ext cx="2103120" cy="457200"/>
+          </a:xfrm>
+          <a:prstGeom prst="roundRect">
+            <a:avLst>
+              <a:gd name="adj" fmla="val 10000"/>
+            </a:avLst>
+          </a:prstGeom>
+          <a:solidFill>
+            <a:srgbClr val="F3F4F6"/>
+          </a:solidFill>
+          <a:ln w="12700">
+            <a:solidFill>
+              <a:srgbClr val="6B7280"/>
+            </a:solidFill>
+          </a:ln>
+          <a:effectLst/>
+        </p:spPr>
+        <p:style>
+          <a:lnRef idx="1">
+            <a:schemeClr val="accent1"/>
+          </a:lnRef>
+          <a:fillRef idx="3">
+            <a:schemeClr val="accent1"/>
+          </a:fillRef>
+          <a:effectRef idx="2">
+            <a:schemeClr val="accent1"/>
+          </a:effectRef>
+          <a:fontRef idx="minor">
+            <a:schemeClr val="lt1"/>
+          </a:fontRef>
+        </p:style>
+        <p:txBody>
+          <a:bodyPr rtlCol="0" anchor="ctr"/>
+          <a:lstStyle/>
+          <a:p>
+            <a:pPr algn="ctr"/>
+          </a:p>
+        </p:txBody>
+      </p:sp>
+      <p:sp>
+        <p:nvSpPr>
+          <p:cNvPr id="12" name="TextBox 11"/>
+          <p:cNvSpPr txBox="1"/>
+          <p:nvPr/>
+        </p:nvSpPr>
+        <p:spPr>
+          <a:xfrm>
+            <a:off x="3749039" y="2688336"/>
+            <a:ext cx="2011679" cy="457200"/>
+          </a:xfrm>
+          <a:prstGeom prst="rect">
+            <a:avLst/>
+          </a:prstGeom>
+          <a:noFill/>
+        </p:spPr>
+        <p:txBody>
+          <a:bodyPr wrap="square" anchor="ctr" lIns="0" rIns="0" tIns="0" bIns="0">
+            <a:spAutoFit/>
+          </a:bodyPr>
+          <a:lstStyle/>
+          <a:p>
+            <a:pPr algn="ctr"/>
+            <a:r>
+              <a:rPr sz="1150" b="0">
+                <a:solidFill>
+                  <a:srgbClr val="1F2937"/>
+                </a:solidFill>
+                <a:latin typeface="Microsoft JhengHei"/>
+                <a:ea typeface="Microsoft JhengHei"/>
+                <a:cs typeface="Microsoft JhengHei"/>
+              </a:rPr>
+              <a:t>寄 Email</a:t>
+            </a:r>
+          </a:p>
+        </p:txBody>
+      </p:sp>
+      <p:sp>
+        <p:nvSpPr>
+          <p:cNvPr id="13" name="Rounded Rectangle 12"/>
+          <p:cNvSpPr/>
+          <p:nvPr/>
+        </p:nvSpPr>
+        <p:spPr>
+          <a:xfrm>
+            <a:off x="3703320" y="3255263"/>
+            <a:ext cx="2103120" cy="457200"/>
+          </a:xfrm>
+          <a:prstGeom prst="roundRect">
+            <a:avLst>
+              <a:gd name="adj" fmla="val 10000"/>
+            </a:avLst>
+          </a:prstGeom>
+          <a:solidFill>
+            <a:srgbClr val="F3F4F6"/>
+          </a:solidFill>
+          <a:ln w="12700">
+            <a:solidFill>
+              <a:srgbClr val="6B7280"/>
+            </a:solidFill>
+          </a:ln>
+          <a:effectLst/>
+        </p:spPr>
+        <p:style>
+          <a:lnRef idx="1">
+            <a:schemeClr val="accent1"/>
+          </a:lnRef>
+          <a:fillRef idx="3">
+            <a:schemeClr val="accent1"/>
+          </a:fillRef>
+          <a:effectRef idx="2">
+            <a:schemeClr val="accent1"/>
+          </a:effectRef>
+          <a:fontRef idx="minor">
+            <a:schemeClr val="lt1"/>
+          </a:fontRef>
+        </p:style>
+        <p:txBody>
+          <a:bodyPr rtlCol="0" anchor="ctr"/>
+          <a:lstStyle/>
+          <a:p>
+            <a:pPr algn="ctr"/>
+          </a:p>
+        </p:txBody>
+      </p:sp>
+      <p:sp>
+        <p:nvSpPr>
+          <p:cNvPr id="14" name="TextBox 13"/>
+          <p:cNvSpPr txBox="1"/>
+          <p:nvPr/>
+        </p:nvSpPr>
+        <p:spPr>
+          <a:xfrm>
+            <a:off x="3749039" y="3255263"/>
+            <a:ext cx="2011679" cy="457200"/>
+          </a:xfrm>
+          <a:prstGeom prst="rect">
+            <a:avLst/>
+          </a:prstGeom>
+          <a:noFill/>
+        </p:spPr>
+        <p:txBody>
+          <a:bodyPr wrap="square" anchor="ctr" lIns="0" rIns="0" tIns="0" bIns="0">
+            <a:spAutoFit/>
+          </a:bodyPr>
+          <a:lstStyle/>
+          <a:p>
+            <a:pPr algn="ctr"/>
+            <a:r>
+              <a:rPr sz="1150" b="0">
+                <a:solidFill>
+                  <a:srgbClr val="1F2937"/>
+                </a:solidFill>
+                <a:latin typeface="Microsoft JhengHei"/>
+                <a:ea typeface="Microsoft JhengHei"/>
+                <a:cs typeface="Microsoft JhengHei"/>
+              </a:rPr>
+              <a:t>行事曆</a:t>
+            </a:r>
+          </a:p>
+        </p:txBody>
+      </p:sp>
+      <p:sp>
+        <p:nvSpPr>
+          <p:cNvPr id="15" name="Rounded Rectangle 14"/>
+          <p:cNvSpPr/>
+          <p:nvPr/>
+        </p:nvSpPr>
+        <p:spPr>
+          <a:xfrm>
+            <a:off x="3703320" y="3822191"/>
+            <a:ext cx="2103120" cy="457200"/>
+          </a:xfrm>
+          <a:prstGeom prst="roundRect">
+            <a:avLst>
+              <a:gd name="adj" fmla="val 10000"/>
+            </a:avLst>
+          </a:prstGeom>
+          <a:solidFill>
+            <a:srgbClr val="F3F4F6"/>
+          </a:solidFill>
+          <a:ln w="12700">
+            <a:solidFill>
+              <a:srgbClr val="6B7280"/>
+            </a:solidFill>
+          </a:ln>
+          <a:effectLst/>
+        </p:spPr>
+        <p:style>
+          <a:lnRef idx="1">
+            <a:schemeClr val="accent1"/>
+          </a:lnRef>
+          <a:fillRef idx="3">
+            <a:schemeClr val="accent1"/>
+          </a:fillRef>
+          <a:effectRef idx="2">
+            <a:schemeClr val="accent1"/>
+          </a:effectRef>
+          <a:fontRef idx="minor">
+            <a:schemeClr val="lt1"/>
+          </a:fontRef>
+        </p:style>
+        <p:txBody>
+          <a:bodyPr rtlCol="0" anchor="ctr"/>
+          <a:lstStyle/>
+          <a:p>
+            <a:pPr algn="ctr"/>
+          </a:p>
+        </p:txBody>
+      </p:sp>
+      <p:sp>
+        <p:nvSpPr>
+          <p:cNvPr id="16" name="TextBox 15"/>
+          <p:cNvSpPr txBox="1"/>
+          <p:nvPr/>
+        </p:nvSpPr>
+        <p:spPr>
+          <a:xfrm>
+            <a:off x="3749039" y="3822191"/>
+            <a:ext cx="2011679" cy="457200"/>
+          </a:xfrm>
+          <a:prstGeom prst="rect">
+            <a:avLst/>
+          </a:prstGeom>
+          <a:noFill/>
+        </p:spPr>
+        <p:txBody>
+          <a:bodyPr wrap="square" anchor="ctr" lIns="0" rIns="0" tIns="0" bIns="0">
+            <a:spAutoFit/>
+          </a:bodyPr>
+          <a:lstStyle/>
+          <a:p>
+            <a:pPr algn="ctr"/>
+            <a:r>
+              <a:rPr sz="1150" b="0">
+                <a:solidFill>
+                  <a:srgbClr val="1F2937"/>
+                </a:solidFill>
+                <a:latin typeface="Microsoft JhengHei"/>
+                <a:ea typeface="Microsoft JhengHei"/>
+                <a:cs typeface="Microsoft JhengHei"/>
+              </a:rPr>
+              <a:t>查資料庫</a:t>
+            </a:r>
+          </a:p>
+        </p:txBody>
+      </p:sp>
+      <p:sp>
+        <p:nvSpPr>
+          <p:cNvPr id="17" name="Rounded Rectangle 16"/>
+          <p:cNvSpPr/>
+          <p:nvPr/>
+        </p:nvSpPr>
+        <p:spPr>
+          <a:xfrm>
+            <a:off x="3703320" y="4389120"/>
+            <a:ext cx="2103120" cy="457200"/>
+          </a:xfrm>
+          <a:prstGeom prst="roundRect">
+            <a:avLst>
+              <a:gd name="adj" fmla="val 10000"/>
+            </a:avLst>
+          </a:prstGeom>
+          <a:solidFill>
+            <a:srgbClr val="F3F4F6"/>
+          </a:solidFill>
+          <a:ln w="12700">
+            <a:solidFill>
+              <a:srgbClr val="6B7280"/>
+            </a:solidFill>
+          </a:ln>
+          <a:effectLst/>
+        </p:spPr>
+        <p:style>
+          <a:lnRef idx="1">
+            <a:schemeClr val="accent1"/>
+          </a:lnRef>
+          <a:fillRef idx="3">
+            <a:schemeClr val="accent1"/>
+          </a:fillRef>
+          <a:effectRef idx="2">
+            <a:schemeClr val="accent1"/>
+          </a:effectRef>
+          <a:fontRef idx="minor">
+            <a:schemeClr val="lt1"/>
+          </a:fontRef>
+        </p:style>
+        <p:txBody>
+          <a:bodyPr rtlCol="0" anchor="ctr"/>
+          <a:lstStyle/>
+          <a:p>
+            <a:pPr algn="ctr"/>
+          </a:p>
+        </p:txBody>
+      </p:sp>
+      <p:sp>
+        <p:nvSpPr>
+          <p:cNvPr id="18" name="TextBox 17"/>
+          <p:cNvSpPr txBox="1"/>
+          <p:nvPr/>
+        </p:nvSpPr>
+        <p:spPr>
+          <a:xfrm>
+            <a:off x="3749039" y="4389120"/>
+            <a:ext cx="2011679" cy="457200"/>
+          </a:xfrm>
+          <a:prstGeom prst="rect">
+            <a:avLst/>
+          </a:prstGeom>
+          <a:noFill/>
+        </p:spPr>
+        <p:txBody>
+          <a:bodyPr wrap="square" anchor="ctr" lIns="0" rIns="0" tIns="0" bIns="0">
+            <a:spAutoFit/>
+          </a:bodyPr>
+          <a:lstStyle/>
+          <a:p>
+            <a:pPr algn="ctr"/>
+            <a:r>
+              <a:rPr sz="1150" b="0">
+                <a:solidFill>
+                  <a:srgbClr val="1F2937"/>
+                </a:solidFill>
+                <a:latin typeface="Microsoft JhengHei"/>
+                <a:ea typeface="Microsoft JhengHei"/>
+                <a:cs typeface="Microsoft JhengHei"/>
+              </a:rPr>
+              <a:t>…上千個工具</a:t>
+            </a:r>
+          </a:p>
+        </p:txBody>
+      </p:sp>
+      <p:sp>
+        <p:nvSpPr>
+          <p:cNvPr id="19" name="Rounded Rectangle 18"/>
+          <p:cNvSpPr/>
+          <p:nvPr/>
+        </p:nvSpPr>
+        <p:spPr>
+          <a:xfrm>
+            <a:off x="6400800" y="1920240"/>
+            <a:ext cx="5257800" cy="3977639"/>
+          </a:xfrm>
+          <a:prstGeom prst="roundRect">
+            <a:avLst>
+              <a:gd name="adj" fmla="val 10000"/>
+            </a:avLst>
+          </a:prstGeom>
+          <a:solidFill>
+            <a:srgbClr val="FFEDD5"/>
           </a:solidFill>
           <a:ln>
             <a:noFill/>
@@ -13774,51 +16410,14 @@
       </p:sp>
       <p:sp>
         <p:nvSpPr>
-          <p:cNvPr id="7" name="TextBox 6"/>
+          <p:cNvPr id="20" name="TextBox 19"/>
           <p:cNvSpPr txBox="1"/>
           <p:nvPr/>
         </p:nvSpPr>
         <p:spPr>
           <a:xfrm>
-            <a:off x="502920" y="1554480"/>
-            <a:ext cx="566928" cy="822960"/>
-          </a:xfrm>
-          <a:prstGeom prst="rect">
-            <a:avLst/>
-          </a:prstGeom>
-          <a:noFill/>
-        </p:spPr>
-        <p:txBody>
-          <a:bodyPr wrap="square" anchor="ctr" lIns="0" rIns="0" tIns="0" bIns="0">
-            <a:spAutoFit/>
-          </a:bodyPr>
-          <a:lstStyle/>
-          <a:p>
-            <a:pPr algn="ctr"/>
-            <a:r>
-              <a:rPr sz="2000" b="1">
-                <a:solidFill>
-                  <a:srgbClr val="FFFFFF"/>
-                </a:solidFill>
-                <a:latin typeface="Microsoft JhengHei"/>
-                <a:ea typeface="Microsoft JhengHei"/>
-                <a:cs typeface="Microsoft JhengHei"/>
-              </a:rPr>
-              <a:t>1</a:t>
-            </a:r>
-          </a:p>
-        </p:txBody>
-      </p:sp>
-      <p:sp>
-        <p:nvSpPr>
-          <p:cNvPr id="8" name="TextBox 7"/>
-          <p:cNvSpPr txBox="1"/>
-          <p:nvPr/>
-        </p:nvSpPr>
-        <p:spPr>
-          <a:xfrm>
-            <a:off x="1234440" y="1627632"/>
-            <a:ext cx="10332720" cy="713232"/>
+            <a:off x="6675120" y="2148840"/>
+            <a:ext cx="4754880" cy="3566160"/>
           </a:xfrm>
           <a:prstGeom prst="rect">
             <a:avLst/>
@@ -13833,176 +16432,119 @@
           <a:p>
             <a:pPr algn="l">
               <a:spcAft>
-                <a:spcPts val="100"/>
+                <a:spcPts val="600"/>
               </a:spcAft>
             </a:pPr>
             <a:r>
+              <a:rPr sz="1600" b="1">
+                <a:solidFill>
+                  <a:srgbClr val="C2410C"/>
+                </a:solidFill>
+                <a:latin typeface="Microsoft JhengHei"/>
+                <a:ea typeface="Microsoft JhengHei"/>
+                <a:cs typeface="Microsoft JhengHei"/>
+              </a:rPr>
+              <a:t>MCP(Model Context Protocol)是什麼?</a:t>
+            </a:r>
+          </a:p>
+          <a:p>
+            <a:pPr algn="l">
+              <a:spcAft>
+                <a:spcPts val="400"/>
+              </a:spcAft>
+            </a:pPr>
+            <a:r>
+              <a:rPr sz="1300" b="0">
+                <a:solidFill>
+                  <a:srgbClr val="1F2937"/>
+                </a:solidFill>
+                <a:latin typeface="Microsoft JhengHei"/>
+                <a:ea typeface="Microsoft JhengHei"/>
+                <a:cs typeface="Microsoft JhengHei"/>
+              </a:rPr>
+              <a:t>把「工具怎麼接、怎麼描述、怎麼呼叫」統一成標準協定 —— 像 USB-C:</a:t>
+            </a:r>
+          </a:p>
+          <a:p>
+            <a:pPr algn="l">
+              <a:spcAft>
+                <a:spcPts val="300"/>
+              </a:spcAft>
+            </a:pPr>
+            <a:r>
+              <a:rPr sz="1300" b="0">
+                <a:solidFill>
+                  <a:srgbClr val="1F2937"/>
+                </a:solidFill>
+                <a:latin typeface="Microsoft JhengHei"/>
+                <a:ea typeface="Microsoft JhengHei"/>
+                <a:cs typeface="Microsoft JhengHei"/>
+              </a:rPr>
+              <a:t>• 工具商把功能包成「MCP server」</a:t>
+            </a:r>
+          </a:p>
+          <a:p>
+            <a:pPr algn="l">
+              <a:spcAft>
+                <a:spcPts val="300"/>
+              </a:spcAft>
+            </a:pPr>
+            <a:r>
+              <a:rPr sz="1300" b="0">
+                <a:solidFill>
+                  <a:srgbClr val="1F2937"/>
+                </a:solidFill>
+                <a:latin typeface="Microsoft JhengHei"/>
+                <a:ea typeface="Microsoft JhengHei"/>
+                <a:cs typeface="Microsoft JhengHei"/>
+              </a:rPr>
+              <a:t>• 任何 AI 助理插上就能用,不用逐家客製</a:t>
+            </a:r>
+          </a:p>
+          <a:p>
+            <a:pPr algn="l">
+              <a:spcAft>
+                <a:spcPts val="800"/>
+              </a:spcAft>
+            </a:pPr>
+            <a:r>
+              <a:rPr sz="1300" b="0">
+                <a:solidFill>
+                  <a:srgbClr val="1F2937"/>
+                </a:solidFill>
+                <a:latin typeface="Microsoft JhengHei"/>
+                <a:ea typeface="Microsoft JhengHei"/>
+                <a:cs typeface="Microsoft JhengHei"/>
+              </a:rPr>
+              <a:t>• 代價:生態爆炸 —— 官方社群已有數千個 server / 工具</a:t>
+            </a:r>
+          </a:p>
+          <a:p>
+            <a:pPr algn="l"/>
+            <a:r>
               <a:rPr sz="1350" b="1">
                 <a:solidFill>
-                  <a:srgbClr val="2563EB"/>
-                </a:solidFill>
-                <a:latin typeface="Microsoft JhengHei"/>
-                <a:ea typeface="Microsoft JhengHei"/>
-                <a:cs typeface="Microsoft JhengHei"/>
-              </a:rPr>
-              <a:t>會找文件 ≠ 會找工具</a:t>
-            </a:r>
-          </a:p>
-          <a:p>
-            <a:pPr algn="l"/>
-            <a:r>
-              <a:rPr sz="1150" b="0">
-                <a:solidFill>
-                  <a:srgbClr val="1F2937"/>
-                </a:solidFill>
-                <a:latin typeface="Microsoft JhengHei"/>
-                <a:ea typeface="Microsoft JhengHei"/>
-                <a:cs typeface="Microsoft JhengHei"/>
-              </a:rPr>
-              <a:t>傳統 IR 強者到工具檢索普遍疲軟(ToolRet);「相關」=能把任務做完,需要工具特化訓練。</a:t>
-            </a:r>
-          </a:p>
-        </p:txBody>
-      </p:sp>
-      <p:sp>
-        <p:nvSpPr>
-          <p:cNvPr id="9" name="Rounded Rectangle 8"/>
-          <p:cNvSpPr/>
-          <p:nvPr/>
-        </p:nvSpPr>
-        <p:spPr>
-          <a:xfrm>
-            <a:off x="502920" y="2487168"/>
-            <a:ext cx="11201400" cy="822960"/>
-          </a:xfrm>
-          <a:prstGeom prst="roundRect">
-            <a:avLst>
-              <a:gd name="adj" fmla="val 10000"/>
-            </a:avLst>
-          </a:prstGeom>
-          <a:solidFill>
-            <a:srgbClr val="D5EFEE"/>
-          </a:solidFill>
-          <a:ln>
-            <a:noFill/>
-          </a:ln>
-          <a:effectLst/>
-        </p:spPr>
-        <p:style>
-          <a:lnRef idx="1">
-            <a:schemeClr val="accent1"/>
-          </a:lnRef>
-          <a:fillRef idx="3">
-            <a:schemeClr val="accent1"/>
-          </a:fillRef>
-          <a:effectRef idx="2">
-            <a:schemeClr val="accent1"/>
-          </a:effectRef>
-          <a:fontRef idx="minor">
-            <a:schemeClr val="lt1"/>
-          </a:fontRef>
-        </p:style>
-        <p:txBody>
-          <a:bodyPr rtlCol="0" anchor="ctr"/>
-          <a:lstStyle/>
-          <a:p>
-            <a:pPr algn="ctr"/>
-          </a:p>
-        </p:txBody>
-      </p:sp>
-      <p:sp>
-        <p:nvSpPr>
-          <p:cNvPr id="10" name="Rounded Rectangle 9"/>
-          <p:cNvSpPr/>
-          <p:nvPr/>
-        </p:nvSpPr>
-        <p:spPr>
-          <a:xfrm>
-            <a:off x="502920" y="2487168"/>
-            <a:ext cx="566928" cy="822960"/>
-          </a:xfrm>
-          <a:prstGeom prst="roundRect">
-            <a:avLst>
-              <a:gd name="adj" fmla="val 10000"/>
-            </a:avLst>
-          </a:prstGeom>
-          <a:solidFill>
-            <a:srgbClr val="0E7C7B"/>
-          </a:solidFill>
-          <a:ln>
-            <a:noFill/>
-          </a:ln>
-          <a:effectLst/>
-        </p:spPr>
-        <p:style>
-          <a:lnRef idx="1">
-            <a:schemeClr val="accent1"/>
-          </a:lnRef>
-          <a:fillRef idx="3">
-            <a:schemeClr val="accent1"/>
-          </a:fillRef>
-          <a:effectRef idx="2">
-            <a:schemeClr val="accent1"/>
-          </a:effectRef>
-          <a:fontRef idx="minor">
-            <a:schemeClr val="lt1"/>
-          </a:fontRef>
-        </p:style>
-        <p:txBody>
-          <a:bodyPr rtlCol="0" anchor="ctr"/>
-          <a:lstStyle/>
-          <a:p>
-            <a:pPr algn="ctr"/>
-          </a:p>
-        </p:txBody>
-      </p:sp>
-      <p:sp>
-        <p:nvSpPr>
-          <p:cNvPr id="11" name="TextBox 10"/>
+                  <a:srgbClr val="C2410C"/>
+                </a:solidFill>
+                <a:latin typeface="Microsoft JhengHei"/>
+                <a:ea typeface="Microsoft JhengHei"/>
+                <a:cs typeface="Microsoft JhengHei"/>
+              </a:rPr>
+              <a:t>工具越多,「挑對工具」就越難 → 這就是本簡報的主題</a:t>
+            </a:r>
+          </a:p>
+        </p:txBody>
+      </p:sp>
+      <p:sp>
+        <p:nvSpPr>
+          <p:cNvPr id="21" name="TextBox 20"/>
           <p:cNvSpPr txBox="1"/>
           <p:nvPr/>
         </p:nvSpPr>
         <p:spPr>
           <a:xfrm>
-            <a:off x="502920" y="2487168"/>
-            <a:ext cx="566928" cy="822960"/>
-          </a:xfrm>
-          <a:prstGeom prst="rect">
-            <a:avLst/>
-          </a:prstGeom>
-          <a:noFill/>
-        </p:spPr>
-        <p:txBody>
-          <a:bodyPr wrap="square" anchor="ctr" lIns="0" rIns="0" tIns="0" bIns="0">
-            <a:spAutoFit/>
-          </a:bodyPr>
-          <a:lstStyle/>
-          <a:p>
-            <a:pPr algn="ctr"/>
-            <a:r>
-              <a:rPr sz="2000" b="1">
-                <a:solidFill>
-                  <a:srgbClr val="FFFFFF"/>
-                </a:solidFill>
-                <a:latin typeface="Microsoft JhengHei"/>
-                <a:ea typeface="Microsoft JhengHei"/>
-                <a:cs typeface="Microsoft JhengHei"/>
-              </a:rPr>
-              <a:t>2</a:t>
-            </a:r>
-          </a:p>
-        </p:txBody>
-      </p:sp>
-      <p:sp>
-        <p:nvSpPr>
-          <p:cNvPr id="12" name="TextBox 11"/>
-          <p:cNvSpPr txBox="1"/>
-          <p:nvPr/>
-        </p:nvSpPr>
-        <p:spPr>
-          <a:xfrm>
-            <a:off x="1234440" y="2560320"/>
-            <a:ext cx="10332720" cy="713232"/>
+            <a:off x="502920" y="6035040"/>
+            <a:ext cx="11155680" cy="365760"/>
           </a:xfrm>
           <a:prstGeom prst="rect">
             <a:avLst/>
@@ -14015,178 +16557,31 @@
           </a:bodyPr>
           <a:lstStyle/>
           <a:p>
-            <a:pPr algn="l">
-              <a:spcAft>
-                <a:spcPts val="100"/>
-              </a:spcAft>
-            </a:pPr>
-            <a:r>
-              <a:rPr sz="1350" b="1">
-                <a:solidFill>
-                  <a:srgbClr val="0E7C7B"/>
-                </a:solidFill>
-                <a:latin typeface="Microsoft JhengHei"/>
-                <a:ea typeface="Microsoft JhengHei"/>
-                <a:cs typeface="Microsoft JhengHei"/>
-              </a:rPr>
-              <a:t>省 token = 提準確</a:t>
-            </a:r>
-          </a:p>
-          <a:p>
             <a:pPr algn="l"/>
             <a:r>
-              <a:rPr sz="1150" b="0">
-                <a:solidFill>
-                  <a:srgbClr val="1F2937"/>
-                </a:solidFill>
-                <a:latin typeface="Microsoft JhengHei"/>
-                <a:ea typeface="Microsoft JhengHei"/>
-                <a:cs typeface="Microsoft JhengHei"/>
-              </a:rPr>
-              <a:t>候選越少越乾淨:RAG-MCP 13.62%→43.13%;EasyTool −70%、DTDR −73% 提示長度。</a:t>
-            </a:r>
-          </a:p>
-        </p:txBody>
-      </p:sp>
-      <p:sp>
-        <p:nvSpPr>
-          <p:cNvPr id="13" name="Rounded Rectangle 12"/>
-          <p:cNvSpPr/>
-          <p:nvPr/>
-        </p:nvSpPr>
-        <p:spPr>
-          <a:xfrm>
-            <a:off x="502920" y="3419856"/>
-            <a:ext cx="11201400" cy="822960"/>
-          </a:xfrm>
-          <a:prstGeom prst="roundRect">
-            <a:avLst>
-              <a:gd name="adj" fmla="val 10000"/>
-            </a:avLst>
-          </a:prstGeom>
-          <a:solidFill>
-            <a:srgbClr val="EDE9FE"/>
-          </a:solidFill>
-          <a:ln>
-            <a:noFill/>
-          </a:ln>
-          <a:effectLst/>
-        </p:spPr>
-        <p:style>
-          <a:lnRef idx="1">
-            <a:schemeClr val="accent1"/>
-          </a:lnRef>
-          <a:fillRef idx="3">
-            <a:schemeClr val="accent1"/>
-          </a:fillRef>
-          <a:effectRef idx="2">
-            <a:schemeClr val="accent1"/>
-          </a:effectRef>
-          <a:fontRef idx="minor">
-            <a:schemeClr val="lt1"/>
-          </a:fontRef>
-        </p:style>
-        <p:txBody>
-          <a:bodyPr rtlCol="0" anchor="ctr"/>
-          <a:lstStyle/>
-          <a:p>
-            <a:pPr algn="ctr"/>
-          </a:p>
-        </p:txBody>
-      </p:sp>
-      <p:sp>
-        <p:nvSpPr>
-          <p:cNvPr id="14" name="Rounded Rectangle 13"/>
-          <p:cNvSpPr/>
-          <p:nvPr/>
-        </p:nvSpPr>
-        <p:spPr>
-          <a:xfrm>
-            <a:off x="502920" y="3419856"/>
-            <a:ext cx="566928" cy="822960"/>
-          </a:xfrm>
-          <a:prstGeom prst="roundRect">
-            <a:avLst>
-              <a:gd name="adj" fmla="val 10000"/>
-            </a:avLst>
-          </a:prstGeom>
-          <a:solidFill>
-            <a:srgbClr val="7C3AED"/>
-          </a:solidFill>
-          <a:ln>
-            <a:noFill/>
-          </a:ln>
-          <a:effectLst/>
-        </p:spPr>
-        <p:style>
-          <a:lnRef idx="1">
-            <a:schemeClr val="accent1"/>
-          </a:lnRef>
-          <a:fillRef idx="3">
-            <a:schemeClr val="accent1"/>
-          </a:fillRef>
-          <a:effectRef idx="2">
-            <a:schemeClr val="accent1"/>
-          </a:effectRef>
-          <a:fontRef idx="minor">
-            <a:schemeClr val="lt1"/>
-          </a:fontRef>
-        </p:style>
-        <p:txBody>
-          <a:bodyPr rtlCol="0" anchor="ctr"/>
-          <a:lstStyle/>
-          <a:p>
-            <a:pPr algn="ctr"/>
-          </a:p>
-        </p:txBody>
-      </p:sp>
-      <p:sp>
-        <p:nvSpPr>
-          <p:cNvPr id="15" name="TextBox 14"/>
+              <a:rPr sz="1200" b="0">
+                <a:solidFill>
+                  <a:srgbClr val="6B7280"/>
+                </a:solidFill>
+                <a:latin typeface="Microsoft JhengHei"/>
+                <a:ea typeface="Microsoft JhengHei"/>
+                <a:cs typeface="Microsoft JhengHei"/>
+              </a:rPr>
+              <a:t>類比:一位助理(LLM)+ 一整面牆的工具箱(API / MCP servers)</a:t>
+            </a:r>
+          </a:p>
+        </p:txBody>
+      </p:sp>
+      <p:sp>
+        <p:nvSpPr>
+          <p:cNvPr id="22" name="TextBox 21"/>
           <p:cNvSpPr txBox="1"/>
           <p:nvPr/>
         </p:nvSpPr>
         <p:spPr>
           <a:xfrm>
-            <a:off x="502920" y="3419856"/>
-            <a:ext cx="566928" cy="822960"/>
-          </a:xfrm>
-          <a:prstGeom prst="rect">
-            <a:avLst/>
-          </a:prstGeom>
-          <a:noFill/>
-        </p:spPr>
-        <p:txBody>
-          <a:bodyPr wrap="square" anchor="ctr" lIns="0" rIns="0" tIns="0" bIns="0">
-            <a:spAutoFit/>
-          </a:bodyPr>
-          <a:lstStyle/>
-          <a:p>
-            <a:pPr algn="ctr"/>
-            <a:r>
-              <a:rPr sz="2000" b="1">
-                <a:solidFill>
-                  <a:srgbClr val="FFFFFF"/>
-                </a:solidFill>
-                <a:latin typeface="Microsoft JhengHei"/>
-                <a:ea typeface="Microsoft JhengHei"/>
-                <a:cs typeface="Microsoft JhengHei"/>
-              </a:rPr>
-              <a:t>3</a:t>
-            </a:r>
-          </a:p>
-        </p:txBody>
-      </p:sp>
-      <p:sp>
-        <p:nvSpPr>
-          <p:cNvPr id="16" name="TextBox 15"/>
-          <p:cNvSpPr txBox="1"/>
-          <p:nvPr/>
-        </p:nvSpPr>
-        <p:spPr>
-          <a:xfrm>
-            <a:off x="1234440" y="3493008"/>
-            <a:ext cx="10332720" cy="713232"/>
+            <a:off x="502920" y="6473952"/>
+            <a:ext cx="10241280" cy="320040"/>
           </a:xfrm>
           <a:prstGeom prst="rect">
             <a:avLst/>
@@ -14199,178 +16594,31 @@
           </a:bodyPr>
           <a:lstStyle/>
           <a:p>
-            <a:pPr algn="l">
-              <a:spcAft>
-                <a:spcPts val="100"/>
-              </a:spcAft>
-            </a:pPr>
-            <a:r>
-              <a:rPr sz="1350" b="1">
-                <a:solidFill>
-                  <a:srgbClr val="7C3AED"/>
-                </a:solidFill>
-                <a:latin typeface="Microsoft JhengHei"/>
-                <a:ea typeface="Microsoft JhengHei"/>
-                <a:cs typeface="Microsoft JhengHei"/>
-              </a:rPr>
-              <a:t>訊號一路升級</a:t>
-            </a:r>
-          </a:p>
-          <a:p>
             <a:pPr algn="l"/>
             <a:r>
-              <a:rPr sz="1150" b="0">
-                <a:solidFill>
-                  <a:srgbClr val="1F2937"/>
-                </a:solidFill>
-                <a:latin typeface="Microsoft JhengHei"/>
-                <a:ea typeface="Microsoft JhengHei"/>
-                <a:cs typeface="Microsoft JhengHei"/>
-              </a:rPr>
-              <a:t>語意相似 → 湊齊一套(COLT)→ 工具依賴(TGR/ToolNet)→ 呼叫歷史(DTDR)。</a:t>
-            </a:r>
-          </a:p>
-        </p:txBody>
-      </p:sp>
-      <p:sp>
-        <p:nvSpPr>
-          <p:cNvPr id="17" name="Rounded Rectangle 16"/>
-          <p:cNvSpPr/>
-          <p:nvPr/>
-        </p:nvSpPr>
-        <p:spPr>
-          <a:xfrm>
-            <a:off x="502920" y="4352544"/>
-            <a:ext cx="11201400" cy="822960"/>
-          </a:xfrm>
-          <a:prstGeom prst="roundRect">
-            <a:avLst>
-              <a:gd name="adj" fmla="val 10000"/>
-            </a:avLst>
-          </a:prstGeom>
-          <a:solidFill>
-            <a:srgbClr val="FEF3C7"/>
-          </a:solidFill>
-          <a:ln>
-            <a:noFill/>
-          </a:ln>
-          <a:effectLst/>
-        </p:spPr>
-        <p:style>
-          <a:lnRef idx="1">
-            <a:schemeClr val="accent1"/>
-          </a:lnRef>
-          <a:fillRef idx="3">
-            <a:schemeClr val="accent1"/>
-          </a:fillRef>
-          <a:effectRef idx="2">
-            <a:schemeClr val="accent1"/>
-          </a:effectRef>
-          <a:fontRef idx="minor">
-            <a:schemeClr val="lt1"/>
-          </a:fontRef>
-        </p:style>
-        <p:txBody>
-          <a:bodyPr rtlCol="0" anchor="ctr"/>
-          <a:lstStyle/>
-          <a:p>
-            <a:pPr algn="ctr"/>
-          </a:p>
-        </p:txBody>
-      </p:sp>
-      <p:sp>
-        <p:nvSpPr>
-          <p:cNvPr id="18" name="Rounded Rectangle 17"/>
-          <p:cNvSpPr/>
-          <p:nvPr/>
-        </p:nvSpPr>
-        <p:spPr>
-          <a:xfrm>
-            <a:off x="502920" y="4352544"/>
-            <a:ext cx="566928" cy="822960"/>
-          </a:xfrm>
-          <a:prstGeom prst="roundRect">
-            <a:avLst>
-              <a:gd name="adj" fmla="val 10000"/>
-            </a:avLst>
-          </a:prstGeom>
-          <a:solidFill>
-            <a:srgbClr val="D97706"/>
-          </a:solidFill>
-          <a:ln>
-            <a:noFill/>
-          </a:ln>
-          <a:effectLst/>
-        </p:spPr>
-        <p:style>
-          <a:lnRef idx="1">
-            <a:schemeClr val="accent1"/>
-          </a:lnRef>
-          <a:fillRef idx="3">
-            <a:schemeClr val="accent1"/>
-          </a:fillRef>
-          <a:effectRef idx="2">
-            <a:schemeClr val="accent1"/>
-          </a:effectRef>
-          <a:fontRef idx="minor">
-            <a:schemeClr val="lt1"/>
-          </a:fontRef>
-        </p:style>
-        <p:txBody>
-          <a:bodyPr rtlCol="0" anchor="ctr"/>
-          <a:lstStyle/>
-          <a:p>
-            <a:pPr algn="ctr"/>
-          </a:p>
-        </p:txBody>
-      </p:sp>
-      <p:sp>
-        <p:nvSpPr>
-          <p:cNvPr id="19" name="TextBox 18"/>
+              <a:rPr sz="950" b="0">
+                <a:solidFill>
+                  <a:srgbClr val="6B7280"/>
+                </a:solidFill>
+                <a:latin typeface="Microsoft JhengHei"/>
+                <a:ea typeface="Microsoft JhengHei"/>
+                <a:cs typeface="Microsoft JhengHei"/>
+              </a:rPr>
+              <a:t/>
+            </a:r>
+          </a:p>
+        </p:txBody>
+      </p:sp>
+      <p:sp>
+        <p:nvSpPr>
+          <p:cNvPr id="23" name="TextBox 22"/>
           <p:cNvSpPr txBox="1"/>
           <p:nvPr/>
         </p:nvSpPr>
         <p:spPr>
           <a:xfrm>
-            <a:off x="502920" y="4352544"/>
-            <a:ext cx="566928" cy="822960"/>
-          </a:xfrm>
-          <a:prstGeom prst="rect">
-            <a:avLst/>
-          </a:prstGeom>
-          <a:noFill/>
-        </p:spPr>
-        <p:txBody>
-          <a:bodyPr wrap="square" anchor="ctr" lIns="0" rIns="0" tIns="0" bIns="0">
-            <a:spAutoFit/>
-          </a:bodyPr>
-          <a:lstStyle/>
-          <a:p>
-            <a:pPr algn="ctr"/>
-            <a:r>
-              <a:rPr sz="2000" b="1">
-                <a:solidFill>
-                  <a:srgbClr val="FFFFFF"/>
-                </a:solidFill>
-                <a:latin typeface="Microsoft JhengHei"/>
-                <a:ea typeface="Microsoft JhengHei"/>
-                <a:cs typeface="Microsoft JhengHei"/>
-              </a:rPr>
-              <a:t>4</a:t>
-            </a:r>
-          </a:p>
-        </p:txBody>
-      </p:sp>
-      <p:sp>
-        <p:nvSpPr>
-          <p:cNvPr id="20" name="TextBox 19"/>
-          <p:cNvSpPr txBox="1"/>
-          <p:nvPr/>
-        </p:nvSpPr>
-        <p:spPr>
-          <a:xfrm>
-            <a:off x="1234440" y="4425696"/>
-            <a:ext cx="10332720" cy="713232"/>
+            <a:off x="11292840" y="6473952"/>
+            <a:ext cx="457200" cy="320040"/>
           </a:xfrm>
           <a:prstGeom prst="rect">
             <a:avLst/>
@@ -14383,248 +16631,9 @@
           </a:bodyPr>
           <a:lstStyle/>
           <a:p>
-            <a:pPr algn="l">
-              <a:spcAft>
-                <a:spcPts val="100"/>
-              </a:spcAft>
-            </a:pPr>
-            <a:r>
-              <a:rPr sz="1350" b="1">
-                <a:solidFill>
-                  <a:srgbClr val="D97706"/>
-                </a:solidFill>
-                <a:latin typeface="Microsoft JhengHei"/>
-                <a:ea typeface="Microsoft JhengHei"/>
-                <a:cs typeface="Microsoft JhengHei"/>
-              </a:rPr>
-              <a:t>生成式正面挑戰外掛檢索器</a:t>
-            </a:r>
-          </a:p>
-          <a:p>
-            <a:pPr algn="l"/>
-            <a:r>
-              <a:rPr sz="1150" b="0">
-                <a:solidFill>
-                  <a:srgbClr val="1F2937"/>
-                </a:solidFill>
-                <a:latin typeface="Microsoft JhengHei"/>
-                <a:ea typeface="Microsoft JhengHei"/>
-                <a:cs typeface="Microsoft JhengHei"/>
-              </a:rPr>
-              <a:t>工具=詞元:ToolGen 47k 工具贏過訓練雙塔;Octopus 端側 99.5%/0.38s。代價:工具變動要動模型。</a:t>
-            </a:r>
-          </a:p>
-        </p:txBody>
-      </p:sp>
-      <p:sp>
-        <p:nvSpPr>
-          <p:cNvPr id="21" name="Rounded Rectangle 20"/>
-          <p:cNvSpPr/>
-          <p:nvPr/>
-        </p:nvSpPr>
-        <p:spPr>
-          <a:xfrm>
-            <a:off x="502920" y="5285232"/>
-            <a:ext cx="11201400" cy="822960"/>
-          </a:xfrm>
-          <a:prstGeom prst="roundRect">
-            <a:avLst>
-              <a:gd name="adj" fmla="val 10000"/>
-            </a:avLst>
-          </a:prstGeom>
-          <a:solidFill>
-            <a:srgbClr val="D1FAE5"/>
-          </a:solidFill>
-          <a:ln>
-            <a:noFill/>
-          </a:ln>
-          <a:effectLst/>
-        </p:spPr>
-        <p:style>
-          <a:lnRef idx="1">
-            <a:schemeClr val="accent1"/>
-          </a:lnRef>
-          <a:fillRef idx="3">
-            <a:schemeClr val="accent1"/>
-          </a:fillRef>
-          <a:effectRef idx="2">
-            <a:schemeClr val="accent1"/>
-          </a:effectRef>
-          <a:fontRef idx="minor">
-            <a:schemeClr val="lt1"/>
-          </a:fontRef>
-        </p:style>
-        <p:txBody>
-          <a:bodyPr rtlCol="0" anchor="ctr"/>
-          <a:lstStyle/>
-          <a:p>
-            <a:pPr algn="ctr"/>
-          </a:p>
-        </p:txBody>
-      </p:sp>
-      <p:sp>
-        <p:nvSpPr>
-          <p:cNvPr id="22" name="Rounded Rectangle 21"/>
-          <p:cNvSpPr/>
-          <p:nvPr/>
-        </p:nvSpPr>
-        <p:spPr>
-          <a:xfrm>
-            <a:off x="502920" y="5285232"/>
-            <a:ext cx="566928" cy="822960"/>
-          </a:xfrm>
-          <a:prstGeom prst="roundRect">
-            <a:avLst>
-              <a:gd name="adj" fmla="val 10000"/>
-            </a:avLst>
-          </a:prstGeom>
-          <a:solidFill>
-            <a:srgbClr val="059669"/>
-          </a:solidFill>
-          <a:ln>
-            <a:noFill/>
-          </a:ln>
-          <a:effectLst/>
-        </p:spPr>
-        <p:style>
-          <a:lnRef idx="1">
-            <a:schemeClr val="accent1"/>
-          </a:lnRef>
-          <a:fillRef idx="3">
-            <a:schemeClr val="accent1"/>
-          </a:fillRef>
-          <a:effectRef idx="2">
-            <a:schemeClr val="accent1"/>
-          </a:effectRef>
-          <a:fontRef idx="minor">
-            <a:schemeClr val="lt1"/>
-          </a:fontRef>
-        </p:style>
-        <p:txBody>
-          <a:bodyPr rtlCol="0" anchor="ctr"/>
-          <a:lstStyle/>
-          <a:p>
-            <a:pPr algn="ctr"/>
-          </a:p>
-        </p:txBody>
-      </p:sp>
-      <p:sp>
-        <p:nvSpPr>
-          <p:cNvPr id="23" name="TextBox 22"/>
-          <p:cNvSpPr txBox="1"/>
-          <p:nvPr/>
-        </p:nvSpPr>
-        <p:spPr>
-          <a:xfrm>
-            <a:off x="502920" y="5285232"/>
-            <a:ext cx="566928" cy="822960"/>
-          </a:xfrm>
-          <a:prstGeom prst="rect">
-            <a:avLst/>
-          </a:prstGeom>
-          <a:noFill/>
-        </p:spPr>
-        <p:txBody>
-          <a:bodyPr wrap="square" anchor="ctr" lIns="0" rIns="0" tIns="0" bIns="0">
-            <a:spAutoFit/>
-          </a:bodyPr>
-          <a:lstStyle/>
-          <a:p>
-            <a:pPr algn="ctr"/>
-            <a:r>
-              <a:rPr sz="2000" b="1">
-                <a:solidFill>
-                  <a:srgbClr val="FFFFFF"/>
-                </a:solidFill>
-                <a:latin typeface="Microsoft JhengHei"/>
-                <a:ea typeface="Microsoft JhengHei"/>
-                <a:cs typeface="Microsoft JhengHei"/>
-              </a:rPr>
-              <a:t>5</a:t>
-            </a:r>
-          </a:p>
-        </p:txBody>
-      </p:sp>
-      <p:sp>
-        <p:nvSpPr>
-          <p:cNvPr id="24" name="TextBox 23"/>
-          <p:cNvSpPr txBox="1"/>
-          <p:nvPr/>
-        </p:nvSpPr>
-        <p:spPr>
-          <a:xfrm>
-            <a:off x="1234440" y="5358384"/>
-            <a:ext cx="10332720" cy="713232"/>
-          </a:xfrm>
-          <a:prstGeom prst="rect">
-            <a:avLst/>
-          </a:prstGeom>
-          <a:noFill/>
-        </p:spPr>
-        <p:txBody>
-          <a:bodyPr wrap="square" anchor="t" lIns="0" rIns="0" tIns="0" bIns="0">
-            <a:spAutoFit/>
-          </a:bodyPr>
-          <a:lstStyle/>
-          <a:p>
-            <a:pPr algn="l">
-              <a:spcAft>
-                <a:spcPts val="100"/>
-              </a:spcAft>
-            </a:pPr>
-            <a:r>
-              <a:rPr sz="1350" b="1">
-                <a:solidFill>
-                  <a:srgbClr val="059669"/>
-                </a:solidFill>
-                <a:latin typeface="Microsoft JhengHei"/>
-                <a:ea typeface="Microsoft JhengHei"/>
-                <a:cs typeface="Microsoft JhengHei"/>
-              </a:rPr>
-              <a:t>檢索器與呼叫端要一起設計;MCP 把一切放大</a:t>
-            </a:r>
-          </a:p>
-          <a:p>
-            <a:pPr algn="l"/>
-            <a:r>
-              <a:rPr sz="1150" b="0">
-                <a:solidFill>
-                  <a:srgbClr val="1F2937"/>
-                </a:solidFill>
-                <a:latin typeface="Microsoft JhengHei"/>
-                <a:ea typeface="Microsoft JhengHei"/>
-                <a:cs typeface="Microsoft JhengHei"/>
-              </a:rPr>
-              <a:t>Gorilla 訓練時就餵檢索文件、Hammer 學會拒答;MCP 的動態生態催生主動請求(MCP-Zero)與自動同步(ScaleMCP)。</a:t>
-            </a:r>
-          </a:p>
-        </p:txBody>
-      </p:sp>
-      <p:sp>
-        <p:nvSpPr>
-          <p:cNvPr id="25" name="TextBox 24"/>
-          <p:cNvSpPr txBox="1"/>
-          <p:nvPr/>
-        </p:nvSpPr>
-        <p:spPr>
-          <a:xfrm>
-            <a:off x="502920" y="6473952"/>
-            <a:ext cx="10241280" cy="320040"/>
-          </a:xfrm>
-          <a:prstGeom prst="rect">
-            <a:avLst/>
-          </a:prstGeom>
-          <a:noFill/>
-        </p:spPr>
-        <p:txBody>
-          <a:bodyPr wrap="square" anchor="t" lIns="0" rIns="0" tIns="0" bIns="0">
-            <a:spAutoFit/>
-          </a:bodyPr>
-          <a:lstStyle/>
-          <a:p>
-            <a:pPr algn="l"/>
-            <a:r>
-              <a:rPr sz="950" b="0">
+            <a:pPr algn="r"/>
+            <a:r>
+              <a:rPr sz="1100" b="0">
                 <a:solidFill>
                   <a:srgbClr val="6B7280"/>
                 </a:solidFill>
@@ -14632,44 +16641,7 @@
                 <a:ea typeface="Microsoft JhengHei"/>
                 <a:cs typeface="Microsoft JhengHei"/>
               </a:rPr>
-              <a:t/>
-            </a:r>
-          </a:p>
-        </p:txBody>
-      </p:sp>
-      <p:sp>
-        <p:nvSpPr>
-          <p:cNvPr id="26" name="TextBox 25"/>
-          <p:cNvSpPr txBox="1"/>
-          <p:nvPr/>
-        </p:nvSpPr>
-        <p:spPr>
-          <a:xfrm>
-            <a:off x="11292840" y="6473952"/>
-            <a:ext cx="457200" cy="320040"/>
-          </a:xfrm>
-          <a:prstGeom prst="rect">
-            <a:avLst/>
-          </a:prstGeom>
-          <a:noFill/>
-        </p:spPr>
-        <p:txBody>
-          <a:bodyPr wrap="square" anchor="t" lIns="0" rIns="0" tIns="0" bIns="0">
-            <a:spAutoFit/>
-          </a:bodyPr>
-          <a:lstStyle/>
-          <a:p>
-            <a:pPr algn="r"/>
-            <a:r>
-              <a:rPr sz="1100" b="0">
-                <a:solidFill>
-                  <a:srgbClr val="6B7280"/>
-                </a:solidFill>
-                <a:latin typeface="Microsoft JhengHei"/>
-                <a:ea typeface="Microsoft JhengHei"/>
-                <a:cs typeface="Microsoft JhengHei"/>
-              </a:rPr>
-              <a:t>18</a:t>
+              <a:t>2</a:t>
             </a:r>
           </a:p>
         </p:txBody>
@@ -14682,7 +16654,1323 @@
 </p:sld>
 </file>
 
-<file path=ppt/slides/slide19.xml><?xml version="1.0" encoding="utf-8"?>
+<file path=ppt/slides/slide20.xml><?xml version="1.0" encoding="utf-8"?>
+<p:sld xmlns:a="http://schemas.openxmlformats.org/drawingml/2006/main" xmlns:p="http://schemas.openxmlformats.org/presentationml/2006/main" xmlns:r="http://schemas.openxmlformats.org/officeDocument/2006/relationships">
+  <p:cSld>
+    <p:spTree>
+      <p:nvGrpSpPr>
+        <p:cNvPr id="1" name=""/>
+        <p:cNvGrpSpPr/>
+        <p:nvPr/>
+      </p:nvGrpSpPr>
+      <p:grpSpPr/>
+      <p:sp>
+        <p:nvSpPr>
+          <p:cNvPr id="2" name="TextBox 1"/>
+          <p:cNvSpPr txBox="1"/>
+          <p:nvPr/>
+        </p:nvSpPr>
+        <p:spPr>
+          <a:xfrm>
+            <a:off x="502920" y="256032"/>
+            <a:ext cx="11155680" cy="365760"/>
+          </a:xfrm>
+          <a:prstGeom prst="rect">
+            <a:avLst/>
+          </a:prstGeom>
+          <a:noFill/>
+        </p:spPr>
+        <p:txBody>
+          <a:bodyPr wrap="square" anchor="t" lIns="0" rIns="0" tIns="0" bIns="0">
+            <a:spAutoFit/>
+          </a:bodyPr>
+          <a:lstStyle/>
+          <a:p>
+            <a:pPr algn="l"/>
+            <a:r>
+              <a:rPr sz="1300" b="1">
+                <a:solidFill>
+                  <a:srgbClr val="6B7280"/>
+                </a:solidFill>
+                <a:latin typeface="Microsoft JhengHei"/>
+                <a:ea typeface="Microsoft JhengHei"/>
+                <a:cs typeface="Microsoft JhengHei"/>
+              </a:rPr>
+              <a:t>總結(1/2)</a:t>
+            </a:r>
+          </a:p>
+        </p:txBody>
+      </p:sp>
+      <p:sp>
+        <p:nvSpPr>
+          <p:cNvPr id="3" name="TextBox 2"/>
+          <p:cNvSpPr txBox="1"/>
+          <p:nvPr/>
+        </p:nvSpPr>
+        <p:spPr>
+          <a:xfrm>
+            <a:off x="502920" y="566928"/>
+            <a:ext cx="11155680" cy="777240"/>
+          </a:xfrm>
+          <a:prstGeom prst="rect">
+            <a:avLst/>
+          </a:prstGeom>
+          <a:noFill/>
+        </p:spPr>
+        <p:txBody>
+          <a:bodyPr wrap="square" anchor="t" lIns="0" rIns="0" tIns="0" bIns="0">
+            <a:spAutoFit/>
+          </a:bodyPr>
+          <a:lstStyle/>
+          <a:p>
+            <a:pPr algn="l"/>
+            <a:r>
+              <a:rPr sz="2700" b="1">
+                <a:solidFill>
+                  <a:srgbClr val="1F2937"/>
+                </a:solidFill>
+                <a:latin typeface="Microsoft JhengHei"/>
+                <a:ea typeface="Microsoft JhengHei"/>
+                <a:cs typeface="Microsoft JhengHei"/>
+              </a:rPr>
+              <a:t>讀完 34 篇論文的六條主線</a:t>
+            </a:r>
+          </a:p>
+        </p:txBody>
+      </p:sp>
+      <p:sp>
+        <p:nvSpPr>
+          <p:cNvPr id="4" name="Rounded Rectangle 3"/>
+          <p:cNvSpPr/>
+          <p:nvPr/>
+        </p:nvSpPr>
+        <p:spPr>
+          <a:xfrm>
+            <a:off x="521207" y="1298448"/>
+            <a:ext cx="1051560" cy="41148"/>
+          </a:xfrm>
+          <a:prstGeom prst="roundRect">
+            <a:avLst>
+              <a:gd name="adj" fmla="val 50000"/>
+            </a:avLst>
+          </a:prstGeom>
+          <a:solidFill>
+            <a:srgbClr val="2563EB"/>
+          </a:solidFill>
+          <a:ln>
+            <a:noFill/>
+          </a:ln>
+          <a:effectLst/>
+        </p:spPr>
+        <p:style>
+          <a:lnRef idx="1">
+            <a:schemeClr val="accent1"/>
+          </a:lnRef>
+          <a:fillRef idx="3">
+            <a:schemeClr val="accent1"/>
+          </a:fillRef>
+          <a:effectRef idx="2">
+            <a:schemeClr val="accent1"/>
+          </a:effectRef>
+          <a:fontRef idx="minor">
+            <a:schemeClr val="lt1"/>
+          </a:fontRef>
+        </p:style>
+        <p:txBody>
+          <a:bodyPr rtlCol="0" anchor="ctr"/>
+          <a:lstStyle/>
+          <a:p>
+            <a:pPr algn="ctr"/>
+          </a:p>
+        </p:txBody>
+      </p:sp>
+      <p:sp>
+        <p:nvSpPr>
+          <p:cNvPr id="5" name="Rounded Rectangle 4"/>
+          <p:cNvSpPr/>
+          <p:nvPr/>
+        </p:nvSpPr>
+        <p:spPr>
+          <a:xfrm>
+            <a:off x="502920" y="1463040"/>
+            <a:ext cx="11201400" cy="713232"/>
+          </a:xfrm>
+          <a:prstGeom prst="roundRect">
+            <a:avLst>
+              <a:gd name="adj" fmla="val 10000"/>
+            </a:avLst>
+          </a:prstGeom>
+          <a:solidFill>
+            <a:srgbClr val="DBEAFE"/>
+          </a:solidFill>
+          <a:ln>
+            <a:noFill/>
+          </a:ln>
+          <a:effectLst/>
+        </p:spPr>
+        <p:style>
+          <a:lnRef idx="1">
+            <a:schemeClr val="accent1"/>
+          </a:lnRef>
+          <a:fillRef idx="3">
+            <a:schemeClr val="accent1"/>
+          </a:fillRef>
+          <a:effectRef idx="2">
+            <a:schemeClr val="accent1"/>
+          </a:effectRef>
+          <a:fontRef idx="minor">
+            <a:schemeClr val="lt1"/>
+          </a:fontRef>
+        </p:style>
+        <p:txBody>
+          <a:bodyPr rtlCol="0" anchor="ctr"/>
+          <a:lstStyle/>
+          <a:p>
+            <a:pPr algn="ctr"/>
+          </a:p>
+        </p:txBody>
+      </p:sp>
+      <p:sp>
+        <p:nvSpPr>
+          <p:cNvPr id="6" name="Rounded Rectangle 5"/>
+          <p:cNvSpPr/>
+          <p:nvPr/>
+        </p:nvSpPr>
+        <p:spPr>
+          <a:xfrm>
+            <a:off x="502920" y="1463040"/>
+            <a:ext cx="566928" cy="713232"/>
+          </a:xfrm>
+          <a:prstGeom prst="roundRect">
+            <a:avLst>
+              <a:gd name="adj" fmla="val 10000"/>
+            </a:avLst>
+          </a:prstGeom>
+          <a:solidFill>
+            <a:srgbClr val="2563EB"/>
+          </a:solidFill>
+          <a:ln>
+            <a:noFill/>
+          </a:ln>
+          <a:effectLst/>
+        </p:spPr>
+        <p:style>
+          <a:lnRef idx="1">
+            <a:schemeClr val="accent1"/>
+          </a:lnRef>
+          <a:fillRef idx="3">
+            <a:schemeClr val="accent1"/>
+          </a:fillRef>
+          <a:effectRef idx="2">
+            <a:schemeClr val="accent1"/>
+          </a:effectRef>
+          <a:fontRef idx="minor">
+            <a:schemeClr val="lt1"/>
+          </a:fontRef>
+        </p:style>
+        <p:txBody>
+          <a:bodyPr rtlCol="0" anchor="ctr"/>
+          <a:lstStyle/>
+          <a:p>
+            <a:pPr algn="ctr"/>
+          </a:p>
+        </p:txBody>
+      </p:sp>
+      <p:sp>
+        <p:nvSpPr>
+          <p:cNvPr id="7" name="TextBox 6"/>
+          <p:cNvSpPr txBox="1"/>
+          <p:nvPr/>
+        </p:nvSpPr>
+        <p:spPr>
+          <a:xfrm>
+            <a:off x="502920" y="1463040"/>
+            <a:ext cx="566928" cy="713232"/>
+          </a:xfrm>
+          <a:prstGeom prst="rect">
+            <a:avLst/>
+          </a:prstGeom>
+          <a:noFill/>
+        </p:spPr>
+        <p:txBody>
+          <a:bodyPr wrap="square" anchor="ctr" lIns="0" rIns="0" tIns="0" bIns="0">
+            <a:spAutoFit/>
+          </a:bodyPr>
+          <a:lstStyle/>
+          <a:p>
+            <a:pPr algn="ctr"/>
+            <a:r>
+              <a:rPr sz="1800" b="1">
+                <a:solidFill>
+                  <a:srgbClr val="FFFFFF"/>
+                </a:solidFill>
+                <a:latin typeface="Microsoft JhengHei"/>
+                <a:ea typeface="Microsoft JhengHei"/>
+                <a:cs typeface="Microsoft JhengHei"/>
+              </a:rPr>
+              <a:t>1</a:t>
+            </a:r>
+          </a:p>
+        </p:txBody>
+      </p:sp>
+      <p:sp>
+        <p:nvSpPr>
+          <p:cNvPr id="8" name="TextBox 7"/>
+          <p:cNvSpPr txBox="1"/>
+          <p:nvPr/>
+        </p:nvSpPr>
+        <p:spPr>
+          <a:xfrm>
+            <a:off x="1234440" y="1517904"/>
+            <a:ext cx="10332720" cy="621792"/>
+          </a:xfrm>
+          <a:prstGeom prst="rect">
+            <a:avLst/>
+          </a:prstGeom>
+          <a:noFill/>
+        </p:spPr>
+        <p:txBody>
+          <a:bodyPr wrap="square" anchor="t" lIns="0" rIns="0" tIns="0" bIns="0">
+            <a:spAutoFit/>
+          </a:bodyPr>
+          <a:lstStyle/>
+          <a:p>
+            <a:pPr algn="l">
+              <a:spcAft>
+                <a:spcPts val="100"/>
+              </a:spcAft>
+            </a:pPr>
+            <a:r>
+              <a:rPr sz="1250" b="1">
+                <a:solidFill>
+                  <a:srgbClr val="2563EB"/>
+                </a:solidFill>
+                <a:latin typeface="Microsoft JhengHei"/>
+                <a:ea typeface="Microsoft JhengHei"/>
+                <a:cs typeface="Microsoft JhengHei"/>
+              </a:rPr>
+              <a:t>會找文件 ≠ 會找工具</a:t>
+            </a:r>
+          </a:p>
+          <a:p>
+            <a:pPr algn="l"/>
+            <a:r>
+              <a:rPr sz="1050" b="0">
+                <a:solidFill>
+                  <a:srgbClr val="1F2937"/>
+                </a:solidFill>
+                <a:latin typeface="Microsoft JhengHei"/>
+                <a:ea typeface="Microsoft JhengHei"/>
+                <a:cs typeface="Microsoft JhengHei"/>
+              </a:rPr>
+              <a:t>傳統 IR 強者到工具檢索普遍疲軟(ToolRet);「相關」=能把任務做完,需要工具特化訓練。</a:t>
+            </a:r>
+          </a:p>
+        </p:txBody>
+      </p:sp>
+      <p:sp>
+        <p:nvSpPr>
+          <p:cNvPr id="9" name="Rounded Rectangle 8"/>
+          <p:cNvSpPr/>
+          <p:nvPr/>
+        </p:nvSpPr>
+        <p:spPr>
+          <a:xfrm>
+            <a:off x="502920" y="2267712"/>
+            <a:ext cx="11201400" cy="713232"/>
+          </a:xfrm>
+          <a:prstGeom prst="roundRect">
+            <a:avLst>
+              <a:gd name="adj" fmla="val 10000"/>
+            </a:avLst>
+          </a:prstGeom>
+          <a:solidFill>
+            <a:srgbClr val="D5EFEE"/>
+          </a:solidFill>
+          <a:ln>
+            <a:noFill/>
+          </a:ln>
+          <a:effectLst/>
+        </p:spPr>
+        <p:style>
+          <a:lnRef idx="1">
+            <a:schemeClr val="accent1"/>
+          </a:lnRef>
+          <a:fillRef idx="3">
+            <a:schemeClr val="accent1"/>
+          </a:fillRef>
+          <a:effectRef idx="2">
+            <a:schemeClr val="accent1"/>
+          </a:effectRef>
+          <a:fontRef idx="minor">
+            <a:schemeClr val="lt1"/>
+          </a:fontRef>
+        </p:style>
+        <p:txBody>
+          <a:bodyPr rtlCol="0" anchor="ctr"/>
+          <a:lstStyle/>
+          <a:p>
+            <a:pPr algn="ctr"/>
+          </a:p>
+        </p:txBody>
+      </p:sp>
+      <p:sp>
+        <p:nvSpPr>
+          <p:cNvPr id="10" name="Rounded Rectangle 9"/>
+          <p:cNvSpPr/>
+          <p:nvPr/>
+        </p:nvSpPr>
+        <p:spPr>
+          <a:xfrm>
+            <a:off x="502920" y="2267712"/>
+            <a:ext cx="566928" cy="713232"/>
+          </a:xfrm>
+          <a:prstGeom prst="roundRect">
+            <a:avLst>
+              <a:gd name="adj" fmla="val 10000"/>
+            </a:avLst>
+          </a:prstGeom>
+          <a:solidFill>
+            <a:srgbClr val="0E7C7B"/>
+          </a:solidFill>
+          <a:ln>
+            <a:noFill/>
+          </a:ln>
+          <a:effectLst/>
+        </p:spPr>
+        <p:style>
+          <a:lnRef idx="1">
+            <a:schemeClr val="accent1"/>
+          </a:lnRef>
+          <a:fillRef idx="3">
+            <a:schemeClr val="accent1"/>
+          </a:fillRef>
+          <a:effectRef idx="2">
+            <a:schemeClr val="accent1"/>
+          </a:effectRef>
+          <a:fontRef idx="minor">
+            <a:schemeClr val="lt1"/>
+          </a:fontRef>
+        </p:style>
+        <p:txBody>
+          <a:bodyPr rtlCol="0" anchor="ctr"/>
+          <a:lstStyle/>
+          <a:p>
+            <a:pPr algn="ctr"/>
+          </a:p>
+        </p:txBody>
+      </p:sp>
+      <p:sp>
+        <p:nvSpPr>
+          <p:cNvPr id="11" name="TextBox 10"/>
+          <p:cNvSpPr txBox="1"/>
+          <p:nvPr/>
+        </p:nvSpPr>
+        <p:spPr>
+          <a:xfrm>
+            <a:off x="502920" y="2267712"/>
+            <a:ext cx="566928" cy="713232"/>
+          </a:xfrm>
+          <a:prstGeom prst="rect">
+            <a:avLst/>
+          </a:prstGeom>
+          <a:noFill/>
+        </p:spPr>
+        <p:txBody>
+          <a:bodyPr wrap="square" anchor="ctr" lIns="0" rIns="0" tIns="0" bIns="0">
+            <a:spAutoFit/>
+          </a:bodyPr>
+          <a:lstStyle/>
+          <a:p>
+            <a:pPr algn="ctr"/>
+            <a:r>
+              <a:rPr sz="1800" b="1">
+                <a:solidFill>
+                  <a:srgbClr val="FFFFFF"/>
+                </a:solidFill>
+                <a:latin typeface="Microsoft JhengHei"/>
+                <a:ea typeface="Microsoft JhengHei"/>
+                <a:cs typeface="Microsoft JhengHei"/>
+              </a:rPr>
+              <a:t>2</a:t>
+            </a:r>
+          </a:p>
+        </p:txBody>
+      </p:sp>
+      <p:sp>
+        <p:nvSpPr>
+          <p:cNvPr id="12" name="TextBox 11"/>
+          <p:cNvSpPr txBox="1"/>
+          <p:nvPr/>
+        </p:nvSpPr>
+        <p:spPr>
+          <a:xfrm>
+            <a:off x="1234440" y="2322576"/>
+            <a:ext cx="10332720" cy="621792"/>
+          </a:xfrm>
+          <a:prstGeom prst="rect">
+            <a:avLst/>
+          </a:prstGeom>
+          <a:noFill/>
+        </p:spPr>
+        <p:txBody>
+          <a:bodyPr wrap="square" anchor="t" lIns="0" rIns="0" tIns="0" bIns="0">
+            <a:spAutoFit/>
+          </a:bodyPr>
+          <a:lstStyle/>
+          <a:p>
+            <a:pPr algn="l">
+              <a:spcAft>
+                <a:spcPts val="100"/>
+              </a:spcAft>
+            </a:pPr>
+            <a:r>
+              <a:rPr sz="1250" b="1">
+                <a:solidFill>
+                  <a:srgbClr val="0E7C7B"/>
+                </a:solidFill>
+                <a:latin typeface="Microsoft JhengHei"/>
+                <a:ea typeface="Microsoft JhengHei"/>
+                <a:cs typeface="Microsoft JhengHei"/>
+              </a:rPr>
+              <a:t>省 token = 提準確</a:t>
+            </a:r>
+          </a:p>
+          <a:p>
+            <a:pPr algn="l"/>
+            <a:r>
+              <a:rPr sz="1050" b="0">
+                <a:solidFill>
+                  <a:srgbClr val="1F2937"/>
+                </a:solidFill>
+                <a:latin typeface="Microsoft JhengHei"/>
+                <a:ea typeface="Microsoft JhengHei"/>
+                <a:cs typeface="Microsoft JhengHei"/>
+              </a:rPr>
+              <a:t>候選越少越乾淨:RAG-MCP 13.62%→43.13%;EasyTool −70%、DTDR −73% 提示長度。</a:t>
+            </a:r>
+          </a:p>
+        </p:txBody>
+      </p:sp>
+      <p:sp>
+        <p:nvSpPr>
+          <p:cNvPr id="13" name="Rounded Rectangle 12"/>
+          <p:cNvSpPr/>
+          <p:nvPr/>
+        </p:nvSpPr>
+        <p:spPr>
+          <a:xfrm>
+            <a:off x="502920" y="3072384"/>
+            <a:ext cx="11201400" cy="713232"/>
+          </a:xfrm>
+          <a:prstGeom prst="roundRect">
+            <a:avLst>
+              <a:gd name="adj" fmla="val 10000"/>
+            </a:avLst>
+          </a:prstGeom>
+          <a:solidFill>
+            <a:srgbClr val="EDE9FE"/>
+          </a:solidFill>
+          <a:ln>
+            <a:noFill/>
+          </a:ln>
+          <a:effectLst/>
+        </p:spPr>
+        <p:style>
+          <a:lnRef idx="1">
+            <a:schemeClr val="accent1"/>
+          </a:lnRef>
+          <a:fillRef idx="3">
+            <a:schemeClr val="accent1"/>
+          </a:fillRef>
+          <a:effectRef idx="2">
+            <a:schemeClr val="accent1"/>
+          </a:effectRef>
+          <a:fontRef idx="minor">
+            <a:schemeClr val="lt1"/>
+          </a:fontRef>
+        </p:style>
+        <p:txBody>
+          <a:bodyPr rtlCol="0" anchor="ctr"/>
+          <a:lstStyle/>
+          <a:p>
+            <a:pPr algn="ctr"/>
+          </a:p>
+        </p:txBody>
+      </p:sp>
+      <p:sp>
+        <p:nvSpPr>
+          <p:cNvPr id="14" name="Rounded Rectangle 13"/>
+          <p:cNvSpPr/>
+          <p:nvPr/>
+        </p:nvSpPr>
+        <p:spPr>
+          <a:xfrm>
+            <a:off x="502920" y="3072384"/>
+            <a:ext cx="566928" cy="713232"/>
+          </a:xfrm>
+          <a:prstGeom prst="roundRect">
+            <a:avLst>
+              <a:gd name="adj" fmla="val 10000"/>
+            </a:avLst>
+          </a:prstGeom>
+          <a:solidFill>
+            <a:srgbClr val="7C3AED"/>
+          </a:solidFill>
+          <a:ln>
+            <a:noFill/>
+          </a:ln>
+          <a:effectLst/>
+        </p:spPr>
+        <p:style>
+          <a:lnRef idx="1">
+            <a:schemeClr val="accent1"/>
+          </a:lnRef>
+          <a:fillRef idx="3">
+            <a:schemeClr val="accent1"/>
+          </a:fillRef>
+          <a:effectRef idx="2">
+            <a:schemeClr val="accent1"/>
+          </a:effectRef>
+          <a:fontRef idx="minor">
+            <a:schemeClr val="lt1"/>
+          </a:fontRef>
+        </p:style>
+        <p:txBody>
+          <a:bodyPr rtlCol="0" anchor="ctr"/>
+          <a:lstStyle/>
+          <a:p>
+            <a:pPr algn="ctr"/>
+          </a:p>
+        </p:txBody>
+      </p:sp>
+      <p:sp>
+        <p:nvSpPr>
+          <p:cNvPr id="15" name="TextBox 14"/>
+          <p:cNvSpPr txBox="1"/>
+          <p:nvPr/>
+        </p:nvSpPr>
+        <p:spPr>
+          <a:xfrm>
+            <a:off x="502920" y="3072384"/>
+            <a:ext cx="566928" cy="713232"/>
+          </a:xfrm>
+          <a:prstGeom prst="rect">
+            <a:avLst/>
+          </a:prstGeom>
+          <a:noFill/>
+        </p:spPr>
+        <p:txBody>
+          <a:bodyPr wrap="square" anchor="ctr" lIns="0" rIns="0" tIns="0" bIns="0">
+            <a:spAutoFit/>
+          </a:bodyPr>
+          <a:lstStyle/>
+          <a:p>
+            <a:pPr algn="ctr"/>
+            <a:r>
+              <a:rPr sz="1800" b="1">
+                <a:solidFill>
+                  <a:srgbClr val="FFFFFF"/>
+                </a:solidFill>
+                <a:latin typeface="Microsoft JhengHei"/>
+                <a:ea typeface="Microsoft JhengHei"/>
+                <a:cs typeface="Microsoft JhengHei"/>
+              </a:rPr>
+              <a:t>3</a:t>
+            </a:r>
+          </a:p>
+        </p:txBody>
+      </p:sp>
+      <p:sp>
+        <p:nvSpPr>
+          <p:cNvPr id="16" name="TextBox 15"/>
+          <p:cNvSpPr txBox="1"/>
+          <p:nvPr/>
+        </p:nvSpPr>
+        <p:spPr>
+          <a:xfrm>
+            <a:off x="1234440" y="3127248"/>
+            <a:ext cx="10332720" cy="621792"/>
+          </a:xfrm>
+          <a:prstGeom prst="rect">
+            <a:avLst/>
+          </a:prstGeom>
+          <a:noFill/>
+        </p:spPr>
+        <p:txBody>
+          <a:bodyPr wrap="square" anchor="t" lIns="0" rIns="0" tIns="0" bIns="0">
+            <a:spAutoFit/>
+          </a:bodyPr>
+          <a:lstStyle/>
+          <a:p>
+            <a:pPr algn="l">
+              <a:spcAft>
+                <a:spcPts val="100"/>
+              </a:spcAft>
+            </a:pPr>
+            <a:r>
+              <a:rPr sz="1250" b="1">
+                <a:solidFill>
+                  <a:srgbClr val="7C3AED"/>
+                </a:solidFill>
+                <a:latin typeface="Microsoft JhengHei"/>
+                <a:ea typeface="Microsoft JhengHei"/>
+                <a:cs typeface="Microsoft JhengHei"/>
+              </a:rPr>
+              <a:t>訊號一路升級</a:t>
+            </a:r>
+          </a:p>
+          <a:p>
+            <a:pPr algn="l"/>
+            <a:r>
+              <a:rPr sz="1050" b="0">
+                <a:solidFill>
+                  <a:srgbClr val="1F2937"/>
+                </a:solidFill>
+                <a:latin typeface="Microsoft JhengHei"/>
+                <a:ea typeface="Microsoft JhengHei"/>
+                <a:cs typeface="Microsoft JhengHei"/>
+              </a:rPr>
+              <a:t>語意相似 → 湊齊一套(COLT)→ 工具依賴(TGR/ToolNet)→ 呼叫歷史(DTDR)。</a:t>
+            </a:r>
+          </a:p>
+        </p:txBody>
+      </p:sp>
+      <p:sp>
+        <p:nvSpPr>
+          <p:cNvPr id="17" name="Rounded Rectangle 16"/>
+          <p:cNvSpPr/>
+          <p:nvPr/>
+        </p:nvSpPr>
+        <p:spPr>
+          <a:xfrm>
+            <a:off x="502920" y="3877056"/>
+            <a:ext cx="11201400" cy="713232"/>
+          </a:xfrm>
+          <a:prstGeom prst="roundRect">
+            <a:avLst>
+              <a:gd name="adj" fmla="val 10000"/>
+            </a:avLst>
+          </a:prstGeom>
+          <a:solidFill>
+            <a:srgbClr val="FEF3C7"/>
+          </a:solidFill>
+          <a:ln>
+            <a:noFill/>
+          </a:ln>
+          <a:effectLst/>
+        </p:spPr>
+        <p:style>
+          <a:lnRef idx="1">
+            <a:schemeClr val="accent1"/>
+          </a:lnRef>
+          <a:fillRef idx="3">
+            <a:schemeClr val="accent1"/>
+          </a:fillRef>
+          <a:effectRef idx="2">
+            <a:schemeClr val="accent1"/>
+          </a:effectRef>
+          <a:fontRef idx="minor">
+            <a:schemeClr val="lt1"/>
+          </a:fontRef>
+        </p:style>
+        <p:txBody>
+          <a:bodyPr rtlCol="0" anchor="ctr"/>
+          <a:lstStyle/>
+          <a:p>
+            <a:pPr algn="ctr"/>
+          </a:p>
+        </p:txBody>
+      </p:sp>
+      <p:sp>
+        <p:nvSpPr>
+          <p:cNvPr id="18" name="Rounded Rectangle 17"/>
+          <p:cNvSpPr/>
+          <p:nvPr/>
+        </p:nvSpPr>
+        <p:spPr>
+          <a:xfrm>
+            <a:off x="502920" y="3877056"/>
+            <a:ext cx="566928" cy="713232"/>
+          </a:xfrm>
+          <a:prstGeom prst="roundRect">
+            <a:avLst>
+              <a:gd name="adj" fmla="val 10000"/>
+            </a:avLst>
+          </a:prstGeom>
+          <a:solidFill>
+            <a:srgbClr val="D97706"/>
+          </a:solidFill>
+          <a:ln>
+            <a:noFill/>
+          </a:ln>
+          <a:effectLst/>
+        </p:spPr>
+        <p:style>
+          <a:lnRef idx="1">
+            <a:schemeClr val="accent1"/>
+          </a:lnRef>
+          <a:fillRef idx="3">
+            <a:schemeClr val="accent1"/>
+          </a:fillRef>
+          <a:effectRef idx="2">
+            <a:schemeClr val="accent1"/>
+          </a:effectRef>
+          <a:fontRef idx="minor">
+            <a:schemeClr val="lt1"/>
+          </a:fontRef>
+        </p:style>
+        <p:txBody>
+          <a:bodyPr rtlCol="0" anchor="ctr"/>
+          <a:lstStyle/>
+          <a:p>
+            <a:pPr algn="ctr"/>
+          </a:p>
+        </p:txBody>
+      </p:sp>
+      <p:sp>
+        <p:nvSpPr>
+          <p:cNvPr id="19" name="TextBox 18"/>
+          <p:cNvSpPr txBox="1"/>
+          <p:nvPr/>
+        </p:nvSpPr>
+        <p:spPr>
+          <a:xfrm>
+            <a:off x="502920" y="3877056"/>
+            <a:ext cx="566928" cy="713232"/>
+          </a:xfrm>
+          <a:prstGeom prst="rect">
+            <a:avLst/>
+          </a:prstGeom>
+          <a:noFill/>
+        </p:spPr>
+        <p:txBody>
+          <a:bodyPr wrap="square" anchor="ctr" lIns="0" rIns="0" tIns="0" bIns="0">
+            <a:spAutoFit/>
+          </a:bodyPr>
+          <a:lstStyle/>
+          <a:p>
+            <a:pPr algn="ctr"/>
+            <a:r>
+              <a:rPr sz="1800" b="1">
+                <a:solidFill>
+                  <a:srgbClr val="FFFFFF"/>
+                </a:solidFill>
+                <a:latin typeface="Microsoft JhengHei"/>
+                <a:ea typeface="Microsoft JhengHei"/>
+                <a:cs typeface="Microsoft JhengHei"/>
+              </a:rPr>
+              <a:t>4</a:t>
+            </a:r>
+          </a:p>
+        </p:txBody>
+      </p:sp>
+      <p:sp>
+        <p:nvSpPr>
+          <p:cNvPr id="20" name="TextBox 19"/>
+          <p:cNvSpPr txBox="1"/>
+          <p:nvPr/>
+        </p:nvSpPr>
+        <p:spPr>
+          <a:xfrm>
+            <a:off x="1234440" y="3931920"/>
+            <a:ext cx="10332720" cy="621792"/>
+          </a:xfrm>
+          <a:prstGeom prst="rect">
+            <a:avLst/>
+          </a:prstGeom>
+          <a:noFill/>
+        </p:spPr>
+        <p:txBody>
+          <a:bodyPr wrap="square" anchor="t" lIns="0" rIns="0" tIns="0" bIns="0">
+            <a:spAutoFit/>
+          </a:bodyPr>
+          <a:lstStyle/>
+          <a:p>
+            <a:pPr algn="l">
+              <a:spcAft>
+                <a:spcPts val="100"/>
+              </a:spcAft>
+            </a:pPr>
+            <a:r>
+              <a:rPr sz="1250" b="1">
+                <a:solidFill>
+                  <a:srgbClr val="D97706"/>
+                </a:solidFill>
+                <a:latin typeface="Microsoft JhengHei"/>
+                <a:ea typeface="Microsoft JhengHei"/>
+                <a:cs typeface="Microsoft JhengHei"/>
+              </a:rPr>
+              <a:t>生成式正面挑戰外掛檢索器</a:t>
+            </a:r>
+          </a:p>
+          <a:p>
+            <a:pPr algn="l"/>
+            <a:r>
+              <a:rPr sz="1050" b="0">
+                <a:solidFill>
+                  <a:srgbClr val="1F2937"/>
+                </a:solidFill>
+                <a:latin typeface="Microsoft JhengHei"/>
+                <a:ea typeface="Microsoft JhengHei"/>
+                <a:cs typeface="Microsoft JhengHei"/>
+              </a:rPr>
+              <a:t>工具=詞元:ToolGen 47k 工具贏過訓練雙塔;Octopus 端側 99.5%/0.38s。代價:工具變動要動模型。</a:t>
+            </a:r>
+          </a:p>
+        </p:txBody>
+      </p:sp>
+      <p:sp>
+        <p:nvSpPr>
+          <p:cNvPr id="21" name="Rounded Rectangle 20"/>
+          <p:cNvSpPr/>
+          <p:nvPr/>
+        </p:nvSpPr>
+        <p:spPr>
+          <a:xfrm>
+            <a:off x="502920" y="4681728"/>
+            <a:ext cx="11201400" cy="713232"/>
+          </a:xfrm>
+          <a:prstGeom prst="roundRect">
+            <a:avLst>
+              <a:gd name="adj" fmla="val 10000"/>
+            </a:avLst>
+          </a:prstGeom>
+          <a:solidFill>
+            <a:srgbClr val="D1FAE5"/>
+          </a:solidFill>
+          <a:ln>
+            <a:noFill/>
+          </a:ln>
+          <a:effectLst/>
+        </p:spPr>
+        <p:style>
+          <a:lnRef idx="1">
+            <a:schemeClr val="accent1"/>
+          </a:lnRef>
+          <a:fillRef idx="3">
+            <a:schemeClr val="accent1"/>
+          </a:fillRef>
+          <a:effectRef idx="2">
+            <a:schemeClr val="accent1"/>
+          </a:effectRef>
+          <a:fontRef idx="minor">
+            <a:schemeClr val="lt1"/>
+          </a:fontRef>
+        </p:style>
+        <p:txBody>
+          <a:bodyPr rtlCol="0" anchor="ctr"/>
+          <a:lstStyle/>
+          <a:p>
+            <a:pPr algn="ctr"/>
+          </a:p>
+        </p:txBody>
+      </p:sp>
+      <p:sp>
+        <p:nvSpPr>
+          <p:cNvPr id="22" name="Rounded Rectangle 21"/>
+          <p:cNvSpPr/>
+          <p:nvPr/>
+        </p:nvSpPr>
+        <p:spPr>
+          <a:xfrm>
+            <a:off x="502920" y="4681728"/>
+            <a:ext cx="566928" cy="713232"/>
+          </a:xfrm>
+          <a:prstGeom prst="roundRect">
+            <a:avLst>
+              <a:gd name="adj" fmla="val 10000"/>
+            </a:avLst>
+          </a:prstGeom>
+          <a:solidFill>
+            <a:srgbClr val="059669"/>
+          </a:solidFill>
+          <a:ln>
+            <a:noFill/>
+          </a:ln>
+          <a:effectLst/>
+        </p:spPr>
+        <p:style>
+          <a:lnRef idx="1">
+            <a:schemeClr val="accent1"/>
+          </a:lnRef>
+          <a:fillRef idx="3">
+            <a:schemeClr val="accent1"/>
+          </a:fillRef>
+          <a:effectRef idx="2">
+            <a:schemeClr val="accent1"/>
+          </a:effectRef>
+          <a:fontRef idx="minor">
+            <a:schemeClr val="lt1"/>
+          </a:fontRef>
+        </p:style>
+        <p:txBody>
+          <a:bodyPr rtlCol="0" anchor="ctr"/>
+          <a:lstStyle/>
+          <a:p>
+            <a:pPr algn="ctr"/>
+          </a:p>
+        </p:txBody>
+      </p:sp>
+      <p:sp>
+        <p:nvSpPr>
+          <p:cNvPr id="23" name="TextBox 22"/>
+          <p:cNvSpPr txBox="1"/>
+          <p:nvPr/>
+        </p:nvSpPr>
+        <p:spPr>
+          <a:xfrm>
+            <a:off x="502920" y="4681728"/>
+            <a:ext cx="566928" cy="713232"/>
+          </a:xfrm>
+          <a:prstGeom prst="rect">
+            <a:avLst/>
+          </a:prstGeom>
+          <a:noFill/>
+        </p:spPr>
+        <p:txBody>
+          <a:bodyPr wrap="square" anchor="ctr" lIns="0" rIns="0" tIns="0" bIns="0">
+            <a:spAutoFit/>
+          </a:bodyPr>
+          <a:lstStyle/>
+          <a:p>
+            <a:pPr algn="ctr"/>
+            <a:r>
+              <a:rPr sz="1800" b="1">
+                <a:solidFill>
+                  <a:srgbClr val="FFFFFF"/>
+                </a:solidFill>
+                <a:latin typeface="Microsoft JhengHei"/>
+                <a:ea typeface="Microsoft JhengHei"/>
+                <a:cs typeface="Microsoft JhengHei"/>
+              </a:rPr>
+              <a:t>5</a:t>
+            </a:r>
+          </a:p>
+        </p:txBody>
+      </p:sp>
+      <p:sp>
+        <p:nvSpPr>
+          <p:cNvPr id="24" name="TextBox 23"/>
+          <p:cNvSpPr txBox="1"/>
+          <p:nvPr/>
+        </p:nvSpPr>
+        <p:spPr>
+          <a:xfrm>
+            <a:off x="1234440" y="4736592"/>
+            <a:ext cx="10332720" cy="621792"/>
+          </a:xfrm>
+          <a:prstGeom prst="rect">
+            <a:avLst/>
+          </a:prstGeom>
+          <a:noFill/>
+        </p:spPr>
+        <p:txBody>
+          <a:bodyPr wrap="square" anchor="t" lIns="0" rIns="0" tIns="0" bIns="0">
+            <a:spAutoFit/>
+          </a:bodyPr>
+          <a:lstStyle/>
+          <a:p>
+            <a:pPr algn="l">
+              <a:spcAft>
+                <a:spcPts val="100"/>
+              </a:spcAft>
+            </a:pPr>
+            <a:r>
+              <a:rPr sz="1250" b="1">
+                <a:solidFill>
+                  <a:srgbClr val="059669"/>
+                </a:solidFill>
+                <a:latin typeface="Microsoft JhengHei"/>
+                <a:ea typeface="Microsoft JhengHei"/>
+                <a:cs typeface="Microsoft JhengHei"/>
+              </a:rPr>
+              <a:t>檢索器與呼叫端要一起設計;MCP 把一切放大</a:t>
+            </a:r>
+          </a:p>
+          <a:p>
+            <a:pPr algn="l"/>
+            <a:r>
+              <a:rPr sz="1050" b="0">
+                <a:solidFill>
+                  <a:srgbClr val="1F2937"/>
+                </a:solidFill>
+                <a:latin typeface="Microsoft JhengHei"/>
+                <a:ea typeface="Microsoft JhengHei"/>
+                <a:cs typeface="Microsoft JhengHei"/>
+              </a:rPr>
+              <a:t>Gorilla 訓練時就餵檢索文件、Hammer 學會拒答;MCP 催生主動請求(MCP-Zero)與自動同步(ScaleMCP)。</a:t>
+            </a:r>
+          </a:p>
+        </p:txBody>
+      </p:sp>
+      <p:sp>
+        <p:nvSpPr>
+          <p:cNvPr id="25" name="Rounded Rectangle 24"/>
+          <p:cNvSpPr/>
+          <p:nvPr/>
+        </p:nvSpPr>
+        <p:spPr>
+          <a:xfrm>
+            <a:off x="502920" y="5486400"/>
+            <a:ext cx="11201400" cy="713232"/>
+          </a:xfrm>
+          <a:prstGeom prst="roundRect">
+            <a:avLst>
+              <a:gd name="adj" fmla="val 10000"/>
+            </a:avLst>
+          </a:prstGeom>
+          <a:solidFill>
+            <a:srgbClr val="E0E7FF"/>
+          </a:solidFill>
+          <a:ln>
+            <a:noFill/>
+          </a:ln>
+          <a:effectLst/>
+        </p:spPr>
+        <p:style>
+          <a:lnRef idx="1">
+            <a:schemeClr val="accent1"/>
+          </a:lnRef>
+          <a:fillRef idx="3">
+            <a:schemeClr val="accent1"/>
+          </a:fillRef>
+          <a:effectRef idx="2">
+            <a:schemeClr val="accent1"/>
+          </a:effectRef>
+          <a:fontRef idx="minor">
+            <a:schemeClr val="lt1"/>
+          </a:fontRef>
+        </p:style>
+        <p:txBody>
+          <a:bodyPr rtlCol="0" anchor="ctr"/>
+          <a:lstStyle/>
+          <a:p>
+            <a:pPr algn="ctr"/>
+          </a:p>
+        </p:txBody>
+      </p:sp>
+      <p:sp>
+        <p:nvSpPr>
+          <p:cNvPr id="26" name="Rounded Rectangle 25"/>
+          <p:cNvSpPr/>
+          <p:nvPr/>
+        </p:nvSpPr>
+        <p:spPr>
+          <a:xfrm>
+            <a:off x="502920" y="5486400"/>
+            <a:ext cx="566928" cy="713232"/>
+          </a:xfrm>
+          <a:prstGeom prst="roundRect">
+            <a:avLst>
+              <a:gd name="adj" fmla="val 10000"/>
+            </a:avLst>
+          </a:prstGeom>
+          <a:solidFill>
+            <a:srgbClr val="4F46E5"/>
+          </a:solidFill>
+          <a:ln>
+            <a:noFill/>
+          </a:ln>
+          <a:effectLst/>
+        </p:spPr>
+        <p:style>
+          <a:lnRef idx="1">
+            <a:schemeClr val="accent1"/>
+          </a:lnRef>
+          <a:fillRef idx="3">
+            <a:schemeClr val="accent1"/>
+          </a:fillRef>
+          <a:effectRef idx="2">
+            <a:schemeClr val="accent1"/>
+          </a:effectRef>
+          <a:fontRef idx="minor">
+            <a:schemeClr val="lt1"/>
+          </a:fontRef>
+        </p:style>
+        <p:txBody>
+          <a:bodyPr rtlCol="0" anchor="ctr"/>
+          <a:lstStyle/>
+          <a:p>
+            <a:pPr algn="ctr"/>
+          </a:p>
+        </p:txBody>
+      </p:sp>
+      <p:sp>
+        <p:nvSpPr>
+          <p:cNvPr id="27" name="TextBox 26"/>
+          <p:cNvSpPr txBox="1"/>
+          <p:nvPr/>
+        </p:nvSpPr>
+        <p:spPr>
+          <a:xfrm>
+            <a:off x="502920" y="5486400"/>
+            <a:ext cx="566928" cy="713232"/>
+          </a:xfrm>
+          <a:prstGeom prst="rect">
+            <a:avLst/>
+          </a:prstGeom>
+          <a:noFill/>
+        </p:spPr>
+        <p:txBody>
+          <a:bodyPr wrap="square" anchor="ctr" lIns="0" rIns="0" tIns="0" bIns="0">
+            <a:spAutoFit/>
+          </a:bodyPr>
+          <a:lstStyle/>
+          <a:p>
+            <a:pPr algn="ctr"/>
+            <a:r>
+              <a:rPr sz="1800" b="1">
+                <a:solidFill>
+                  <a:srgbClr val="FFFFFF"/>
+                </a:solidFill>
+                <a:latin typeface="Microsoft JhengHei"/>
+                <a:ea typeface="Microsoft JhengHei"/>
+                <a:cs typeface="Microsoft JhengHei"/>
+              </a:rPr>
+              <a:t>6</a:t>
+            </a:r>
+          </a:p>
+        </p:txBody>
+      </p:sp>
+      <p:sp>
+        <p:nvSpPr>
+          <p:cNvPr id="28" name="TextBox 27"/>
+          <p:cNvSpPr txBox="1"/>
+          <p:nvPr/>
+        </p:nvSpPr>
+        <p:spPr>
+          <a:xfrm>
+            <a:off x="1234440" y="5541264"/>
+            <a:ext cx="10332720" cy="621792"/>
+          </a:xfrm>
+          <a:prstGeom prst="rect">
+            <a:avLst/>
+          </a:prstGeom>
+          <a:noFill/>
+        </p:spPr>
+        <p:txBody>
+          <a:bodyPr wrap="square" anchor="t" lIns="0" rIns="0" tIns="0" bIns="0">
+            <a:spAutoFit/>
+          </a:bodyPr>
+          <a:lstStyle/>
+          <a:p>
+            <a:pPr algn="l">
+              <a:spcAft>
+                <a:spcPts val="100"/>
+              </a:spcAft>
+            </a:pPr>
+            <a:r>
+              <a:rPr sz="1250" b="1">
+                <a:solidFill>
+                  <a:srgbClr val="4F46E5"/>
+                </a:solidFill>
+                <a:latin typeface="Microsoft JhengHei"/>
+                <a:ea typeface="Microsoft JhengHei"/>
+                <a:cs typeface="Microsoft JhengHei"/>
+              </a:rPr>
+              <a:t>新戰線:模型「知道」但「不做」—— 直接改腦內狀態</a:t>
+            </a:r>
+          </a:p>
+          <a:p>
+            <a:pPr algn="l"/>
+            <a:r>
+              <a:rPr sz="1050" b="0">
+                <a:solidFill>
+                  <a:srgbClr val="1F2937"/>
+                </a:solidFill>
+                <a:latin typeface="Microsoft JhengHei"/>
+                <a:ea typeface="Microsoft JhengHei"/>
+                <a:cs typeface="Microsoft JhengHei"/>
+              </a:rPr>
+              <a:t>四篇 2026 preprint 用 probe/attention 證明工具訊號已在激活裡(AUC 0.999),免訓練注入/起筆即可矯正 —— prompt 之下的第三層正在成形。</a:t>
+            </a:r>
+          </a:p>
+        </p:txBody>
+      </p:sp>
+      <p:sp>
+        <p:nvSpPr>
+          <p:cNvPr id="29" name="TextBox 28"/>
+          <p:cNvSpPr txBox="1"/>
+          <p:nvPr/>
+        </p:nvSpPr>
+        <p:spPr>
+          <a:xfrm>
+            <a:off x="502920" y="6473952"/>
+            <a:ext cx="10241280" cy="320040"/>
+          </a:xfrm>
+          <a:prstGeom prst="rect">
+            <a:avLst/>
+          </a:prstGeom>
+          <a:noFill/>
+        </p:spPr>
+        <p:txBody>
+          <a:bodyPr wrap="square" anchor="t" lIns="0" rIns="0" tIns="0" bIns="0">
+            <a:spAutoFit/>
+          </a:bodyPr>
+          <a:lstStyle/>
+          <a:p>
+            <a:pPr algn="l"/>
+            <a:r>
+              <a:rPr sz="950" b="0">
+                <a:solidFill>
+                  <a:srgbClr val="6B7280"/>
+                </a:solidFill>
+                <a:latin typeface="Microsoft JhengHei"/>
+                <a:ea typeface="Microsoft JhengHei"/>
+                <a:cs typeface="Microsoft JhengHei"/>
+              </a:rPr>
+              <a:t/>
+            </a:r>
+          </a:p>
+        </p:txBody>
+      </p:sp>
+      <p:sp>
+        <p:nvSpPr>
+          <p:cNvPr id="30" name="TextBox 29"/>
+          <p:cNvSpPr txBox="1"/>
+          <p:nvPr/>
+        </p:nvSpPr>
+        <p:spPr>
+          <a:xfrm>
+            <a:off x="11292840" y="6473952"/>
+            <a:ext cx="457200" cy="320040"/>
+          </a:xfrm>
+          <a:prstGeom prst="rect">
+            <a:avLst/>
+          </a:prstGeom>
+          <a:noFill/>
+        </p:spPr>
+        <p:txBody>
+          <a:bodyPr wrap="square" anchor="t" lIns="0" rIns="0" tIns="0" bIns="0">
+            <a:spAutoFit/>
+          </a:bodyPr>
+          <a:lstStyle/>
+          <a:p>
+            <a:pPr algn="r"/>
+            <a:r>
+              <a:rPr sz="1100" b="0">
+                <a:solidFill>
+                  <a:srgbClr val="6B7280"/>
+                </a:solidFill>
+                <a:latin typeface="Microsoft JhengHei"/>
+                <a:ea typeface="Microsoft JhengHei"/>
+                <a:cs typeface="Microsoft JhengHei"/>
+              </a:rPr>
+              <a:t>20</a:t>
+            </a:r>
+          </a:p>
+        </p:txBody>
+      </p:sp>
+    </p:spTree>
+  </p:cSld>
+  <p:clrMapOvr>
+    <a:masterClrMapping/>
+  </p:clrMapOvr>
+</p:sld>
+</file>
+
+<file path=ppt/slides/slide21.xml><?xml version="1.0" encoding="utf-8"?>
 <p:sld xmlns:a="http://schemas.openxmlformats.org/drawingml/2006/main" xmlns:p="http://schemas.openxmlformats.org/presentationml/2006/main" xmlns:r="http://schemas.openxmlformats.org/officeDocument/2006/relationships">
   <p:cSld>
     <p:spTree>
@@ -14835,7 +18123,7 @@
                 <a:gridCol w="4206240"/>
                 <a:gridCol w="3703320"/>
               </a:tblGrid>
-              <a:tr h="560070">
+              <a:tr h="497840">
                 <a:tc>
                   <a:txBody>
                     <a:bodyPr/>
@@ -14909,7 +18197,7 @@
                   </a:tcPr>
                 </a:tc>
               </a:tr>
-              <a:tr h="560070">
+              <a:tr h="497840">
                 <a:tc>
                   <a:txBody>
                     <a:bodyPr/>
@@ -14983,7 +18271,7 @@
                   </a:tcPr>
                 </a:tc>
               </a:tr>
-              <a:tr h="560070">
+              <a:tr h="497840">
                 <a:tc>
                   <a:txBody>
                     <a:bodyPr/>
@@ -15057,7 +18345,7 @@
                   </a:tcPr>
                 </a:tc>
               </a:tr>
-              <a:tr h="560070">
+              <a:tr h="497840">
                 <a:tc>
                   <a:txBody>
                     <a:bodyPr/>
@@ -15131,7 +18419,7 @@
                   </a:tcPr>
                 </a:tc>
               </a:tr>
-              <a:tr h="560070">
+              <a:tr h="497840">
                 <a:tc>
                   <a:txBody>
                     <a:bodyPr/>
@@ -15205,7 +18493,7 @@
                   </a:tcPr>
                 </a:tc>
               </a:tr>
-              <a:tr h="560070">
+              <a:tr h="497840">
                 <a:tc>
                   <a:txBody>
                     <a:bodyPr/>
@@ -15279,7 +18567,7 @@
                   </a:tcPr>
                 </a:tc>
               </a:tr>
-              <a:tr h="560070">
+              <a:tr h="497840">
                 <a:tc>
                   <a:txBody>
                     <a:bodyPr/>
@@ -15353,7 +18641,7 @@
                   </a:tcPr>
                 </a:tc>
               </a:tr>
-              <a:tr h="560070">
+              <a:tr h="497840">
                 <a:tc>
                   <a:txBody>
                     <a:bodyPr/>
@@ -15427,6 +18715,80 @@
                   </a:tcPr>
                 </a:tc>
               </a:tr>
+              <a:tr h="497840">
+                <a:tc>
+                  <a:txBody>
+                    <a:bodyPr/>
+                    <a:lstStyle/>
+                    <a:p>
+                      <a:r>
+                        <a:rPr sz="1100" b="1">
+                          <a:solidFill>
+                            <a:srgbClr val="1F2937"/>
+                          </a:solidFill>
+                          <a:latin typeface="Microsoft JhengHei"/>
+                          <a:ea typeface="Microsoft JhengHei"/>
+                          <a:cs typeface="Microsoft JhengHei"/>
+                        </a:rPr>
+                        <a:t>模型明明會、卻不出手(或亂出手)</a:t>
+                      </a:r>
+                    </a:p>
+                  </a:txBody>
+                  <a:tcPr marL="73152" marR="45720" marT="27432" marB="27432">
+                    <a:solidFill>
+                      <a:srgbClr val="F3F4F6"/>
+                    </a:solidFill>
+                  </a:tcPr>
+                </a:tc>
+                <a:tc>
+                  <a:txBody>
+                    <a:bodyPr/>
+                    <a:lstStyle/>
+                    <a:p>
+                      <a:r>
+                        <a:rPr sz="1100" b="0">
+                          <a:solidFill>
+                            <a:srgbClr val="1F2937"/>
+                          </a:solidFill>
+                          <a:latin typeface="Microsoft JhengHei"/>
+                          <a:ea typeface="Microsoft JhengHei"/>
+                          <a:cs typeface="Microsoft JhengHei"/>
+                        </a:rPr>
+                        <a:t>activation 層:ASA 向量開關 / KnowWhen probe+起筆(G)</a:t>
+                      </a:r>
+                    </a:p>
+                  </a:txBody>
+                  <a:tcPr marL="73152" marR="45720" marT="27432" marB="27432">
+                    <a:solidFill>
+                      <a:srgbClr val="F3F4F6"/>
+                    </a:solidFill>
+                  </a:tcPr>
+                </a:tc>
+                <a:tc>
+                  <a:txBody>
+                    <a:bodyPr/>
+                    <a:lstStyle/>
+                    <a:p>
+                      <a:r>
+                        <a:rPr sz="1100" b="0">
+                          <a:solidFill>
+                            <a:srgbClr val="1F2937"/>
+                          </a:solidFill>
+                          <a:latin typeface="Microsoft JhengHei"/>
+                          <a:ea typeface="Microsoft JhengHei"/>
+                          <a:cs typeface="Microsoft JhengHei"/>
+                        </a:rPr>
+                        <a:t>免訓練 KB 級資產;F1 0.18→0.50、省 48% 呼叫</a:t>
+                      </a:r>
+                    </a:p>
+                  </a:txBody>
+                  <a:tcPr marL="73152" marR="45720" marT="27432" marB="27432">
+                    <a:solidFill>
+                      <a:srgbClr val="F3F4F6"/>
+                    </a:solidFill>
+                  </a:tcPr>
+                </a:tc>
+              </a:tr>
             </a:tbl>
           </a:graphicData>
         </a:graphic>
@@ -15500,7 +18862,7 @@
                 <a:ea typeface="Microsoft JhengHei"/>
                 <a:cs typeface="Microsoft JhengHei"/>
               </a:rPr>
-              <a:t>19</a:t>
+              <a:t>21</a:t>
             </a:r>
           </a:p>
         </p:txBody>
@@ -15513,7 +18875,7 @@
 </p:sld>
 </file>
 
-<file path=ppt/slides/slide2.xml><?xml version="1.0" encoding="utf-8"?>
+<file path=ppt/slides/slide22.xml><?xml version="1.0" encoding="utf-8"?>
 <p:sld xmlns:a="http://schemas.openxmlformats.org/drawingml/2006/main" xmlns:p="http://schemas.openxmlformats.org/presentationml/2006/main" xmlns:r="http://schemas.openxmlformats.org/officeDocument/2006/relationships">
   <p:cSld>
     <p:spTree>
@@ -15555,7 +18917,7 @@
                 <a:ea typeface="Microsoft JhengHei"/>
                 <a:cs typeface="Microsoft JhengHei"/>
               </a:rPr>
-              <a:t>背景</a:t>
+              <a:t>References</a:t>
             </a:r>
           </a:p>
         </p:txBody>
@@ -15592,7 +18954,7 @@
                 <a:ea typeface="Microsoft JhengHei"/>
                 <a:cs typeface="Microsoft JhengHei"/>
               </a:rPr>
-              <a:t>LLM 不只會聊天:它可以「呼叫工具」做事</a:t>
+              <a:t>參考文獻(1/2)</a:t>
             </a:r>
           </a:p>
         </p:txBody>
@@ -15651,8 +19013,8 @@
         </p:nvSpPr>
         <p:spPr>
           <a:xfrm>
-            <a:off x="502920" y="1481328"/>
-            <a:ext cx="5852160" cy="914400"/>
+            <a:off x="502920" y="1508760"/>
+            <a:ext cx="11201400" cy="4937760"/>
           </a:xfrm>
           <a:prstGeom prst="rect">
             <a:avLst/>
@@ -15664,6 +19026,240 @@
             <a:spAutoFit/>
           </a:bodyPr>
           <a:lstStyle/>
+          <a:p>
+            <a:pPr algn="l">
+              <a:spcAft>
+                <a:spcPts val="300"/>
+              </a:spcAft>
+            </a:pPr>
+            <a:r>
+              <a:rPr sz="1250" b="1">
+                <a:solidFill>
+                  <a:srgbClr val="1F2937"/>
+                </a:solidFill>
+                <a:latin typeface="Microsoft JhengHei"/>
+                <a:ea typeface="Microsoft JhengHei"/>
+                <a:cs typeface="Microsoft JhengHei"/>
+              </a:rPr>
+              <a:t>【三大 ML 會議】</a:t>
+            </a:r>
+          </a:p>
+          <a:p>
+            <a:pPr algn="l">
+              <a:spcAft>
+                <a:spcPts val="250"/>
+              </a:spcAft>
+            </a:pPr>
+            <a:r>
+              <a:rPr sz="1000" b="0">
+                <a:solidFill>
+                  <a:srgbClr val="6B7280"/>
+                </a:solidFill>
+                <a:latin typeface="Microsoft JhengHei"/>
+                <a:ea typeface="Microsoft JhengHei"/>
+                <a:cs typeface="Microsoft JhengHei"/>
+              </a:rPr>
+              <a:t>[1] Qin, Y., et al. ToolLLM: Facilitating Large Language Models to Master 16000+ Real-world APIs. In ICLR 2024 (Spotlight).</a:t>
+            </a:r>
+          </a:p>
+          <a:p>
+            <a:pPr algn="l">
+              <a:spcAft>
+                <a:spcPts val="250"/>
+              </a:spcAft>
+            </a:pPr>
+            <a:r>
+              <a:rPr sz="1000" b="0">
+                <a:solidFill>
+                  <a:srgbClr val="6B7280"/>
+                </a:solidFill>
+                <a:latin typeface="Microsoft JhengHei"/>
+                <a:ea typeface="Microsoft JhengHei"/>
+                <a:cs typeface="Microsoft JhengHei"/>
+              </a:rPr>
+              <a:t>[2] Schick, T., et al. Toolformer: Language Models Can Teach Themselves to Use Tools. In NeurIPS 2023.</a:t>
+            </a:r>
+          </a:p>
+          <a:p>
+            <a:pPr algn="l">
+              <a:spcAft>
+                <a:spcPts val="250"/>
+              </a:spcAft>
+            </a:pPr>
+            <a:r>
+              <a:rPr sz="1000" b="0">
+                <a:solidFill>
+                  <a:srgbClr val="6B7280"/>
+                </a:solidFill>
+                <a:latin typeface="Microsoft JhengHei"/>
+                <a:ea typeface="Microsoft JhengHei"/>
+                <a:cs typeface="Microsoft JhengHei"/>
+              </a:rPr>
+              <a:t>[3] Hao, S., Liu, T., Wang, Z., Hu, Z. ToolkenGPT: Augmenting Frozen Language Models with Massive Tools via Tool Embeddings. In NeurIPS 2023 (Oral).</a:t>
+            </a:r>
+          </a:p>
+          <a:p>
+            <a:pPr algn="l">
+              <a:spcAft>
+                <a:spcPts val="250"/>
+              </a:spcAft>
+            </a:pPr>
+            <a:r>
+              <a:rPr sz="1000" b="0">
+                <a:solidFill>
+                  <a:srgbClr val="6B7280"/>
+                </a:solidFill>
+                <a:latin typeface="Microsoft JhengHei"/>
+                <a:ea typeface="Microsoft JhengHei"/>
+                <a:cs typeface="Microsoft JhengHei"/>
+              </a:rPr>
+              <a:t>[4] Patil, S. G., Zhang, T., Wang, X., Gonzalez, J. E. Gorilla: Large Language Model Connected with Massive APIs. In NeurIPS 2024.</a:t>
+            </a:r>
+          </a:p>
+          <a:p>
+            <a:pPr algn="l">
+              <a:spcAft>
+                <a:spcPts val="250"/>
+              </a:spcAft>
+            </a:pPr>
+            <a:r>
+              <a:rPr sz="1000" b="0">
+                <a:solidFill>
+                  <a:srgbClr val="6B7280"/>
+                </a:solidFill>
+                <a:latin typeface="Microsoft JhengHei"/>
+                <a:ea typeface="Microsoft JhengHei"/>
+                <a:cs typeface="Microsoft JhengHei"/>
+              </a:rPr>
+              <a:t>[5] Wang, R., et al. ToolGen: Unified Tool Retrieval and Calling via Generation. In ICLR 2025.</a:t>
+            </a:r>
+          </a:p>
+          <a:p>
+            <a:pPr algn="l">
+              <a:spcAft>
+                <a:spcPts val="250"/>
+              </a:spcAft>
+            </a:pPr>
+            <a:r>
+              <a:rPr sz="1000" b="0">
+                <a:solidFill>
+                  <a:srgbClr val="6B7280"/>
+                </a:solidFill>
+                <a:latin typeface="Microsoft JhengHei"/>
+                <a:ea typeface="Microsoft JhengHei"/>
+                <a:cs typeface="Microsoft JhengHei"/>
+              </a:rPr>
+              <a:t>[6] Du, Y., Wei, F., Zhang, H. AnyTool: Self-Reflective, Hierarchical Agents for Large-Scale API Calls. In ICML 2024.</a:t>
+            </a:r>
+          </a:p>
+          <a:p>
+            <a:pPr algn="l">
+              <a:spcAft>
+                <a:spcPts val="250"/>
+              </a:spcAft>
+            </a:pPr>
+            <a:r>
+              <a:rPr sz="1000" b="0">
+                <a:solidFill>
+                  <a:srgbClr val="6B7280"/>
+                </a:solidFill>
+                <a:latin typeface="Microsoft JhengHei"/>
+                <a:ea typeface="Microsoft JhengHei"/>
+                <a:cs typeface="Microsoft JhengHei"/>
+              </a:rPr>
+              <a:t>[7] Lin, Q., et al. Hammer: Robust Function-Calling for On-Device Language Models via Function Masking. In ICLR 2025 (Spotlight).</a:t>
+            </a:r>
+          </a:p>
+          <a:p>
+            <a:pPr algn="l">
+              <a:spcAft>
+                <a:spcPts val="250"/>
+              </a:spcAft>
+            </a:pPr>
+            <a:r>
+              <a:rPr sz="1000" b="0">
+                <a:solidFill>
+                  <a:srgbClr val="6B7280"/>
+                </a:solidFill>
+                <a:latin typeface="Microsoft JhengHei"/>
+                <a:ea typeface="Microsoft JhengHei"/>
+                <a:cs typeface="Microsoft JhengHei"/>
+              </a:rPr>
+              <a:t>[8] Liu, W., et al. ToolACE: Winning the Points of LLM Function Calling. In ICLR 2025.</a:t>
+            </a:r>
+          </a:p>
+          <a:p>
+            <a:pPr algn="l">
+              <a:spcAft>
+                <a:spcPts val="250"/>
+              </a:spcAft>
+            </a:pPr>
+            <a:r>
+              <a:rPr sz="1000" b="0">
+                <a:solidFill>
+                  <a:srgbClr val="6B7280"/>
+                </a:solidFill>
+                <a:latin typeface="Microsoft JhengHei"/>
+                <a:ea typeface="Microsoft JhengHei"/>
+                <a:cs typeface="Microsoft JhengHei"/>
+              </a:rPr>
+              <a:t>[9] Patil, S. G., et al. The Berkeley Function Calling Leaderboard (BFCL): From Tool Use to Agentic Evaluation of LLMs. In ICML 2025.</a:t>
+            </a:r>
+          </a:p>
+          <a:p>
+            <a:pPr algn="l">
+              <a:spcAft>
+                <a:spcPts val="250"/>
+              </a:spcAft>
+            </a:pPr>
+            <a:r>
+              <a:rPr sz="1000" b="0">
+                <a:solidFill>
+                  <a:srgbClr val="6B7280"/>
+                </a:solidFill>
+                <a:latin typeface="Microsoft JhengHei"/>
+                <a:ea typeface="Microsoft JhengHei"/>
+                <a:cs typeface="Microsoft JhengHei"/>
+              </a:rPr>
+              <a:t>[10] Huang, Y., et al. MetaTool Benchmark for Large Language Models: Deciding Whether to Use Tools and Which to Use. In ICLR 2024.</a:t>
+            </a:r>
+          </a:p>
+          <a:p>
+            <a:pPr algn="l">
+              <a:spcAft>
+                <a:spcPts val="250"/>
+              </a:spcAft>
+            </a:pPr>
+            <a:r>
+              <a:rPr sz="1000" b="0">
+                <a:solidFill>
+                  <a:srgbClr val="6B7280"/>
+                </a:solidFill>
+                <a:latin typeface="Microsoft JhengHei"/>
+                <a:ea typeface="Microsoft JhengHei"/>
+                <a:cs typeface="Microsoft JhengHei"/>
+              </a:rPr>
+              <a:t>[11] Shen, Y., et al. TaskBench: Benchmarking Large Language Models for Task Automation. In NeurIPS 2024 (Datasets &amp; Benchmarks).</a:t>
+            </a:r>
+          </a:p>
+          <a:p>
+            <a:pPr algn="l">
+              <a:spcAft>
+                <a:spcPts val="250"/>
+              </a:spcAft>
+            </a:pPr>
+            <a:r>
+              <a:rPr sz="1000" b="0">
+                <a:solidFill>
+                  <a:srgbClr val="6B7280"/>
+                </a:solidFill>
+                <a:latin typeface="Microsoft JhengHei"/>
+                <a:ea typeface="Microsoft JhengHei"/>
+                <a:cs typeface="Microsoft JhengHei"/>
+              </a:rPr>
+              <a:t>[12] Zhuang, Y., et al. ToolQA: A Dataset for LLM Question Answering with External Tools. In NeurIPS 2023 (Datasets &amp; Benchmarks).</a:t>
+            </a:r>
+          </a:p>
           <a:p>
             <a:pPr algn="l">
               <a:spcAft>
@@ -15671,688 +19267,15 @@
               </a:spcAft>
             </a:pPr>
             <a:r>
-              <a:rPr sz="1350" b="0">
-                <a:solidFill>
-                  <a:srgbClr val="1F2937"/>
-                </a:solidFill>
-                <a:latin typeface="Microsoft JhengHei"/>
-                <a:ea typeface="Microsoft JhengHei"/>
-                <a:cs typeface="Microsoft JhengHei"/>
-              </a:rPr>
-              <a:t>使用者說「幫我查明天台北天氣再寄給小王」,LLM 不自己瞎編,</a:t>
-            </a:r>
-          </a:p>
-          <a:p>
-            <a:pPr algn="l"/>
-            <a:r>
-              <a:rPr sz="1350" b="0">
-                <a:solidFill>
-                  <a:srgbClr val="1F2937"/>
-                </a:solidFill>
-                <a:latin typeface="Microsoft JhengHei"/>
-                <a:ea typeface="Microsoft JhengHei"/>
-                <a:cs typeface="Microsoft JhengHei"/>
-              </a:rPr>
-              <a:t>而是挑出對的工具(查天氣、寄郵件)、填好參數、依序呼叫 —— 這叫「函式呼叫(function calling)」。</a:t>
-            </a:r>
-          </a:p>
-        </p:txBody>
-      </p:sp>
-      <p:sp>
-        <p:nvSpPr>
-          <p:cNvPr id="6" name="Rounded Rectangle 5"/>
-          <p:cNvSpPr/>
-          <p:nvPr/>
-        </p:nvSpPr>
-        <p:spPr>
-          <a:xfrm>
-            <a:off x="731520" y="2880360"/>
-            <a:ext cx="2103120" cy="914400"/>
-          </a:xfrm>
-          <a:prstGeom prst="roundRect">
-            <a:avLst>
-              <a:gd name="adj" fmla="val 10000"/>
-            </a:avLst>
-          </a:prstGeom>
-          <a:solidFill>
-            <a:srgbClr val="DBEAFE"/>
-          </a:solidFill>
-          <a:ln w="12700">
-            <a:solidFill>
-              <a:srgbClr val="2563EB"/>
-            </a:solidFill>
-          </a:ln>
-          <a:effectLst/>
-        </p:spPr>
-        <p:style>
-          <a:lnRef idx="1">
-            <a:schemeClr val="accent1"/>
-          </a:lnRef>
-          <a:fillRef idx="3">
-            <a:schemeClr val="accent1"/>
-          </a:fillRef>
-          <a:effectRef idx="2">
-            <a:schemeClr val="accent1"/>
-          </a:effectRef>
-          <a:fontRef idx="minor">
-            <a:schemeClr val="lt1"/>
-          </a:fontRef>
-        </p:style>
-        <p:txBody>
-          <a:bodyPr rtlCol="0" anchor="ctr"/>
-          <a:lstStyle/>
-          <a:p>
-            <a:pPr algn="ctr"/>
-          </a:p>
-        </p:txBody>
-      </p:sp>
-      <p:sp>
-        <p:nvSpPr>
-          <p:cNvPr id="7" name="TextBox 6"/>
-          <p:cNvSpPr txBox="1"/>
-          <p:nvPr/>
-        </p:nvSpPr>
-        <p:spPr>
-          <a:xfrm>
-            <a:off x="777240" y="2880360"/>
-            <a:ext cx="2011679" cy="914400"/>
-          </a:xfrm>
-          <a:prstGeom prst="rect">
-            <a:avLst/>
-          </a:prstGeom>
-          <a:noFill/>
-        </p:spPr>
-        <p:txBody>
-          <a:bodyPr wrap="square" anchor="ctr" lIns="0" rIns="0" tIns="0" bIns="0">
-            <a:spAutoFit/>
-          </a:bodyPr>
-          <a:lstStyle/>
-          <a:p>
-            <a:pPr algn="ctr"/>
-            <a:r>
-              <a:rPr sz="1500" b="1">
-                <a:solidFill>
-                  <a:srgbClr val="2563EB"/>
-                </a:solidFill>
-                <a:latin typeface="Microsoft JhengHei"/>
-                <a:ea typeface="Microsoft JhengHei"/>
-                <a:cs typeface="Microsoft JhengHei"/>
-              </a:rPr>
-              <a:t>LLM(大腦)</a:t>
-            </a:r>
-          </a:p>
-        </p:txBody>
-      </p:sp>
-      <p:sp>
-        <p:nvSpPr>
-          <p:cNvPr id="8" name="Right Arrow 7"/>
-          <p:cNvSpPr/>
-          <p:nvPr/>
-        </p:nvSpPr>
-        <p:spPr>
-          <a:xfrm>
-            <a:off x="2971800" y="3200400"/>
-            <a:ext cx="548640" cy="310896"/>
-          </a:xfrm>
-          <a:prstGeom prst="rightArrow">
-            <a:avLst/>
-          </a:prstGeom>
-          <a:solidFill>
-            <a:srgbClr val="6B7280"/>
-          </a:solidFill>
-          <a:ln>
-            <a:noFill/>
-          </a:ln>
-          <a:effectLst/>
-        </p:spPr>
-        <p:style>
-          <a:lnRef idx="1">
-            <a:schemeClr val="accent1"/>
-          </a:lnRef>
-          <a:fillRef idx="3">
-            <a:schemeClr val="accent1"/>
-          </a:fillRef>
-          <a:effectRef idx="2">
-            <a:schemeClr val="accent1"/>
-          </a:effectRef>
-          <a:fontRef idx="minor">
-            <a:schemeClr val="lt1"/>
-          </a:fontRef>
-        </p:style>
-        <p:txBody>
-          <a:bodyPr rtlCol="0" anchor="ctr"/>
-          <a:lstStyle/>
-          <a:p>
-            <a:pPr algn="ctr"/>
-          </a:p>
-        </p:txBody>
-      </p:sp>
-      <p:sp>
-        <p:nvSpPr>
-          <p:cNvPr id="9" name="Rounded Rectangle 8"/>
-          <p:cNvSpPr/>
-          <p:nvPr/>
-        </p:nvSpPr>
-        <p:spPr>
-          <a:xfrm>
-            <a:off x="3703320" y="2121408"/>
-            <a:ext cx="2103120" cy="457200"/>
-          </a:xfrm>
-          <a:prstGeom prst="roundRect">
-            <a:avLst>
-              <a:gd name="adj" fmla="val 10000"/>
-            </a:avLst>
-          </a:prstGeom>
-          <a:solidFill>
-            <a:srgbClr val="F3F4F6"/>
-          </a:solidFill>
-          <a:ln w="12700">
-            <a:solidFill>
-              <a:srgbClr val="6B7280"/>
-            </a:solidFill>
-          </a:ln>
-          <a:effectLst/>
-        </p:spPr>
-        <p:style>
-          <a:lnRef idx="1">
-            <a:schemeClr val="accent1"/>
-          </a:lnRef>
-          <a:fillRef idx="3">
-            <a:schemeClr val="accent1"/>
-          </a:fillRef>
-          <a:effectRef idx="2">
-            <a:schemeClr val="accent1"/>
-          </a:effectRef>
-          <a:fontRef idx="minor">
-            <a:schemeClr val="lt1"/>
-          </a:fontRef>
-        </p:style>
-        <p:txBody>
-          <a:bodyPr rtlCol="0" anchor="ctr"/>
-          <a:lstStyle/>
-          <a:p>
-            <a:pPr algn="ctr"/>
-          </a:p>
-        </p:txBody>
-      </p:sp>
-      <p:sp>
-        <p:nvSpPr>
-          <p:cNvPr id="10" name="TextBox 9"/>
-          <p:cNvSpPr txBox="1"/>
-          <p:nvPr/>
-        </p:nvSpPr>
-        <p:spPr>
-          <a:xfrm>
-            <a:off x="3749039" y="2121408"/>
-            <a:ext cx="2011679" cy="457200"/>
-          </a:xfrm>
-          <a:prstGeom prst="rect">
-            <a:avLst/>
-          </a:prstGeom>
-          <a:noFill/>
-        </p:spPr>
-        <p:txBody>
-          <a:bodyPr wrap="square" anchor="ctr" lIns="0" rIns="0" tIns="0" bIns="0">
-            <a:spAutoFit/>
-          </a:bodyPr>
-          <a:lstStyle/>
-          <a:p>
-            <a:pPr algn="ctr"/>
-            <a:r>
-              <a:rPr sz="1150" b="0">
-                <a:solidFill>
-                  <a:srgbClr val="1F2937"/>
-                </a:solidFill>
-                <a:latin typeface="Microsoft JhengHei"/>
-                <a:ea typeface="Microsoft JhengHei"/>
-                <a:cs typeface="Microsoft JhengHei"/>
-              </a:rPr>
-              <a:t>查天氣 API</a:t>
-            </a:r>
-          </a:p>
-        </p:txBody>
-      </p:sp>
-      <p:sp>
-        <p:nvSpPr>
-          <p:cNvPr id="11" name="Rounded Rectangle 10"/>
-          <p:cNvSpPr/>
-          <p:nvPr/>
-        </p:nvSpPr>
-        <p:spPr>
-          <a:xfrm>
-            <a:off x="3703320" y="2688336"/>
-            <a:ext cx="2103120" cy="457200"/>
-          </a:xfrm>
-          <a:prstGeom prst="roundRect">
-            <a:avLst>
-              <a:gd name="adj" fmla="val 10000"/>
-            </a:avLst>
-          </a:prstGeom>
-          <a:solidFill>
-            <a:srgbClr val="F3F4F6"/>
-          </a:solidFill>
-          <a:ln w="12700">
-            <a:solidFill>
-              <a:srgbClr val="6B7280"/>
-            </a:solidFill>
-          </a:ln>
-          <a:effectLst/>
-        </p:spPr>
-        <p:style>
-          <a:lnRef idx="1">
-            <a:schemeClr val="accent1"/>
-          </a:lnRef>
-          <a:fillRef idx="3">
-            <a:schemeClr val="accent1"/>
-          </a:fillRef>
-          <a:effectRef idx="2">
-            <a:schemeClr val="accent1"/>
-          </a:effectRef>
-          <a:fontRef idx="minor">
-            <a:schemeClr val="lt1"/>
-          </a:fontRef>
-        </p:style>
-        <p:txBody>
-          <a:bodyPr rtlCol="0" anchor="ctr"/>
-          <a:lstStyle/>
-          <a:p>
-            <a:pPr algn="ctr"/>
-          </a:p>
-        </p:txBody>
-      </p:sp>
-      <p:sp>
-        <p:nvSpPr>
-          <p:cNvPr id="12" name="TextBox 11"/>
-          <p:cNvSpPr txBox="1"/>
-          <p:nvPr/>
-        </p:nvSpPr>
-        <p:spPr>
-          <a:xfrm>
-            <a:off x="3749039" y="2688336"/>
-            <a:ext cx="2011679" cy="457200"/>
-          </a:xfrm>
-          <a:prstGeom prst="rect">
-            <a:avLst/>
-          </a:prstGeom>
-          <a:noFill/>
-        </p:spPr>
-        <p:txBody>
-          <a:bodyPr wrap="square" anchor="ctr" lIns="0" rIns="0" tIns="0" bIns="0">
-            <a:spAutoFit/>
-          </a:bodyPr>
-          <a:lstStyle/>
-          <a:p>
-            <a:pPr algn="ctr"/>
-            <a:r>
-              <a:rPr sz="1150" b="0">
-                <a:solidFill>
-                  <a:srgbClr val="1F2937"/>
-                </a:solidFill>
-                <a:latin typeface="Microsoft JhengHei"/>
-                <a:ea typeface="Microsoft JhengHei"/>
-                <a:cs typeface="Microsoft JhengHei"/>
-              </a:rPr>
-              <a:t>寄 Email</a:t>
-            </a:r>
-          </a:p>
-        </p:txBody>
-      </p:sp>
-      <p:sp>
-        <p:nvSpPr>
-          <p:cNvPr id="13" name="Rounded Rectangle 12"/>
-          <p:cNvSpPr/>
-          <p:nvPr/>
-        </p:nvSpPr>
-        <p:spPr>
-          <a:xfrm>
-            <a:off x="3703320" y="3255263"/>
-            <a:ext cx="2103120" cy="457200"/>
-          </a:xfrm>
-          <a:prstGeom prst="roundRect">
-            <a:avLst>
-              <a:gd name="adj" fmla="val 10000"/>
-            </a:avLst>
-          </a:prstGeom>
-          <a:solidFill>
-            <a:srgbClr val="F3F4F6"/>
-          </a:solidFill>
-          <a:ln w="12700">
-            <a:solidFill>
-              <a:srgbClr val="6B7280"/>
-            </a:solidFill>
-          </a:ln>
-          <a:effectLst/>
-        </p:spPr>
-        <p:style>
-          <a:lnRef idx="1">
-            <a:schemeClr val="accent1"/>
-          </a:lnRef>
-          <a:fillRef idx="3">
-            <a:schemeClr val="accent1"/>
-          </a:fillRef>
-          <a:effectRef idx="2">
-            <a:schemeClr val="accent1"/>
-          </a:effectRef>
-          <a:fontRef idx="minor">
-            <a:schemeClr val="lt1"/>
-          </a:fontRef>
-        </p:style>
-        <p:txBody>
-          <a:bodyPr rtlCol="0" anchor="ctr"/>
-          <a:lstStyle/>
-          <a:p>
-            <a:pPr algn="ctr"/>
-          </a:p>
-        </p:txBody>
-      </p:sp>
-      <p:sp>
-        <p:nvSpPr>
-          <p:cNvPr id="14" name="TextBox 13"/>
-          <p:cNvSpPr txBox="1"/>
-          <p:nvPr/>
-        </p:nvSpPr>
-        <p:spPr>
-          <a:xfrm>
-            <a:off x="3749039" y="3255263"/>
-            <a:ext cx="2011679" cy="457200"/>
-          </a:xfrm>
-          <a:prstGeom prst="rect">
-            <a:avLst/>
-          </a:prstGeom>
-          <a:noFill/>
-        </p:spPr>
-        <p:txBody>
-          <a:bodyPr wrap="square" anchor="ctr" lIns="0" rIns="0" tIns="0" bIns="0">
-            <a:spAutoFit/>
-          </a:bodyPr>
-          <a:lstStyle/>
-          <a:p>
-            <a:pPr algn="ctr"/>
-            <a:r>
-              <a:rPr sz="1150" b="0">
-                <a:solidFill>
-                  <a:srgbClr val="1F2937"/>
-                </a:solidFill>
-                <a:latin typeface="Microsoft JhengHei"/>
-                <a:ea typeface="Microsoft JhengHei"/>
-                <a:cs typeface="Microsoft JhengHei"/>
-              </a:rPr>
-              <a:t>行事曆</a:t>
-            </a:r>
-          </a:p>
-        </p:txBody>
-      </p:sp>
-      <p:sp>
-        <p:nvSpPr>
-          <p:cNvPr id="15" name="Rounded Rectangle 14"/>
-          <p:cNvSpPr/>
-          <p:nvPr/>
-        </p:nvSpPr>
-        <p:spPr>
-          <a:xfrm>
-            <a:off x="3703320" y="3822191"/>
-            <a:ext cx="2103120" cy="457200"/>
-          </a:xfrm>
-          <a:prstGeom prst="roundRect">
-            <a:avLst>
-              <a:gd name="adj" fmla="val 10000"/>
-            </a:avLst>
-          </a:prstGeom>
-          <a:solidFill>
-            <a:srgbClr val="F3F4F6"/>
-          </a:solidFill>
-          <a:ln w="12700">
-            <a:solidFill>
-              <a:srgbClr val="6B7280"/>
-            </a:solidFill>
-          </a:ln>
-          <a:effectLst/>
-        </p:spPr>
-        <p:style>
-          <a:lnRef idx="1">
-            <a:schemeClr val="accent1"/>
-          </a:lnRef>
-          <a:fillRef idx="3">
-            <a:schemeClr val="accent1"/>
-          </a:fillRef>
-          <a:effectRef idx="2">
-            <a:schemeClr val="accent1"/>
-          </a:effectRef>
-          <a:fontRef idx="minor">
-            <a:schemeClr val="lt1"/>
-          </a:fontRef>
-        </p:style>
-        <p:txBody>
-          <a:bodyPr rtlCol="0" anchor="ctr"/>
-          <a:lstStyle/>
-          <a:p>
-            <a:pPr algn="ctr"/>
-          </a:p>
-        </p:txBody>
-      </p:sp>
-      <p:sp>
-        <p:nvSpPr>
-          <p:cNvPr id="16" name="TextBox 15"/>
-          <p:cNvSpPr txBox="1"/>
-          <p:nvPr/>
-        </p:nvSpPr>
-        <p:spPr>
-          <a:xfrm>
-            <a:off x="3749039" y="3822191"/>
-            <a:ext cx="2011679" cy="457200"/>
-          </a:xfrm>
-          <a:prstGeom prst="rect">
-            <a:avLst/>
-          </a:prstGeom>
-          <a:noFill/>
-        </p:spPr>
-        <p:txBody>
-          <a:bodyPr wrap="square" anchor="ctr" lIns="0" rIns="0" tIns="0" bIns="0">
-            <a:spAutoFit/>
-          </a:bodyPr>
-          <a:lstStyle/>
-          <a:p>
-            <a:pPr algn="ctr"/>
-            <a:r>
-              <a:rPr sz="1150" b="0">
-                <a:solidFill>
-                  <a:srgbClr val="1F2937"/>
-                </a:solidFill>
-                <a:latin typeface="Microsoft JhengHei"/>
-                <a:ea typeface="Microsoft JhengHei"/>
-                <a:cs typeface="Microsoft JhengHei"/>
-              </a:rPr>
-              <a:t>查資料庫</a:t>
-            </a:r>
-          </a:p>
-        </p:txBody>
-      </p:sp>
-      <p:sp>
-        <p:nvSpPr>
-          <p:cNvPr id="17" name="Rounded Rectangle 16"/>
-          <p:cNvSpPr/>
-          <p:nvPr/>
-        </p:nvSpPr>
-        <p:spPr>
-          <a:xfrm>
-            <a:off x="3703320" y="4389120"/>
-            <a:ext cx="2103120" cy="457200"/>
-          </a:xfrm>
-          <a:prstGeom prst="roundRect">
-            <a:avLst>
-              <a:gd name="adj" fmla="val 10000"/>
-            </a:avLst>
-          </a:prstGeom>
-          <a:solidFill>
-            <a:srgbClr val="F3F4F6"/>
-          </a:solidFill>
-          <a:ln w="12700">
-            <a:solidFill>
-              <a:srgbClr val="6B7280"/>
-            </a:solidFill>
-          </a:ln>
-          <a:effectLst/>
-        </p:spPr>
-        <p:style>
-          <a:lnRef idx="1">
-            <a:schemeClr val="accent1"/>
-          </a:lnRef>
-          <a:fillRef idx="3">
-            <a:schemeClr val="accent1"/>
-          </a:fillRef>
-          <a:effectRef idx="2">
-            <a:schemeClr val="accent1"/>
-          </a:effectRef>
-          <a:fontRef idx="minor">
-            <a:schemeClr val="lt1"/>
-          </a:fontRef>
-        </p:style>
-        <p:txBody>
-          <a:bodyPr rtlCol="0" anchor="ctr"/>
-          <a:lstStyle/>
-          <a:p>
-            <a:pPr algn="ctr"/>
-          </a:p>
-        </p:txBody>
-      </p:sp>
-      <p:sp>
-        <p:nvSpPr>
-          <p:cNvPr id="18" name="TextBox 17"/>
-          <p:cNvSpPr txBox="1"/>
-          <p:nvPr/>
-        </p:nvSpPr>
-        <p:spPr>
-          <a:xfrm>
-            <a:off x="3749039" y="4389120"/>
-            <a:ext cx="2011679" cy="457200"/>
-          </a:xfrm>
-          <a:prstGeom prst="rect">
-            <a:avLst/>
-          </a:prstGeom>
-          <a:noFill/>
-        </p:spPr>
-        <p:txBody>
-          <a:bodyPr wrap="square" anchor="ctr" lIns="0" rIns="0" tIns="0" bIns="0">
-            <a:spAutoFit/>
-          </a:bodyPr>
-          <a:lstStyle/>
-          <a:p>
-            <a:pPr algn="ctr"/>
-            <a:r>
-              <a:rPr sz="1150" b="0">
-                <a:solidFill>
-                  <a:srgbClr val="1F2937"/>
-                </a:solidFill>
-                <a:latin typeface="Microsoft JhengHei"/>
-                <a:ea typeface="Microsoft JhengHei"/>
-                <a:cs typeface="Microsoft JhengHei"/>
-              </a:rPr>
-              <a:t>…上千個工具</a:t>
-            </a:r>
-          </a:p>
-        </p:txBody>
-      </p:sp>
-      <p:sp>
-        <p:nvSpPr>
-          <p:cNvPr id="19" name="Rounded Rectangle 18"/>
-          <p:cNvSpPr/>
-          <p:nvPr/>
-        </p:nvSpPr>
-        <p:spPr>
-          <a:xfrm>
-            <a:off x="6400800" y="1920240"/>
-            <a:ext cx="5257800" cy="3977639"/>
-          </a:xfrm>
-          <a:prstGeom prst="roundRect">
-            <a:avLst>
-              <a:gd name="adj" fmla="val 10000"/>
-            </a:avLst>
-          </a:prstGeom>
-          <a:solidFill>
-            <a:srgbClr val="FFEDD5"/>
-          </a:solidFill>
-          <a:ln>
-            <a:noFill/>
-          </a:ln>
-          <a:effectLst/>
-        </p:spPr>
-        <p:style>
-          <a:lnRef idx="1">
-            <a:schemeClr val="accent1"/>
-          </a:lnRef>
-          <a:fillRef idx="3">
-            <a:schemeClr val="accent1"/>
-          </a:fillRef>
-          <a:effectRef idx="2">
-            <a:schemeClr val="accent1"/>
-          </a:effectRef>
-          <a:fontRef idx="minor">
-            <a:schemeClr val="lt1"/>
-          </a:fontRef>
-        </p:style>
-        <p:txBody>
-          <a:bodyPr rtlCol="0" anchor="ctr"/>
-          <a:lstStyle/>
-          <a:p>
-            <a:pPr algn="ctr"/>
-          </a:p>
-        </p:txBody>
-      </p:sp>
-      <p:sp>
-        <p:nvSpPr>
-          <p:cNvPr id="20" name="TextBox 19"/>
-          <p:cNvSpPr txBox="1"/>
-          <p:nvPr/>
-        </p:nvSpPr>
-        <p:spPr>
-          <a:xfrm>
-            <a:off x="6675120" y="2148840"/>
-            <a:ext cx="4754880" cy="3566160"/>
-          </a:xfrm>
-          <a:prstGeom prst="rect">
-            <a:avLst/>
-          </a:prstGeom>
-          <a:noFill/>
-        </p:spPr>
-        <p:txBody>
-          <a:bodyPr wrap="square" anchor="t" lIns="0" rIns="0" tIns="0" bIns="0">
-            <a:spAutoFit/>
-          </a:bodyPr>
-          <a:lstStyle/>
-          <a:p>
-            <a:pPr algn="l">
-              <a:spcAft>
-                <a:spcPts val="600"/>
-              </a:spcAft>
-            </a:pPr>
-            <a:r>
-              <a:rPr sz="1600" b="1">
-                <a:solidFill>
-                  <a:srgbClr val="C2410C"/>
-                </a:solidFill>
-                <a:latin typeface="Microsoft JhengHei"/>
-                <a:ea typeface="Microsoft JhengHei"/>
-                <a:cs typeface="Microsoft JhengHei"/>
-              </a:rPr>
-              <a:t>MCP(Model Context Protocol)是什麼?</a:t>
-            </a:r>
-          </a:p>
-          <a:p>
-            <a:pPr algn="l">
-              <a:spcAft>
-                <a:spcPts val="400"/>
-              </a:spcAft>
-            </a:pPr>
-            <a:r>
-              <a:rPr sz="1300" b="0">
-                <a:solidFill>
-                  <a:srgbClr val="1F2937"/>
-                </a:solidFill>
-                <a:latin typeface="Microsoft JhengHei"/>
-                <a:ea typeface="Microsoft JhengHei"/>
-                <a:cs typeface="Microsoft JhengHei"/>
-              </a:rPr>
-              <a:t>把「工具怎麼接、怎麼描述、怎麼呼叫」統一成標準協定 —— 像 USB-C:</a:t>
+              <a:rPr sz="600" b="0">
+                <a:solidFill>
+                  <a:srgbClr val="6B7280"/>
+                </a:solidFill>
+                <a:latin typeface="Microsoft JhengHei"/>
+                <a:ea typeface="Microsoft JhengHei"/>
+                <a:cs typeface="Microsoft JhengHei"/>
+              </a:rPr>
+              <a:t> </a:t>
             </a:r>
           </a:p>
           <a:p>
@@ -16362,7 +19285,7 @@
               </a:spcAft>
             </a:pPr>
             <a:r>
-              <a:rPr sz="1300" b="0">
+              <a:rPr sz="1250" b="1">
                 <a:solidFill>
                   <a:srgbClr val="1F2937"/>
                 </a:solidFill>
@@ -16370,71 +19293,93 @@
                 <a:ea typeface="Microsoft JhengHei"/>
                 <a:cs typeface="Microsoft JhengHei"/>
               </a:rPr>
-              <a:t>• 工具商把功能包成「MCP server」</a:t>
+              <a:t>【ACL 系與其他一級會議】</a:t>
             </a:r>
           </a:p>
           <a:p>
             <a:pPr algn="l">
               <a:spcAft>
-                <a:spcPts val="300"/>
+                <a:spcPts val="250"/>
               </a:spcAft>
             </a:pPr>
             <a:r>
-              <a:rPr sz="1300" b="0">
-                <a:solidFill>
-                  <a:srgbClr val="1F2937"/>
-                </a:solidFill>
-                <a:latin typeface="Microsoft JhengHei"/>
-                <a:ea typeface="Microsoft JhengHei"/>
-                <a:cs typeface="Microsoft JhengHei"/>
-              </a:rPr>
-              <a:t>• 任何 AI 助理插上就能用,不用逐家客製</a:t>
+              <a:rPr sz="1000" b="0">
+                <a:solidFill>
+                  <a:srgbClr val="6B7280"/>
+                </a:solidFill>
+                <a:latin typeface="Microsoft JhengHei"/>
+                <a:ea typeface="Microsoft JhengHei"/>
+                <a:cs typeface="Microsoft JhengHei"/>
+              </a:rPr>
+              <a:t>[13] Qu, C., et al. Towards Completeness-Oriented Tool Retrieval for Large Language Models (COLT). In CIKM 2024.</a:t>
             </a:r>
           </a:p>
           <a:p>
             <a:pPr algn="l">
               <a:spcAft>
-                <a:spcPts val="800"/>
+                <a:spcPts val="250"/>
               </a:spcAft>
             </a:pPr>
             <a:r>
-              <a:rPr sz="1300" b="0">
-                <a:solidFill>
-                  <a:srgbClr val="1F2937"/>
-                </a:solidFill>
-                <a:latin typeface="Microsoft JhengHei"/>
-                <a:ea typeface="Microsoft JhengHei"/>
-                <a:cs typeface="Microsoft JhengHei"/>
-              </a:rPr>
-              <a:t>• 代價:生態爆炸 —— 官方社群已有數千個 server / 工具</a:t>
-            </a:r>
-          </a:p>
-          <a:p>
-            <a:pPr algn="l"/>
-            <a:r>
-              <a:rPr sz="1350" b="1">
-                <a:solidFill>
-                  <a:srgbClr val="C2410C"/>
-                </a:solidFill>
-                <a:latin typeface="Microsoft JhengHei"/>
-                <a:ea typeface="Microsoft JhengHei"/>
-                <a:cs typeface="Microsoft JhengHei"/>
-              </a:rPr>
-              <a:t>工具越多,「挑對工具」就越難 → 這就是本簡報的主題</a:t>
-            </a:r>
-          </a:p>
-        </p:txBody>
-      </p:sp>
-      <p:sp>
-        <p:nvSpPr>
-          <p:cNvPr id="21" name="TextBox 20"/>
+              <a:rPr sz="1000" b="0">
+                <a:solidFill>
+                  <a:srgbClr val="6B7280"/>
+                </a:solidFill>
+                <a:latin typeface="Microsoft JhengHei"/>
+                <a:ea typeface="Microsoft JhengHei"/>
+                <a:cs typeface="Microsoft JhengHei"/>
+              </a:rPr>
+              <a:t>[14] Chen, Y., et al. Re-Invoke: Tool Invocation Rewriting for Zero-Shot Tool Retrieval. In Findings of EMNLP 2024.</a:t>
+            </a:r>
+          </a:p>
+          <a:p>
+            <a:pPr algn="l">
+              <a:spcAft>
+                <a:spcPts val="250"/>
+              </a:spcAft>
+            </a:pPr>
+            <a:r>
+              <a:rPr sz="1000" b="0">
+                <a:solidFill>
+                  <a:srgbClr val="6B7280"/>
+                </a:solidFill>
+                <a:latin typeface="Microsoft JhengHei"/>
+                <a:ea typeface="Microsoft JhengHei"/>
+                <a:cs typeface="Microsoft JhengHei"/>
+              </a:rPr>
+              <a:t>[15] Zheng, Y., et al. ToolRerank: Adaptive and Hierarchy-Aware Reranking for Tool Retrieval. In LREC-COLING 2024.</a:t>
+            </a:r>
+          </a:p>
+          <a:p>
+            <a:pPr algn="l">
+              <a:spcAft>
+                <a:spcPts val="250"/>
+              </a:spcAft>
+            </a:pPr>
+            <a:r>
+              <a:rPr sz="1000" b="0">
+                <a:solidFill>
+                  <a:srgbClr val="6B7280"/>
+                </a:solidFill>
+                <a:latin typeface="Microsoft JhengHei"/>
+                <a:ea typeface="Microsoft JhengHei"/>
+                <a:cs typeface="Microsoft JhengHei"/>
+              </a:rPr>
+              <a:t>[16] Erdogan, L. E., et al. TinyAgent: Function Calling at the Edge. In EMNLP 2024 (System Demonstrations).</a:t>
+            </a:r>
+          </a:p>
+        </p:txBody>
+      </p:sp>
+      <p:sp>
+        <p:nvSpPr>
+          <p:cNvPr id="6" name="TextBox 5"/>
           <p:cNvSpPr txBox="1"/>
           <p:nvPr/>
         </p:nvSpPr>
         <p:spPr>
           <a:xfrm>
-            <a:off x="502920" y="6035040"/>
-            <a:ext cx="11155680" cy="365760"/>
+            <a:off x="502920" y="6473952"/>
+            <a:ext cx="10241280" cy="320040"/>
           </a:xfrm>
           <a:prstGeom prst="rect">
             <a:avLst/>
@@ -16449,7 +19394,7 @@
           <a:p>
             <a:pPr algn="l"/>
             <a:r>
-              <a:rPr sz="1200" b="0">
+              <a:rPr sz="950" b="0">
                 <a:solidFill>
                   <a:srgbClr val="6B7280"/>
                 </a:solidFill>
@@ -16457,21 +19402,21 @@
                 <a:ea typeface="Microsoft JhengHei"/>
                 <a:cs typeface="Microsoft JhengHei"/>
               </a:rPr>
-              <a:t>類比:一位助理(LLM)+ 一整面牆的工具箱(API / MCP servers)</a:t>
-            </a:r>
-          </a:p>
-        </p:txBody>
-      </p:sp>
-      <p:sp>
-        <p:nvSpPr>
-          <p:cNvPr id="22" name="TextBox 21"/>
+              <a:t/>
+            </a:r>
+          </a:p>
+        </p:txBody>
+      </p:sp>
+      <p:sp>
+        <p:nvSpPr>
+          <p:cNvPr id="7" name="TextBox 6"/>
           <p:cNvSpPr txBox="1"/>
           <p:nvPr/>
         </p:nvSpPr>
         <p:spPr>
           <a:xfrm>
-            <a:off x="502920" y="6473952"/>
-            <a:ext cx="10241280" cy="320040"/>
+            <a:off x="11292840" y="6473952"/>
+            <a:ext cx="457200" cy="320040"/>
           </a:xfrm>
           <a:prstGeom prst="rect">
             <a:avLst/>
@@ -16484,9 +19429,9 @@
           </a:bodyPr>
           <a:lstStyle/>
           <a:p>
-            <a:pPr algn="l"/>
-            <a:r>
-              <a:rPr sz="950" b="0">
+            <a:pPr algn="r"/>
+            <a:r>
+              <a:rPr sz="1100" b="0">
                 <a:solidFill>
                   <a:srgbClr val="6B7280"/>
                 </a:solidFill>
@@ -16494,44 +19439,7 @@
                 <a:ea typeface="Microsoft JhengHei"/>
                 <a:cs typeface="Microsoft JhengHei"/>
               </a:rPr>
-              <a:t/>
-            </a:r>
-          </a:p>
-        </p:txBody>
-      </p:sp>
-      <p:sp>
-        <p:nvSpPr>
-          <p:cNvPr id="23" name="TextBox 22"/>
-          <p:cNvSpPr txBox="1"/>
-          <p:nvPr/>
-        </p:nvSpPr>
-        <p:spPr>
-          <a:xfrm>
-            <a:off x="11292840" y="6473952"/>
-            <a:ext cx="457200" cy="320040"/>
-          </a:xfrm>
-          <a:prstGeom prst="rect">
-            <a:avLst/>
-          </a:prstGeom>
-          <a:noFill/>
-        </p:spPr>
-        <p:txBody>
-          <a:bodyPr wrap="square" anchor="t" lIns="0" rIns="0" tIns="0" bIns="0">
-            <a:spAutoFit/>
-          </a:bodyPr>
-          <a:lstStyle/>
-          <a:p>
-            <a:pPr algn="r"/>
-            <a:r>
-              <a:rPr sz="1100" b="0">
-                <a:solidFill>
-                  <a:srgbClr val="6B7280"/>
-                </a:solidFill>
-                <a:latin typeface="Microsoft JhengHei"/>
-                <a:ea typeface="Microsoft JhengHei"/>
-                <a:cs typeface="Microsoft JhengHei"/>
-              </a:rPr>
-              <a:t>2</a:t>
+              <a:t>22</a:t>
             </a:r>
           </a:p>
         </p:txBody>
@@ -16544,7 +19452,7 @@
 </p:sld>
 </file>
 
-<file path=ppt/slides/slide20.xml><?xml version="1.0" encoding="utf-8"?>
+<file path=ppt/slides/slide23.xml><?xml version="1.0" encoding="utf-8"?>
 <p:sld xmlns:a="http://schemas.openxmlformats.org/drawingml/2006/main" xmlns:p="http://schemas.openxmlformats.org/presentationml/2006/main" xmlns:r="http://schemas.openxmlformats.org/officeDocument/2006/relationships">
   <p:cSld>
     <p:spTree>
@@ -16623,7 +19531,7 @@
                 <a:ea typeface="Microsoft JhengHei"/>
                 <a:cs typeface="Microsoft JhengHei"/>
               </a:rPr>
-              <a:t>參考文獻(1/2)</a:t>
+              <a:t>參考文獻(2/2)</a:t>
             </a:r>
           </a:p>
         </p:txBody>
@@ -16698,19 +19606,163 @@
           <a:p>
             <a:pPr algn="l">
               <a:spcAft>
-                <a:spcPts val="300"/>
+                <a:spcPts val="250"/>
               </a:spcAft>
             </a:pPr>
             <a:r>
-              <a:rPr sz="1250" b="1">
-                <a:solidFill>
-                  <a:srgbClr val="1F2937"/>
-                </a:solidFill>
-                <a:latin typeface="Microsoft JhengHei"/>
-                <a:ea typeface="Microsoft JhengHei"/>
-                <a:cs typeface="Microsoft JhengHei"/>
-              </a:rPr>
-              <a:t>【三大 ML 會議】</a:t>
+              <a:rPr sz="1000" b="0">
+                <a:solidFill>
+                  <a:srgbClr val="6B7280"/>
+                </a:solidFill>
+                <a:latin typeface="Microsoft JhengHei"/>
+                <a:ea typeface="Microsoft JhengHei"/>
+                <a:cs typeface="Microsoft JhengHei"/>
+              </a:rPr>
+              <a:t>[17] Yuan, S., et al. EasyTool: Enhancing LLM-based Agents with Concise Tool Instruction. In NAACL 2025.</a:t>
+            </a:r>
+          </a:p>
+          <a:p>
+            <a:pPr algn="l">
+              <a:spcAft>
+                <a:spcPts val="250"/>
+              </a:spcAft>
+            </a:pPr>
+            <a:r>
+              <a:rPr sz="1000" b="0">
+                <a:solidFill>
+                  <a:srgbClr val="6B7280"/>
+                </a:solidFill>
+                <a:latin typeface="Microsoft JhengHei"/>
+                <a:ea typeface="Microsoft JhengHei"/>
+                <a:cs typeface="Microsoft JhengHei"/>
+              </a:rPr>
+              <a:t>[18] Shi, Z., et al. Retrieval Models Aren't Tool-Savvy: Benchmarking Tool Retrieval for LLMs (ToolRet). In Findings of ACL 2025.</a:t>
+            </a:r>
+          </a:p>
+          <a:p>
+            <a:pPr algn="l">
+              <a:spcAft>
+                <a:spcPts val="250"/>
+              </a:spcAft>
+            </a:pPr>
+            <a:r>
+              <a:rPr sz="1000" b="0">
+                <a:solidFill>
+                  <a:srgbClr val="6B7280"/>
+                </a:solidFill>
+                <a:latin typeface="Microsoft JhengHei"/>
+                <a:ea typeface="Microsoft JhengHei"/>
+                <a:cs typeface="Microsoft JhengHei"/>
+              </a:rPr>
+              <a:t>[19] Li, M., et al. API-Bank: A Comprehensive Benchmark for Tool-Augmented LLMs. In EMNLP 2023.</a:t>
+            </a:r>
+          </a:p>
+          <a:p>
+            <a:pPr algn="l">
+              <a:spcAft>
+                <a:spcPts val="250"/>
+              </a:spcAft>
+            </a:pPr>
+            <a:r>
+              <a:rPr sz="1000" b="0">
+                <a:solidFill>
+                  <a:srgbClr val="6B7280"/>
+                </a:solidFill>
+                <a:latin typeface="Microsoft JhengHei"/>
+                <a:ea typeface="Microsoft JhengHei"/>
+                <a:cs typeface="Microsoft JhengHei"/>
+              </a:rPr>
+              <a:t>[20] Guo, Z., et al. StableToolBench: Towards Stable Large-Scale Benchmarking on Tool Learning of LLMs. In Findings of ACL 2024.</a:t>
+            </a:r>
+          </a:p>
+          <a:p>
+            <a:pPr algn="l">
+              <a:spcAft>
+                <a:spcPts val="250"/>
+              </a:spcAft>
+            </a:pPr>
+            <a:r>
+              <a:rPr sz="1000" b="0">
+                <a:solidFill>
+                  <a:srgbClr val="6B7280"/>
+                </a:solidFill>
+                <a:latin typeface="Microsoft JhengHei"/>
+                <a:ea typeface="Microsoft JhengHei"/>
+                <a:cs typeface="Microsoft JhengHei"/>
+              </a:rPr>
+              <a:t>[21] Wu, M., et al. Seal-Tools: Self-Instruct Tool Learning Dataset for Agent Tuning and Detailed Benchmark. In NLPCC 2024.</a:t>
+            </a:r>
+          </a:p>
+          <a:p>
+            <a:pPr algn="l">
+              <a:spcAft>
+                <a:spcPts val="250"/>
+              </a:spcAft>
+            </a:pPr>
+            <a:r>
+              <a:rPr sz="1000" b="0">
+                <a:solidFill>
+                  <a:srgbClr val="6B7280"/>
+                </a:solidFill>
+                <a:latin typeface="Microsoft JhengHei"/>
+                <a:ea typeface="Microsoft JhengHei"/>
+                <a:cs typeface="Microsoft JhengHei"/>
+              </a:rPr>
+              <a:t>[22] Paramanayakam, V., et al. Less is More: Optimizing Function Calling for LLM Execution on Edge Devices. In DATE 2025.</a:t>
+            </a:r>
+          </a:p>
+          <a:p>
+            <a:pPr algn="l">
+              <a:spcAft>
+                <a:spcPts val="250"/>
+              </a:spcAft>
+            </a:pPr>
+            <a:r>
+              <a:rPr sz="1000" b="0">
+                <a:solidFill>
+                  <a:srgbClr val="6B7280"/>
+                </a:solidFill>
+                <a:latin typeface="Microsoft JhengHei"/>
+                <a:ea typeface="Microsoft JhengHei"/>
+                <a:cs typeface="Microsoft JhengHei"/>
+              </a:rPr>
+              <a:t>[23] Lumer, E., et al. Toolshed: Scale Tool-Equipped Agents with Advanced RAG-Tool Fusion and Tool Knowledge Bases. In ICAART 2025.</a:t>
+            </a:r>
+          </a:p>
+          <a:p>
+            <a:pPr algn="l">
+              <a:spcAft>
+                <a:spcPts val="250"/>
+              </a:spcAft>
+            </a:pPr>
+            <a:r>
+              <a:rPr sz="1000" b="0">
+                <a:solidFill>
+                  <a:srgbClr val="6B7280"/>
+                </a:solidFill>
+                <a:latin typeface="Microsoft JhengHei"/>
+                <a:ea typeface="Microsoft JhengHei"/>
+                <a:cs typeface="Microsoft JhengHei"/>
+              </a:rPr>
+              <a:t>[24] Liu, X., et al. ControlLLM: Augment Language Models with Tools by Searching on Graphs. In ECCV 2024.</a:t>
+            </a:r>
+          </a:p>
+          <a:p>
+            <a:pPr algn="l">
+              <a:spcAft>
+                <a:spcPts val="200"/>
+              </a:spcAft>
+            </a:pPr>
+            <a:r>
+              <a:rPr sz="600" b="0">
+                <a:solidFill>
+                  <a:srgbClr val="6B7280"/>
+                </a:solidFill>
+                <a:latin typeface="Microsoft JhengHei"/>
+                <a:ea typeface="Microsoft JhengHei"/>
+                <a:cs typeface="Microsoft JhengHei"/>
+              </a:rPr>
+              <a:t> </a:t>
             </a:r>
           </a:p>
           <a:p>
@@ -16720,7 +19772,25 @@
               </a:spcAft>
             </a:pPr>
             <a:r>
-              <a:rPr sz="1050" b="0">
+              <a:rPr sz="1250" b="1">
+                <a:solidFill>
+                  <a:srgbClr val="1F2937"/>
+                </a:solidFill>
+                <a:latin typeface="Microsoft JhengHei"/>
+                <a:ea typeface="Microsoft JhengHei"/>
+                <a:cs typeface="Microsoft JhengHei"/>
+              </a:rPr>
+              <a:t>【arXiv(尚未見會議版)】</a:t>
+            </a:r>
+          </a:p>
+          <a:p>
+            <a:pPr algn="l">
+              <a:spcAft>
+                <a:spcPts val="250"/>
+              </a:spcAft>
+            </a:pPr>
+            <a:r>
+              <a:rPr sz="1000" b="0">
                 <a:solidFill>
                   <a:srgbClr val="6B7280"/>
                 </a:solidFill>
@@ -16728,7 +19798,223 @@
                 <a:ea typeface="Microsoft JhengHei"/>
                 <a:cs typeface="Microsoft JhengHei"/>
               </a:rPr>
-              <a:t>[1] Qin, Y., et al. ToolLLM: Facilitating Large Language Models to Master 16000+ Real-world APIs. In ICLR 2024 (Spotlight).</a:t>
+              <a:t>[25] Liu, X., et al. ToolNet: Connecting Large Language Models with Massive Tools via Tool Graph. arXiv:2403.00839, 2024.</a:t>
+            </a:r>
+          </a:p>
+          <a:p>
+            <a:pPr algn="l">
+              <a:spcAft>
+                <a:spcPts val="250"/>
+              </a:spcAft>
+            </a:pPr>
+            <a:r>
+              <a:rPr sz="1000" b="0">
+                <a:solidFill>
+                  <a:srgbClr val="6B7280"/>
+                </a:solidFill>
+                <a:latin typeface="Microsoft JhengHei"/>
+                <a:ea typeface="Microsoft JhengHei"/>
+                <a:cs typeface="Microsoft JhengHei"/>
+              </a:rPr>
+              <a:t>[26] Gao, L., et al. Tool Graph Retriever: Exploring Dependency Graph-based Tool Retrieval for LLMs. arXiv:2508.05152, 2025.</a:t>
+            </a:r>
+          </a:p>
+          <a:p>
+            <a:pPr algn="l">
+              <a:spcAft>
+                <a:spcPts val="250"/>
+              </a:spcAft>
+            </a:pPr>
+            <a:r>
+              <a:rPr sz="1000" b="0">
+                <a:solidFill>
+                  <a:srgbClr val="6B7280"/>
+                </a:solidFill>
+                <a:latin typeface="Microsoft JhengHei"/>
+                <a:ea typeface="Microsoft JhengHei"/>
+                <a:cs typeface="Microsoft JhengHei"/>
+              </a:rPr>
+              <a:t>[27] Patel, B., Belli, D., et al. Dynamic Tool Dependency Retrieval for Lightweight Function Calling. arXiv:2512.17052, 2025.</a:t>
+            </a:r>
+          </a:p>
+          <a:p>
+            <a:pPr algn="l">
+              <a:spcAft>
+                <a:spcPts val="250"/>
+              </a:spcAft>
+            </a:pPr>
+            <a:r>
+              <a:rPr sz="1000" b="0">
+                <a:solidFill>
+                  <a:srgbClr val="6B7280"/>
+                </a:solidFill>
+                <a:latin typeface="Microsoft JhengHei"/>
+                <a:ea typeface="Microsoft JhengHei"/>
+                <a:cs typeface="Microsoft JhengHei"/>
+              </a:rPr>
+              <a:t>[28] Chen, W., Li, Z. Octopus v2: On-device Language Model for Super Agent. arXiv:2404.01744, 2024.</a:t>
+            </a:r>
+          </a:p>
+          <a:p>
+            <a:pPr algn="l">
+              <a:spcAft>
+                <a:spcPts val="250"/>
+              </a:spcAft>
+            </a:pPr>
+            <a:r>
+              <a:rPr sz="1000" b="0">
+                <a:solidFill>
+                  <a:srgbClr val="6B7280"/>
+                </a:solidFill>
+                <a:latin typeface="Microsoft JhengHei"/>
+                <a:ea typeface="Microsoft JhengHei"/>
+                <a:cs typeface="Microsoft JhengHei"/>
+              </a:rPr>
+              <a:t>[29] Yao, S., et al. τ-bench: A Benchmark for Tool-Agent-User Interaction in Real-World Domains. arXiv:2406.12045, 2024.</a:t>
+            </a:r>
+          </a:p>
+          <a:p>
+            <a:pPr algn="l">
+              <a:spcAft>
+                <a:spcPts val="250"/>
+              </a:spcAft>
+            </a:pPr>
+            <a:r>
+              <a:rPr sz="1000" b="0">
+                <a:solidFill>
+                  <a:srgbClr val="6B7280"/>
+                </a:solidFill>
+                <a:latin typeface="Microsoft JhengHei"/>
+                <a:ea typeface="Microsoft JhengHei"/>
+                <a:cs typeface="Microsoft JhengHei"/>
+              </a:rPr>
+              <a:t>[30] Gan, T., Sun, Q. RAG-MCP: Mitigating Prompt Bloat in LLM Tool Selection via RAG. arXiv:2505.03275, 2025.</a:t>
+            </a:r>
+          </a:p>
+          <a:p>
+            <a:pPr algn="l">
+              <a:spcAft>
+                <a:spcPts val="250"/>
+              </a:spcAft>
+            </a:pPr>
+            <a:r>
+              <a:rPr sz="1000" b="0">
+                <a:solidFill>
+                  <a:srgbClr val="6B7280"/>
+                </a:solidFill>
+                <a:latin typeface="Microsoft JhengHei"/>
+                <a:ea typeface="Microsoft JhengHei"/>
+                <a:cs typeface="Microsoft JhengHei"/>
+              </a:rPr>
+              <a:t>[31] Fei, X., et al. MCP-Zero: Active Tool Discovery for Autonomous LLM Agents. arXiv:2506.01056, 2025.</a:t>
+            </a:r>
+          </a:p>
+          <a:p>
+            <a:pPr algn="l">
+              <a:spcAft>
+                <a:spcPts val="250"/>
+              </a:spcAft>
+            </a:pPr>
+            <a:r>
+              <a:rPr sz="1000" b="0">
+                <a:solidFill>
+                  <a:srgbClr val="6B7280"/>
+                </a:solidFill>
+                <a:latin typeface="Microsoft JhengHei"/>
+                <a:ea typeface="Microsoft JhengHei"/>
+                <a:cs typeface="Microsoft JhengHei"/>
+              </a:rPr>
+              <a:t>[32] Lumer, E., et al. ScaleMCP: Dynamic and Auto-Synchronizing Model Context Protocol Tools for LLM Agents. arXiv:2505.06416, 2025.</a:t>
+            </a:r>
+          </a:p>
+          <a:p>
+            <a:pPr algn="l">
+              <a:spcAft>
+                <a:spcPts val="250"/>
+              </a:spcAft>
+            </a:pPr>
+            <a:r>
+              <a:rPr sz="1000" b="0">
+                <a:solidFill>
+                  <a:srgbClr val="6B7280"/>
+                </a:solidFill>
+                <a:latin typeface="Microsoft JhengHei"/>
+                <a:ea typeface="Microsoft JhengHei"/>
+                <a:cs typeface="Microsoft JhengHei"/>
+              </a:rPr>
+              <a:t>[33] Luo, Z., et al. MCP-Universe: Benchmarking LLMs with Real-World Model Context Protocol Servers. arXiv:2508.14704, 2025.</a:t>
+            </a:r>
+          </a:p>
+          <a:p>
+            <a:pPr algn="l">
+              <a:spcAft>
+                <a:spcPts val="250"/>
+              </a:spcAft>
+            </a:pPr>
+            <a:r>
+              <a:rPr sz="1000" b="0">
+                <a:solidFill>
+                  <a:srgbClr val="6B7280"/>
+                </a:solidFill>
+                <a:latin typeface="Microsoft JhengHei"/>
+                <a:ea typeface="Microsoft JhengHei"/>
+                <a:cs typeface="Microsoft JhengHei"/>
+              </a:rPr>
+              <a:t>[34] Wang, Z., et al. MCP-Bench: Benchmarking Tool-Using LLM Agents with Complex Real-World Tasks via MCP Servers. arXiv:2508.20453, 2025.</a:t>
+            </a:r>
+          </a:p>
+          <a:p>
+            <a:pPr algn="l">
+              <a:spcAft>
+                <a:spcPts val="250"/>
+              </a:spcAft>
+            </a:pPr>
+            <a:r>
+              <a:rPr sz="1000" b="0">
+                <a:solidFill>
+                  <a:srgbClr val="6B7280"/>
+                </a:solidFill>
+                <a:latin typeface="Microsoft JhengHei"/>
+                <a:ea typeface="Microsoft JhengHei"/>
+                <a:cs typeface="Microsoft JhengHei"/>
+              </a:rPr>
+              <a:t>[35] Mo, G., et al. LiveMCPBench: Can Agents Navigate an Ocean of MCP Tools? arXiv:2508.01780, 2025.</a:t>
+            </a:r>
+          </a:p>
+          <a:p>
+            <a:pPr algn="l">
+              <a:spcAft>
+                <a:spcPts val="250"/>
+              </a:spcAft>
+            </a:pPr>
+            <a:r>
+              <a:rPr sz="1000" b="0">
+                <a:solidFill>
+                  <a:srgbClr val="6B7280"/>
+                </a:solidFill>
+                <a:latin typeface="Microsoft JhengHei"/>
+                <a:ea typeface="Microsoft JhengHei"/>
+                <a:cs typeface="Microsoft JhengHei"/>
+              </a:rPr>
+              <a:t>[36] Fan, S., Ding, X., Zhang, L., Mo, L. MCPToolBench++: A Large Scale AI Agent MCP Tool Use Benchmark. arXiv:2508.07575, 2025.</a:t>
+            </a:r>
+          </a:p>
+          <a:p>
+            <a:pPr algn="l">
+              <a:spcAft>
+                <a:spcPts val="200"/>
+              </a:spcAft>
+            </a:pPr>
+            <a:r>
+              <a:rPr sz="600" b="0">
+                <a:solidFill>
+                  <a:srgbClr val="6B7280"/>
+                </a:solidFill>
+                <a:latin typeface="Microsoft JhengHei"/>
+                <a:ea typeface="Microsoft JhengHei"/>
+                <a:cs typeface="Microsoft JhengHei"/>
+              </a:rPr>
+              <a:t> </a:t>
             </a:r>
           </a:p>
           <a:p>
@@ -16738,25 +20024,25 @@
               </a:spcAft>
             </a:pPr>
             <a:r>
-              <a:rPr sz="1050" b="0">
-                <a:solidFill>
-                  <a:srgbClr val="6B7280"/>
-                </a:solidFill>
-                <a:latin typeface="Microsoft JhengHei"/>
-                <a:ea typeface="Microsoft JhengHei"/>
-                <a:cs typeface="Microsoft JhengHei"/>
-              </a:rPr>
-              <a:t>[2] Schick, T., et al. Toolformer: Language Models Can Teach Themselves to Use Tools. In NeurIPS 2023.</a:t>
+              <a:rPr sz="1250" b="1">
+                <a:solidFill>
+                  <a:srgbClr val="1F2937"/>
+                </a:solidFill>
+                <a:latin typeface="Microsoft JhengHei"/>
+                <a:ea typeface="Microsoft JhengHei"/>
+                <a:cs typeface="Microsoft JhengHei"/>
+              </a:rPr>
+              <a:t>【G 類:activation 注入(皆 2026 arXiv 預印本)】</a:t>
             </a:r>
           </a:p>
           <a:p>
             <a:pPr algn="l">
               <a:spcAft>
-                <a:spcPts val="300"/>
+                <a:spcPts val="250"/>
               </a:spcAft>
             </a:pPr>
             <a:r>
-              <a:rPr sz="1050" b="0">
+              <a:rPr sz="1000" b="0">
                 <a:solidFill>
                   <a:srgbClr val="6B7280"/>
                 </a:solidFill>
@@ -16764,17 +20050,17 @@
                 <a:ea typeface="Microsoft JhengHei"/>
                 <a:cs typeface="Microsoft JhengHei"/>
               </a:rPr>
-              <a:t>[3] Hao, S., Liu, T., Wang, Z., Hu, Z. ToolkenGPT: Augmenting Frozen Language Models with Massive Tools via Tool Embeddings. In NeurIPS 2023 (Oral).</a:t>
+              <a:t>[37] ASA: Training-Free Representation Engineering for Tool-Calling Agents. arXiv:2602.04935, 2026.</a:t>
             </a:r>
           </a:p>
           <a:p>
             <a:pPr algn="l">
               <a:spcAft>
-                <a:spcPts val="300"/>
+                <a:spcPts val="250"/>
               </a:spcAft>
             </a:pPr>
             <a:r>
-              <a:rPr sz="1050" b="0">
+              <a:rPr sz="1000" b="0">
                 <a:solidFill>
                   <a:srgbClr val="6B7280"/>
                 </a:solidFill>
@@ -16782,17 +20068,17 @@
                 <a:ea typeface="Microsoft JhengHei"/>
                 <a:cs typeface="Microsoft JhengHei"/>
               </a:rPr>
-              <a:t>[4] Patil, S. G., Zhang, T., Wang, X., Gonzalez, J. E. Gorilla: Large Language Model Connected with Massive APIs. In NeurIPS 2024.</a:t>
+              <a:t>[38] Sun, C.-E., Liu, L., Yan, G., Wang, Z., Weng, T.-W. LLM Agents Already Know When to Call Tools — Even Without Reasoning. arXiv:2605.09252, 2026.</a:t>
             </a:r>
           </a:p>
           <a:p>
             <a:pPr algn="l">
               <a:spcAft>
-                <a:spcPts val="300"/>
+                <a:spcPts val="250"/>
               </a:spcAft>
             </a:pPr>
             <a:r>
-              <a:rPr sz="1050" b="0">
+              <a:rPr sz="1000" b="0">
                 <a:solidFill>
                   <a:srgbClr val="6B7280"/>
                 </a:solidFill>
@@ -16800,17 +20086,17 @@
                 <a:ea typeface="Microsoft JhengHei"/>
                 <a:cs typeface="Microsoft JhengHei"/>
               </a:rPr>
-              <a:t>[5] Wang, R., et al. ToolGen: Unified Tool Retrieval and Calling via Generation. In ICLR 2025.</a:t>
+              <a:t>[39] Cheng, Y., Fan, C., JafariRaviz, M., Rezaei, K., Feizi, S. Model-Adaptive Tool Necessity Reveals the Knowing-Doing Gap in LLM Tool Use. arXiv:2605.14038, 2026.</a:t>
             </a:r>
           </a:p>
           <a:p>
             <a:pPr algn="l">
               <a:spcAft>
-                <a:spcPts val="300"/>
+                <a:spcPts val="250"/>
               </a:spcAft>
             </a:pPr>
             <a:r>
-              <a:rPr sz="1050" b="0">
+              <a:rPr sz="1000" b="0">
                 <a:solidFill>
                   <a:srgbClr val="6B7280"/>
                 </a:solidFill>
@@ -16818,223 +20104,7 @@
                 <a:ea typeface="Microsoft JhengHei"/>
                 <a:cs typeface="Microsoft JhengHei"/>
               </a:rPr>
-              <a:t>[6] Du, Y., Wei, F., Zhang, H. AnyTool: Self-Reflective, Hierarchical Agents for Large-Scale API Calls. In ICML 2024.</a:t>
-            </a:r>
-          </a:p>
-          <a:p>
-            <a:pPr algn="l">
-              <a:spcAft>
-                <a:spcPts val="300"/>
-              </a:spcAft>
-            </a:pPr>
-            <a:r>
-              <a:rPr sz="1050" b="0">
-                <a:solidFill>
-                  <a:srgbClr val="6B7280"/>
-                </a:solidFill>
-                <a:latin typeface="Microsoft JhengHei"/>
-                <a:ea typeface="Microsoft JhengHei"/>
-                <a:cs typeface="Microsoft JhengHei"/>
-              </a:rPr>
-              <a:t>[7] Lin, Q., et al. Hammer: Robust Function-Calling for On-Device Language Models via Function Masking. In ICLR 2025 (Spotlight).</a:t>
-            </a:r>
-          </a:p>
-          <a:p>
-            <a:pPr algn="l">
-              <a:spcAft>
-                <a:spcPts val="300"/>
-              </a:spcAft>
-            </a:pPr>
-            <a:r>
-              <a:rPr sz="1050" b="0">
-                <a:solidFill>
-                  <a:srgbClr val="6B7280"/>
-                </a:solidFill>
-                <a:latin typeface="Microsoft JhengHei"/>
-                <a:ea typeface="Microsoft JhengHei"/>
-                <a:cs typeface="Microsoft JhengHei"/>
-              </a:rPr>
-              <a:t>[8] Liu, W., et al. ToolACE: Winning the Points of LLM Function Calling. In ICLR 2025.</a:t>
-            </a:r>
-          </a:p>
-          <a:p>
-            <a:pPr algn="l">
-              <a:spcAft>
-                <a:spcPts val="300"/>
-              </a:spcAft>
-            </a:pPr>
-            <a:r>
-              <a:rPr sz="1050" b="0">
-                <a:solidFill>
-                  <a:srgbClr val="6B7280"/>
-                </a:solidFill>
-                <a:latin typeface="Microsoft JhengHei"/>
-                <a:ea typeface="Microsoft JhengHei"/>
-                <a:cs typeface="Microsoft JhengHei"/>
-              </a:rPr>
-              <a:t>[9] Patil, S. G., et al. The Berkeley Function Calling Leaderboard (BFCL): From Tool Use to Agentic Evaluation of LLMs. In ICML 2025.</a:t>
-            </a:r>
-          </a:p>
-          <a:p>
-            <a:pPr algn="l">
-              <a:spcAft>
-                <a:spcPts val="300"/>
-              </a:spcAft>
-            </a:pPr>
-            <a:r>
-              <a:rPr sz="1050" b="0">
-                <a:solidFill>
-                  <a:srgbClr val="6B7280"/>
-                </a:solidFill>
-                <a:latin typeface="Microsoft JhengHei"/>
-                <a:ea typeface="Microsoft JhengHei"/>
-                <a:cs typeface="Microsoft JhengHei"/>
-              </a:rPr>
-              <a:t>[10] Huang, Y., et al. MetaTool Benchmark for Large Language Models: Deciding Whether to Use Tools and Which to Use. In ICLR 2024.</a:t>
-            </a:r>
-          </a:p>
-          <a:p>
-            <a:pPr algn="l">
-              <a:spcAft>
-                <a:spcPts val="300"/>
-              </a:spcAft>
-            </a:pPr>
-            <a:r>
-              <a:rPr sz="1050" b="0">
-                <a:solidFill>
-                  <a:srgbClr val="6B7280"/>
-                </a:solidFill>
-                <a:latin typeface="Microsoft JhengHei"/>
-                <a:ea typeface="Microsoft JhengHei"/>
-                <a:cs typeface="Microsoft JhengHei"/>
-              </a:rPr>
-              <a:t>[11] Shen, Y., et al. TaskBench: Benchmarking Large Language Models for Task Automation. In NeurIPS 2024 (Datasets &amp; Benchmarks).</a:t>
-            </a:r>
-          </a:p>
-          <a:p>
-            <a:pPr algn="l">
-              <a:spcAft>
-                <a:spcPts val="300"/>
-              </a:spcAft>
-            </a:pPr>
-            <a:r>
-              <a:rPr sz="1050" b="0">
-                <a:solidFill>
-                  <a:srgbClr val="6B7280"/>
-                </a:solidFill>
-                <a:latin typeface="Microsoft JhengHei"/>
-                <a:ea typeface="Microsoft JhengHei"/>
-                <a:cs typeface="Microsoft JhengHei"/>
-              </a:rPr>
-              <a:t>[12] Zhuang, Y., et al. ToolQA: A Dataset for LLM Question Answering with External Tools. In NeurIPS 2023 (Datasets &amp; Benchmarks).</a:t>
-            </a:r>
-          </a:p>
-          <a:p>
-            <a:pPr algn="l">
-              <a:spcAft>
-                <a:spcPts val="200"/>
-              </a:spcAft>
-            </a:pPr>
-            <a:r>
-              <a:rPr sz="600" b="0">
-                <a:solidFill>
-                  <a:srgbClr val="6B7280"/>
-                </a:solidFill>
-                <a:latin typeface="Microsoft JhengHei"/>
-                <a:ea typeface="Microsoft JhengHei"/>
-                <a:cs typeface="Microsoft JhengHei"/>
-              </a:rPr>
-              <a:t> </a:t>
-            </a:r>
-          </a:p>
-          <a:p>
-            <a:pPr algn="l">
-              <a:spcAft>
-                <a:spcPts val="300"/>
-              </a:spcAft>
-            </a:pPr>
-            <a:r>
-              <a:rPr sz="1250" b="1">
-                <a:solidFill>
-                  <a:srgbClr val="1F2937"/>
-                </a:solidFill>
-                <a:latin typeface="Microsoft JhengHei"/>
-                <a:ea typeface="Microsoft JhengHei"/>
-                <a:cs typeface="Microsoft JhengHei"/>
-              </a:rPr>
-              <a:t>【ACL 系與其他一級會議】</a:t>
-            </a:r>
-          </a:p>
-          <a:p>
-            <a:pPr algn="l">
-              <a:spcAft>
-                <a:spcPts val="300"/>
-              </a:spcAft>
-            </a:pPr>
-            <a:r>
-              <a:rPr sz="1050" b="0">
-                <a:solidFill>
-                  <a:srgbClr val="6B7280"/>
-                </a:solidFill>
-                <a:latin typeface="Microsoft JhengHei"/>
-                <a:ea typeface="Microsoft JhengHei"/>
-                <a:cs typeface="Microsoft JhengHei"/>
-              </a:rPr>
-              <a:t>[13] Qu, C., et al. Towards Completeness-Oriented Tool Retrieval for Large Language Models (COLT). In CIKM 2024.</a:t>
-            </a:r>
-          </a:p>
-          <a:p>
-            <a:pPr algn="l">
-              <a:spcAft>
-                <a:spcPts val="300"/>
-              </a:spcAft>
-            </a:pPr>
-            <a:r>
-              <a:rPr sz="1050" b="0">
-                <a:solidFill>
-                  <a:srgbClr val="6B7280"/>
-                </a:solidFill>
-                <a:latin typeface="Microsoft JhengHei"/>
-                <a:ea typeface="Microsoft JhengHei"/>
-                <a:cs typeface="Microsoft JhengHei"/>
-              </a:rPr>
-              <a:t>[14] Chen, Y., et al. Re-Invoke: Tool Invocation Rewriting for Zero-Shot Tool Retrieval. In Findings of EMNLP 2024.</a:t>
-            </a:r>
-          </a:p>
-          <a:p>
-            <a:pPr algn="l">
-              <a:spcAft>
-                <a:spcPts val="300"/>
-              </a:spcAft>
-            </a:pPr>
-            <a:r>
-              <a:rPr sz="1050" b="0">
-                <a:solidFill>
-                  <a:srgbClr val="6B7280"/>
-                </a:solidFill>
-                <a:latin typeface="Microsoft JhengHei"/>
-                <a:ea typeface="Microsoft JhengHei"/>
-                <a:cs typeface="Microsoft JhengHei"/>
-              </a:rPr>
-              <a:t>[15] Zheng, Y., et al. ToolRerank: Adaptive and Hierarchy-Aware Reranking for Tool Retrieval. In LREC-COLING 2024.</a:t>
-            </a:r>
-          </a:p>
-          <a:p>
-            <a:pPr algn="l">
-              <a:spcAft>
-                <a:spcPts val="300"/>
-              </a:spcAft>
-            </a:pPr>
-            <a:r>
-              <a:rPr sz="1050" b="0">
-                <a:solidFill>
-                  <a:srgbClr val="6B7280"/>
-                </a:solidFill>
-                <a:latin typeface="Microsoft JhengHei"/>
-                <a:ea typeface="Microsoft JhengHei"/>
-                <a:cs typeface="Microsoft JhengHei"/>
-              </a:rPr>
-              <a:t>[16] Erdogan, L. E., et al. TinyAgent: Function Calling at the Edge. In EMNLP 2024 (System Demonstrations).</a:t>
+              <a:t>[40] Chen, S. Looking Is Not Picking: An Attention-Segment Account of Tool-Selection Failures in LLM Agents. arXiv:2606.16364, 2026.</a:t>
             </a:r>
           </a:p>
         </p:txBody>
@@ -17108,638 +20178,7 @@
                 <a:ea typeface="Microsoft JhengHei"/>
                 <a:cs typeface="Microsoft JhengHei"/>
               </a:rPr>
-              <a:t>20</a:t>
-            </a:r>
-          </a:p>
-        </p:txBody>
-      </p:sp>
-    </p:spTree>
-  </p:cSld>
-  <p:clrMapOvr>
-    <a:masterClrMapping/>
-  </p:clrMapOvr>
-</p:sld>
-</file>
-
-<file path=ppt/slides/slide21.xml><?xml version="1.0" encoding="utf-8"?>
-<p:sld xmlns:a="http://schemas.openxmlformats.org/drawingml/2006/main" xmlns:p="http://schemas.openxmlformats.org/presentationml/2006/main" xmlns:r="http://schemas.openxmlformats.org/officeDocument/2006/relationships">
-  <p:cSld>
-    <p:spTree>
-      <p:nvGrpSpPr>
-        <p:cNvPr id="1" name=""/>
-        <p:cNvGrpSpPr/>
-        <p:nvPr/>
-      </p:nvGrpSpPr>
-      <p:grpSpPr/>
-      <p:sp>
-        <p:nvSpPr>
-          <p:cNvPr id="2" name="TextBox 1"/>
-          <p:cNvSpPr txBox="1"/>
-          <p:nvPr/>
-        </p:nvSpPr>
-        <p:spPr>
-          <a:xfrm>
-            <a:off x="502920" y="256032"/>
-            <a:ext cx="11155680" cy="365760"/>
-          </a:xfrm>
-          <a:prstGeom prst="rect">
-            <a:avLst/>
-          </a:prstGeom>
-          <a:noFill/>
-        </p:spPr>
-        <p:txBody>
-          <a:bodyPr wrap="square" anchor="t" lIns="0" rIns="0" tIns="0" bIns="0">
-            <a:spAutoFit/>
-          </a:bodyPr>
-          <a:lstStyle/>
-          <a:p>
-            <a:pPr algn="l"/>
-            <a:r>
-              <a:rPr sz="1300" b="1">
-                <a:solidFill>
-                  <a:srgbClr val="6B7280"/>
-                </a:solidFill>
-                <a:latin typeface="Microsoft JhengHei"/>
-                <a:ea typeface="Microsoft JhengHei"/>
-                <a:cs typeface="Microsoft JhengHei"/>
-              </a:rPr>
-              <a:t>References</a:t>
-            </a:r>
-          </a:p>
-        </p:txBody>
-      </p:sp>
-      <p:sp>
-        <p:nvSpPr>
-          <p:cNvPr id="3" name="TextBox 2"/>
-          <p:cNvSpPr txBox="1"/>
-          <p:nvPr/>
-        </p:nvSpPr>
-        <p:spPr>
-          <a:xfrm>
-            <a:off x="502920" y="566928"/>
-            <a:ext cx="11155680" cy="777240"/>
-          </a:xfrm>
-          <a:prstGeom prst="rect">
-            <a:avLst/>
-          </a:prstGeom>
-          <a:noFill/>
-        </p:spPr>
-        <p:txBody>
-          <a:bodyPr wrap="square" anchor="t" lIns="0" rIns="0" tIns="0" bIns="0">
-            <a:spAutoFit/>
-          </a:bodyPr>
-          <a:lstStyle/>
-          <a:p>
-            <a:pPr algn="l"/>
-            <a:r>
-              <a:rPr sz="2700" b="1">
-                <a:solidFill>
-                  <a:srgbClr val="1F2937"/>
-                </a:solidFill>
-                <a:latin typeface="Microsoft JhengHei"/>
-                <a:ea typeface="Microsoft JhengHei"/>
-                <a:cs typeface="Microsoft JhengHei"/>
-              </a:rPr>
-              <a:t>參考文獻(2/2)</a:t>
-            </a:r>
-          </a:p>
-        </p:txBody>
-      </p:sp>
-      <p:sp>
-        <p:nvSpPr>
-          <p:cNvPr id="4" name="Rounded Rectangle 3"/>
-          <p:cNvSpPr/>
-          <p:nvPr/>
-        </p:nvSpPr>
-        <p:spPr>
-          <a:xfrm>
-            <a:off x="521207" y="1298448"/>
-            <a:ext cx="1051560" cy="41148"/>
-          </a:xfrm>
-          <a:prstGeom prst="roundRect">
-            <a:avLst>
-              <a:gd name="adj" fmla="val 50000"/>
-            </a:avLst>
-          </a:prstGeom>
-          <a:solidFill>
-            <a:srgbClr val="2563EB"/>
-          </a:solidFill>
-          <a:ln>
-            <a:noFill/>
-          </a:ln>
-          <a:effectLst/>
-        </p:spPr>
-        <p:style>
-          <a:lnRef idx="1">
-            <a:schemeClr val="accent1"/>
-          </a:lnRef>
-          <a:fillRef idx="3">
-            <a:schemeClr val="accent1"/>
-          </a:fillRef>
-          <a:effectRef idx="2">
-            <a:schemeClr val="accent1"/>
-          </a:effectRef>
-          <a:fontRef idx="minor">
-            <a:schemeClr val="lt1"/>
-          </a:fontRef>
-        </p:style>
-        <p:txBody>
-          <a:bodyPr rtlCol="0" anchor="ctr"/>
-          <a:lstStyle/>
-          <a:p>
-            <a:pPr algn="ctr"/>
-          </a:p>
-        </p:txBody>
-      </p:sp>
-      <p:sp>
-        <p:nvSpPr>
-          <p:cNvPr id="5" name="TextBox 4"/>
-          <p:cNvSpPr txBox="1"/>
-          <p:nvPr/>
-        </p:nvSpPr>
-        <p:spPr>
-          <a:xfrm>
-            <a:off x="502920" y="1508760"/>
-            <a:ext cx="11201400" cy="4937760"/>
-          </a:xfrm>
-          <a:prstGeom prst="rect">
-            <a:avLst/>
-          </a:prstGeom>
-          <a:noFill/>
-        </p:spPr>
-        <p:txBody>
-          <a:bodyPr wrap="square" anchor="t" lIns="0" rIns="0" tIns="0" bIns="0">
-            <a:spAutoFit/>
-          </a:bodyPr>
-          <a:lstStyle/>
-          <a:p>
-            <a:pPr algn="l">
-              <a:spcAft>
-                <a:spcPts val="300"/>
-              </a:spcAft>
-            </a:pPr>
-            <a:r>
-              <a:rPr sz="1050" b="0">
-                <a:solidFill>
-                  <a:srgbClr val="6B7280"/>
-                </a:solidFill>
-                <a:latin typeface="Microsoft JhengHei"/>
-                <a:ea typeface="Microsoft JhengHei"/>
-                <a:cs typeface="Microsoft JhengHei"/>
-              </a:rPr>
-              <a:t>[17] Yuan, S., et al. EasyTool: Enhancing LLM-based Agents with Concise Tool Instruction. In NAACL 2025.</a:t>
-            </a:r>
-          </a:p>
-          <a:p>
-            <a:pPr algn="l">
-              <a:spcAft>
-                <a:spcPts val="300"/>
-              </a:spcAft>
-            </a:pPr>
-            <a:r>
-              <a:rPr sz="1050" b="0">
-                <a:solidFill>
-                  <a:srgbClr val="6B7280"/>
-                </a:solidFill>
-                <a:latin typeface="Microsoft JhengHei"/>
-                <a:ea typeface="Microsoft JhengHei"/>
-                <a:cs typeface="Microsoft JhengHei"/>
-              </a:rPr>
-              <a:t>[18] Shi, Z., et al. Retrieval Models Aren't Tool-Savvy: Benchmarking Tool Retrieval for LLMs (ToolRet). In Findings of ACL 2025.</a:t>
-            </a:r>
-          </a:p>
-          <a:p>
-            <a:pPr algn="l">
-              <a:spcAft>
-                <a:spcPts val="300"/>
-              </a:spcAft>
-            </a:pPr>
-            <a:r>
-              <a:rPr sz="1050" b="0">
-                <a:solidFill>
-                  <a:srgbClr val="6B7280"/>
-                </a:solidFill>
-                <a:latin typeface="Microsoft JhengHei"/>
-                <a:ea typeface="Microsoft JhengHei"/>
-                <a:cs typeface="Microsoft JhengHei"/>
-              </a:rPr>
-              <a:t>[19] Li, M., et al. API-Bank: A Comprehensive Benchmark for Tool-Augmented LLMs. In EMNLP 2023.</a:t>
-            </a:r>
-          </a:p>
-          <a:p>
-            <a:pPr algn="l">
-              <a:spcAft>
-                <a:spcPts val="300"/>
-              </a:spcAft>
-            </a:pPr>
-            <a:r>
-              <a:rPr sz="1050" b="0">
-                <a:solidFill>
-                  <a:srgbClr val="6B7280"/>
-                </a:solidFill>
-                <a:latin typeface="Microsoft JhengHei"/>
-                <a:ea typeface="Microsoft JhengHei"/>
-                <a:cs typeface="Microsoft JhengHei"/>
-              </a:rPr>
-              <a:t>[20] Guo, Z., et al. StableToolBench: Towards Stable Large-Scale Benchmarking on Tool Learning of LLMs. In Findings of ACL 2024.</a:t>
-            </a:r>
-          </a:p>
-          <a:p>
-            <a:pPr algn="l">
-              <a:spcAft>
-                <a:spcPts val="300"/>
-              </a:spcAft>
-            </a:pPr>
-            <a:r>
-              <a:rPr sz="1050" b="0">
-                <a:solidFill>
-                  <a:srgbClr val="6B7280"/>
-                </a:solidFill>
-                <a:latin typeface="Microsoft JhengHei"/>
-                <a:ea typeface="Microsoft JhengHei"/>
-                <a:cs typeface="Microsoft JhengHei"/>
-              </a:rPr>
-              <a:t>[21] Wu, M., et al. Seal-Tools: Self-Instruct Tool Learning Dataset for Agent Tuning and Detailed Benchmark. In NLPCC 2024.</a:t>
-            </a:r>
-          </a:p>
-          <a:p>
-            <a:pPr algn="l">
-              <a:spcAft>
-                <a:spcPts val="300"/>
-              </a:spcAft>
-            </a:pPr>
-            <a:r>
-              <a:rPr sz="1050" b="0">
-                <a:solidFill>
-                  <a:srgbClr val="6B7280"/>
-                </a:solidFill>
-                <a:latin typeface="Microsoft JhengHei"/>
-                <a:ea typeface="Microsoft JhengHei"/>
-                <a:cs typeface="Microsoft JhengHei"/>
-              </a:rPr>
-              <a:t>[22] Paramanayakam, V., et al. Less is More: Optimizing Function Calling for LLM Execution on Edge Devices. In DATE 2025.</a:t>
-            </a:r>
-          </a:p>
-          <a:p>
-            <a:pPr algn="l">
-              <a:spcAft>
-                <a:spcPts val="300"/>
-              </a:spcAft>
-            </a:pPr>
-            <a:r>
-              <a:rPr sz="1050" b="0">
-                <a:solidFill>
-                  <a:srgbClr val="6B7280"/>
-                </a:solidFill>
-                <a:latin typeface="Microsoft JhengHei"/>
-                <a:ea typeface="Microsoft JhengHei"/>
-                <a:cs typeface="Microsoft JhengHei"/>
-              </a:rPr>
-              <a:t>[23] Lumer, E., et al. Toolshed: Scale Tool-Equipped Agents with Advanced RAG-Tool Fusion and Tool Knowledge Bases. In ICAART 2025.</a:t>
-            </a:r>
-          </a:p>
-          <a:p>
-            <a:pPr algn="l">
-              <a:spcAft>
-                <a:spcPts val="300"/>
-              </a:spcAft>
-            </a:pPr>
-            <a:r>
-              <a:rPr sz="1050" b="0">
-                <a:solidFill>
-                  <a:srgbClr val="6B7280"/>
-                </a:solidFill>
-                <a:latin typeface="Microsoft JhengHei"/>
-                <a:ea typeface="Microsoft JhengHei"/>
-                <a:cs typeface="Microsoft JhengHei"/>
-              </a:rPr>
-              <a:t>[24] Liu, X., et al. ControlLLM: Augment Language Models with Tools by Searching on Graphs. In ECCV 2024.</a:t>
-            </a:r>
-          </a:p>
-          <a:p>
-            <a:pPr algn="l">
-              <a:spcAft>
-                <a:spcPts val="200"/>
-              </a:spcAft>
-            </a:pPr>
-            <a:r>
-              <a:rPr sz="600" b="0">
-                <a:solidFill>
-                  <a:srgbClr val="6B7280"/>
-                </a:solidFill>
-                <a:latin typeface="Microsoft JhengHei"/>
-                <a:ea typeface="Microsoft JhengHei"/>
-                <a:cs typeface="Microsoft JhengHei"/>
-              </a:rPr>
-              <a:t> </a:t>
-            </a:r>
-          </a:p>
-          <a:p>
-            <a:pPr algn="l">
-              <a:spcAft>
-                <a:spcPts val="300"/>
-              </a:spcAft>
-            </a:pPr>
-            <a:r>
-              <a:rPr sz="1250" b="1">
-                <a:solidFill>
-                  <a:srgbClr val="1F2937"/>
-                </a:solidFill>
-                <a:latin typeface="Microsoft JhengHei"/>
-                <a:ea typeface="Microsoft JhengHei"/>
-                <a:cs typeface="Microsoft JhengHei"/>
-              </a:rPr>
-              <a:t>【arXiv(尚未見會議版)】</a:t>
-            </a:r>
-          </a:p>
-          <a:p>
-            <a:pPr algn="l">
-              <a:spcAft>
-                <a:spcPts val="300"/>
-              </a:spcAft>
-            </a:pPr>
-            <a:r>
-              <a:rPr sz="1050" b="0">
-                <a:solidFill>
-                  <a:srgbClr val="6B7280"/>
-                </a:solidFill>
-                <a:latin typeface="Microsoft JhengHei"/>
-                <a:ea typeface="Microsoft JhengHei"/>
-                <a:cs typeface="Microsoft JhengHei"/>
-              </a:rPr>
-              <a:t>[25] Liu, X., et al. ToolNet: Connecting Large Language Models with Massive Tools via Tool Graph. arXiv:2403.00839, 2024.</a:t>
-            </a:r>
-          </a:p>
-          <a:p>
-            <a:pPr algn="l">
-              <a:spcAft>
-                <a:spcPts val="300"/>
-              </a:spcAft>
-            </a:pPr>
-            <a:r>
-              <a:rPr sz="1050" b="0">
-                <a:solidFill>
-                  <a:srgbClr val="6B7280"/>
-                </a:solidFill>
-                <a:latin typeface="Microsoft JhengHei"/>
-                <a:ea typeface="Microsoft JhengHei"/>
-                <a:cs typeface="Microsoft JhengHei"/>
-              </a:rPr>
-              <a:t>[26] Gao, L., et al. Tool Graph Retriever: Exploring Dependency Graph-based Tool Retrieval for LLMs. arXiv:2508.05152, 2025.</a:t>
-            </a:r>
-          </a:p>
-          <a:p>
-            <a:pPr algn="l">
-              <a:spcAft>
-                <a:spcPts val="300"/>
-              </a:spcAft>
-            </a:pPr>
-            <a:r>
-              <a:rPr sz="1050" b="0">
-                <a:solidFill>
-                  <a:srgbClr val="6B7280"/>
-                </a:solidFill>
-                <a:latin typeface="Microsoft JhengHei"/>
-                <a:ea typeface="Microsoft JhengHei"/>
-                <a:cs typeface="Microsoft JhengHei"/>
-              </a:rPr>
-              <a:t>[27] Patel, B., Belli, D., et al. Dynamic Tool Dependency Retrieval for Lightweight Function Calling. arXiv:2512.17052, 2025.</a:t>
-            </a:r>
-          </a:p>
-          <a:p>
-            <a:pPr algn="l">
-              <a:spcAft>
-                <a:spcPts val="300"/>
-              </a:spcAft>
-            </a:pPr>
-            <a:r>
-              <a:rPr sz="1050" b="0">
-                <a:solidFill>
-                  <a:srgbClr val="6B7280"/>
-                </a:solidFill>
-                <a:latin typeface="Microsoft JhengHei"/>
-                <a:ea typeface="Microsoft JhengHei"/>
-                <a:cs typeface="Microsoft JhengHei"/>
-              </a:rPr>
-              <a:t>[28] Chen, W., Li, Z. Octopus v2: On-device Language Model for Super Agent. arXiv:2404.01744, 2024.</a:t>
-            </a:r>
-          </a:p>
-          <a:p>
-            <a:pPr algn="l">
-              <a:spcAft>
-                <a:spcPts val="300"/>
-              </a:spcAft>
-            </a:pPr>
-            <a:r>
-              <a:rPr sz="1050" b="0">
-                <a:solidFill>
-                  <a:srgbClr val="6B7280"/>
-                </a:solidFill>
-                <a:latin typeface="Microsoft JhengHei"/>
-                <a:ea typeface="Microsoft JhengHei"/>
-                <a:cs typeface="Microsoft JhengHei"/>
-              </a:rPr>
-              <a:t>[29] Yao, S., et al. τ-bench: A Benchmark for Tool-Agent-User Interaction in Real-World Domains. arXiv:2406.12045, 2024.</a:t>
-            </a:r>
-          </a:p>
-          <a:p>
-            <a:pPr algn="l">
-              <a:spcAft>
-                <a:spcPts val="300"/>
-              </a:spcAft>
-            </a:pPr>
-            <a:r>
-              <a:rPr sz="1050" b="0">
-                <a:solidFill>
-                  <a:srgbClr val="6B7280"/>
-                </a:solidFill>
-                <a:latin typeface="Microsoft JhengHei"/>
-                <a:ea typeface="Microsoft JhengHei"/>
-                <a:cs typeface="Microsoft JhengHei"/>
-              </a:rPr>
-              <a:t>[30] Gan, T., Sun, Q. RAG-MCP: Mitigating Prompt Bloat in LLM Tool Selection via RAG. arXiv:2505.03275, 2025.</a:t>
-            </a:r>
-          </a:p>
-          <a:p>
-            <a:pPr algn="l">
-              <a:spcAft>
-                <a:spcPts val="300"/>
-              </a:spcAft>
-            </a:pPr>
-            <a:r>
-              <a:rPr sz="1050" b="0">
-                <a:solidFill>
-                  <a:srgbClr val="6B7280"/>
-                </a:solidFill>
-                <a:latin typeface="Microsoft JhengHei"/>
-                <a:ea typeface="Microsoft JhengHei"/>
-                <a:cs typeface="Microsoft JhengHei"/>
-              </a:rPr>
-              <a:t>[31] Fei, X., et al. MCP-Zero: Active Tool Discovery for Autonomous LLM Agents. arXiv:2506.01056, 2025.</a:t>
-            </a:r>
-          </a:p>
-          <a:p>
-            <a:pPr algn="l">
-              <a:spcAft>
-                <a:spcPts val="300"/>
-              </a:spcAft>
-            </a:pPr>
-            <a:r>
-              <a:rPr sz="1050" b="0">
-                <a:solidFill>
-                  <a:srgbClr val="6B7280"/>
-                </a:solidFill>
-                <a:latin typeface="Microsoft JhengHei"/>
-                <a:ea typeface="Microsoft JhengHei"/>
-                <a:cs typeface="Microsoft JhengHei"/>
-              </a:rPr>
-              <a:t>[32] Lumer, E., et al. ScaleMCP: Dynamic and Auto-Synchronizing Model Context Protocol Tools for LLM Agents. arXiv:2505.06416, 2025.</a:t>
-            </a:r>
-          </a:p>
-          <a:p>
-            <a:pPr algn="l">
-              <a:spcAft>
-                <a:spcPts val="300"/>
-              </a:spcAft>
-            </a:pPr>
-            <a:r>
-              <a:rPr sz="1050" b="0">
-                <a:solidFill>
-                  <a:srgbClr val="6B7280"/>
-                </a:solidFill>
-                <a:latin typeface="Microsoft JhengHei"/>
-                <a:ea typeface="Microsoft JhengHei"/>
-                <a:cs typeface="Microsoft JhengHei"/>
-              </a:rPr>
-              <a:t>[33] Luo, Z., et al. MCP-Universe: Benchmarking LLMs with Real-World Model Context Protocol Servers. arXiv:2508.14704, 2025.</a:t>
-            </a:r>
-          </a:p>
-          <a:p>
-            <a:pPr algn="l">
-              <a:spcAft>
-                <a:spcPts val="300"/>
-              </a:spcAft>
-            </a:pPr>
-            <a:r>
-              <a:rPr sz="1050" b="0">
-                <a:solidFill>
-                  <a:srgbClr val="6B7280"/>
-                </a:solidFill>
-                <a:latin typeface="Microsoft JhengHei"/>
-                <a:ea typeface="Microsoft JhengHei"/>
-                <a:cs typeface="Microsoft JhengHei"/>
-              </a:rPr>
-              <a:t>[34] Wang, Z., et al. MCP-Bench: Benchmarking Tool-Using LLM Agents with Complex Real-World Tasks via MCP Servers. arXiv:2508.20453, 2025.</a:t>
-            </a:r>
-          </a:p>
-          <a:p>
-            <a:pPr algn="l">
-              <a:spcAft>
-                <a:spcPts val="300"/>
-              </a:spcAft>
-            </a:pPr>
-            <a:r>
-              <a:rPr sz="1050" b="0">
-                <a:solidFill>
-                  <a:srgbClr val="6B7280"/>
-                </a:solidFill>
-                <a:latin typeface="Microsoft JhengHei"/>
-                <a:ea typeface="Microsoft JhengHei"/>
-                <a:cs typeface="Microsoft JhengHei"/>
-              </a:rPr>
-              <a:t>[35] Mo, G., et al. LiveMCPBench: Can Agents Navigate an Ocean of MCP Tools? arXiv:2508.01780, 2025.</a:t>
-            </a:r>
-          </a:p>
-          <a:p>
-            <a:pPr algn="l">
-              <a:spcAft>
-                <a:spcPts val="300"/>
-              </a:spcAft>
-            </a:pPr>
-            <a:r>
-              <a:rPr sz="1050" b="0">
-                <a:solidFill>
-                  <a:srgbClr val="6B7280"/>
-                </a:solidFill>
-                <a:latin typeface="Microsoft JhengHei"/>
-                <a:ea typeface="Microsoft JhengHei"/>
-                <a:cs typeface="Microsoft JhengHei"/>
-              </a:rPr>
-              <a:t>[36] Fan, S., Ding, X., Zhang, L., Mo, L. MCPToolBench++: A Large Scale AI Agent MCP Tool Use Benchmark. arXiv:2508.07575, 2025.</a:t>
-            </a:r>
-          </a:p>
-        </p:txBody>
-      </p:sp>
-      <p:sp>
-        <p:nvSpPr>
-          <p:cNvPr id="6" name="TextBox 5"/>
-          <p:cNvSpPr txBox="1"/>
-          <p:nvPr/>
-        </p:nvSpPr>
-        <p:spPr>
-          <a:xfrm>
-            <a:off x="502920" y="6473952"/>
-            <a:ext cx="10241280" cy="320040"/>
-          </a:xfrm>
-          <a:prstGeom prst="rect">
-            <a:avLst/>
-          </a:prstGeom>
-          <a:noFill/>
-        </p:spPr>
-        <p:txBody>
-          <a:bodyPr wrap="square" anchor="t" lIns="0" rIns="0" tIns="0" bIns="0">
-            <a:spAutoFit/>
-          </a:bodyPr>
-          <a:lstStyle/>
-          <a:p>
-            <a:pPr algn="l"/>
-            <a:r>
-              <a:rPr sz="950" b="0">
-                <a:solidFill>
-                  <a:srgbClr val="6B7280"/>
-                </a:solidFill>
-                <a:latin typeface="Microsoft JhengHei"/>
-                <a:ea typeface="Microsoft JhengHei"/>
-                <a:cs typeface="Microsoft JhengHei"/>
-              </a:rPr>
-              <a:t/>
-            </a:r>
-          </a:p>
-        </p:txBody>
-      </p:sp>
-      <p:sp>
-        <p:nvSpPr>
-          <p:cNvPr id="7" name="TextBox 6"/>
-          <p:cNvSpPr txBox="1"/>
-          <p:nvPr/>
-        </p:nvSpPr>
-        <p:spPr>
-          <a:xfrm>
-            <a:off x="11292840" y="6473952"/>
-            <a:ext cx="457200" cy="320040"/>
-          </a:xfrm>
-          <a:prstGeom prst="rect">
-            <a:avLst/>
-          </a:prstGeom>
-          <a:noFill/>
-        </p:spPr>
-        <p:txBody>
-          <a:bodyPr wrap="square" anchor="t" lIns="0" rIns="0" tIns="0" bIns="0">
-            <a:spAutoFit/>
-          </a:bodyPr>
-          <a:lstStyle/>
-          <a:p>
-            <a:pPr algn="r"/>
-            <a:r>
-              <a:rPr sz="1100" b="0">
-                <a:solidFill>
-                  <a:srgbClr val="6B7280"/>
-                </a:solidFill>
-                <a:latin typeface="Microsoft JhengHei"/>
-                <a:ea typeface="Microsoft JhengHei"/>
-                <a:cs typeface="Microsoft JhengHei"/>
-              </a:rPr>
-              <a:t>21</a:t>
+              <a:t>23</a:t>
             </a:r>
           </a:p>
         </p:txBody>
@@ -20748,7 +23187,7 @@
                 <a:ea typeface="Microsoft JhengHei"/>
                 <a:cs typeface="Microsoft JhengHei"/>
               </a:rPr>
-              <a:t>五大流派 + MCP 專區:按「怎麼訓練 / 怎麼變強」分類</a:t>
+              <a:t>六大流派 + MCP 專區 + 新戰線 G:按「怎麼變強 / 在哪注入」分類</a:t>
             </a:r>
           </a:p>
         </p:txBody>
@@ -20807,8 +23246,8 @@
         </p:nvSpPr>
         <p:spPr>
           <a:xfrm>
-            <a:off x="502920" y="1554480"/>
-            <a:ext cx="5394960" cy="1463040"/>
+            <a:off x="502920" y="1417320"/>
+            <a:ext cx="5394960" cy="1207008"/>
           </a:xfrm>
           <a:prstGeom prst="roundRect">
             <a:avLst>
@@ -20853,8 +23292,8 @@
         </p:nvSpPr>
         <p:spPr>
           <a:xfrm>
-            <a:off x="502920" y="1554480"/>
-            <a:ext cx="457200" cy="1463040"/>
+            <a:off x="502920" y="1417320"/>
+            <a:ext cx="457200" cy="1207008"/>
           </a:xfrm>
           <a:prstGeom prst="roundRect">
             <a:avLst>
@@ -20899,8 +23338,8 @@
         </p:nvSpPr>
         <p:spPr>
           <a:xfrm>
-            <a:off x="548640" y="1554480"/>
-            <a:ext cx="365760" cy="1463040"/>
+            <a:off x="548640" y="1417320"/>
+            <a:ext cx="365760" cy="1207008"/>
           </a:xfrm>
           <a:prstGeom prst="rect">
             <a:avLst/>
@@ -20915,7 +23354,7 @@
           <a:p>
             <a:pPr algn="ctr"/>
             <a:r>
-              <a:rPr sz="2000" b="1">
+              <a:rPr sz="1900" b="1">
                 <a:solidFill>
                   <a:srgbClr val="FFFFFF"/>
                 </a:solidFill>
@@ -20936,8 +23375,8 @@
         </p:nvSpPr>
         <p:spPr>
           <a:xfrm>
-            <a:off x="1097280" y="1645920"/>
-            <a:ext cx="4663440" cy="1325880"/>
+            <a:off x="1097280" y="1490472"/>
+            <a:ext cx="4663440" cy="1097280"/>
           </a:xfrm>
           <a:prstGeom prst="rect">
             <a:avLst/>
@@ -20952,11 +23391,11 @@
           <a:p>
             <a:pPr algn="l">
               <a:spcAft>
-                <a:spcPts val="200"/>
+                <a:spcPts val="100"/>
               </a:spcAft>
             </a:pPr>
             <a:r>
-              <a:rPr sz="1450" b="1">
+              <a:rPr sz="1350" b="1">
                 <a:solidFill>
                   <a:srgbClr val="0E7C7B"/>
                 </a:solidFill>
@@ -20964,17 +23403,17 @@
                 <a:ea typeface="Microsoft JhengHei"/>
                 <a:cs typeface="Microsoft JhengHei"/>
               </a:rPr>
-              <a:t>免訓練</a:t>
+              <a:t>免訓練(prompt/索引層)</a:t>
             </a:r>
           </a:p>
           <a:p>
             <a:pPr algn="l">
               <a:spcAft>
-                <a:spcPts val="200"/>
+                <a:spcPts val="100"/>
               </a:spcAft>
             </a:pPr>
             <a:r>
-              <a:rPr sz="1100" b="0">
+              <a:rPr sz="1050" b="0">
                 <a:solidFill>
                   <a:srgbClr val="1F2937"/>
                 </a:solidFill>
@@ -20988,7 +23427,7 @@
           <a:p>
             <a:pPr algn="l"/>
             <a:r>
-              <a:rPr sz="1000" b="0">
+              <a:rPr sz="950" b="0">
                 <a:solidFill>
                   <a:srgbClr val="6B7280"/>
                 </a:solidFill>
@@ -21009,8 +23448,8 @@
         </p:nvSpPr>
         <p:spPr>
           <a:xfrm>
-            <a:off x="6263640" y="1554480"/>
-            <a:ext cx="5394960" cy="1463040"/>
+            <a:off x="6263640" y="1417320"/>
+            <a:ext cx="5394960" cy="1207008"/>
           </a:xfrm>
           <a:prstGeom prst="roundRect">
             <a:avLst>
@@ -21055,8 +23494,8 @@
         </p:nvSpPr>
         <p:spPr>
           <a:xfrm>
-            <a:off x="6263640" y="1554480"/>
-            <a:ext cx="457200" cy="1463040"/>
+            <a:off x="6263640" y="1417320"/>
+            <a:ext cx="457200" cy="1207008"/>
           </a:xfrm>
           <a:prstGeom prst="roundRect">
             <a:avLst>
@@ -21101,8 +23540,8 @@
         </p:nvSpPr>
         <p:spPr>
           <a:xfrm>
-            <a:off x="6309359" y="1554480"/>
-            <a:ext cx="365760" cy="1463040"/>
+            <a:off x="6309359" y="1417320"/>
+            <a:ext cx="365760" cy="1207008"/>
           </a:xfrm>
           <a:prstGeom prst="rect">
             <a:avLst/>
@@ -21117,7 +23556,7 @@
           <a:p>
             <a:pPr algn="ctr"/>
             <a:r>
-              <a:rPr sz="2000" b="1">
+              <a:rPr sz="1900" b="1">
                 <a:solidFill>
                   <a:srgbClr val="FFFFFF"/>
                 </a:solidFill>
@@ -21138,8 +23577,8 @@
         </p:nvSpPr>
         <p:spPr>
           <a:xfrm>
-            <a:off x="6858000" y="1645920"/>
-            <a:ext cx="4663440" cy="1325880"/>
+            <a:off x="6858000" y="1490472"/>
+            <a:ext cx="4663440" cy="1097280"/>
           </a:xfrm>
           <a:prstGeom prst="rect">
             <a:avLst/>
@@ -21154,11 +23593,11 @@
           <a:p>
             <a:pPr algn="l">
               <a:spcAft>
-                <a:spcPts val="200"/>
+                <a:spcPts val="100"/>
               </a:spcAft>
             </a:pPr>
             <a:r>
-              <a:rPr sz="1450" b="1">
+              <a:rPr sz="1350" b="1">
                 <a:solidFill>
                   <a:srgbClr val="2563EB"/>
                 </a:solidFill>
@@ -21172,11 +23611,11 @@
           <a:p>
             <a:pPr algn="l">
               <a:spcAft>
-                <a:spcPts val="200"/>
+                <a:spcPts val="100"/>
               </a:spcAft>
             </a:pPr>
             <a:r>
-              <a:rPr sz="1100" b="0">
+              <a:rPr sz="1050" b="0">
                 <a:solidFill>
                   <a:srgbClr val="1F2937"/>
                 </a:solidFill>
@@ -21190,7 +23629,7 @@
           <a:p>
             <a:pPr algn="l"/>
             <a:r>
-              <a:rPr sz="1000" b="0">
+              <a:rPr sz="950" b="0">
                 <a:solidFill>
                   <a:srgbClr val="6B7280"/>
                 </a:solidFill>
@@ -21211,8 +23650,8 @@
         </p:nvSpPr>
         <p:spPr>
           <a:xfrm>
-            <a:off x="502920" y="3154680"/>
-            <a:ext cx="5394960" cy="1463040"/>
+            <a:off x="502920" y="2743200"/>
+            <a:ext cx="5394960" cy="1207008"/>
           </a:xfrm>
           <a:prstGeom prst="roundRect">
             <a:avLst>
@@ -21257,8 +23696,8 @@
         </p:nvSpPr>
         <p:spPr>
           <a:xfrm>
-            <a:off x="502920" y="3154680"/>
-            <a:ext cx="457200" cy="1463040"/>
+            <a:off x="502920" y="2743200"/>
+            <a:ext cx="457200" cy="1207008"/>
           </a:xfrm>
           <a:prstGeom prst="roundRect">
             <a:avLst>
@@ -21303,8 +23742,8 @@
         </p:nvSpPr>
         <p:spPr>
           <a:xfrm>
-            <a:off x="548640" y="3154680"/>
-            <a:ext cx="365760" cy="1463040"/>
+            <a:off x="548640" y="2743200"/>
+            <a:ext cx="365760" cy="1207008"/>
           </a:xfrm>
           <a:prstGeom prst="rect">
             <a:avLst/>
@@ -21319,7 +23758,7 @@
           <a:p>
             <a:pPr algn="ctr"/>
             <a:r>
-              <a:rPr sz="2000" b="1">
+              <a:rPr sz="1900" b="1">
                 <a:solidFill>
                   <a:srgbClr val="FFFFFF"/>
                 </a:solidFill>
@@ -21340,8 +23779,8 @@
         </p:nvSpPr>
         <p:spPr>
           <a:xfrm>
-            <a:off x="1097280" y="3246120"/>
-            <a:ext cx="4663440" cy="1325880"/>
+            <a:off x="1097280" y="2816352"/>
+            <a:ext cx="4663440" cy="1097280"/>
           </a:xfrm>
           <a:prstGeom prst="rect">
             <a:avLst/>
@@ -21356,11 +23795,11 @@
           <a:p>
             <a:pPr algn="l">
               <a:spcAft>
-                <a:spcPts val="200"/>
+                <a:spcPts val="100"/>
               </a:spcAft>
             </a:pPr>
             <a:r>
-              <a:rPr sz="1450" b="1">
+              <a:rPr sz="1350" b="1">
                 <a:solidFill>
                   <a:srgbClr val="7C3AED"/>
                 </a:solidFill>
@@ -21374,11 +23813,11 @@
           <a:p>
             <a:pPr algn="l">
               <a:spcAft>
-                <a:spcPts val="200"/>
+                <a:spcPts val="100"/>
               </a:spcAft>
             </a:pPr>
             <a:r>
-              <a:rPr sz="1100" b="0">
+              <a:rPr sz="1050" b="0">
                 <a:solidFill>
                   <a:srgbClr val="1F2937"/>
                 </a:solidFill>
@@ -21392,7 +23831,7 @@
           <a:p>
             <a:pPr algn="l"/>
             <a:r>
-              <a:rPr sz="1000" b="0">
+              <a:rPr sz="950" b="0">
                 <a:solidFill>
                   <a:srgbClr val="6B7280"/>
                 </a:solidFill>
@@ -21413,8 +23852,8 @@
         </p:nvSpPr>
         <p:spPr>
           <a:xfrm>
-            <a:off x="6263640" y="3154680"/>
-            <a:ext cx="5394960" cy="1463040"/>
+            <a:off x="6263640" y="2743200"/>
+            <a:ext cx="5394960" cy="1207008"/>
           </a:xfrm>
           <a:prstGeom prst="roundRect">
             <a:avLst>
@@ -21459,8 +23898,8 @@
         </p:nvSpPr>
         <p:spPr>
           <a:xfrm>
-            <a:off x="6263640" y="3154680"/>
-            <a:ext cx="457200" cy="1463040"/>
+            <a:off x="6263640" y="2743200"/>
+            <a:ext cx="457200" cy="1207008"/>
           </a:xfrm>
           <a:prstGeom prst="roundRect">
             <a:avLst>
@@ -21505,8 +23944,8 @@
         </p:nvSpPr>
         <p:spPr>
           <a:xfrm>
-            <a:off x="6309359" y="3154680"/>
-            <a:ext cx="365760" cy="1463040"/>
+            <a:off x="6309359" y="2743200"/>
+            <a:ext cx="365760" cy="1207008"/>
           </a:xfrm>
           <a:prstGeom prst="rect">
             <a:avLst/>
@@ -21521,7 +23960,7 @@
           <a:p>
             <a:pPr algn="ctr"/>
             <a:r>
-              <a:rPr sz="2000" b="1">
+              <a:rPr sz="1900" b="1">
                 <a:solidFill>
                   <a:srgbClr val="FFFFFF"/>
                 </a:solidFill>
@@ -21542,8 +23981,8 @@
         </p:nvSpPr>
         <p:spPr>
           <a:xfrm>
-            <a:off x="6858000" y="3246120"/>
-            <a:ext cx="4663440" cy="1325880"/>
+            <a:off x="6858000" y="2816352"/>
+            <a:ext cx="4663440" cy="1097280"/>
           </a:xfrm>
           <a:prstGeom prst="rect">
             <a:avLst/>
@@ -21558,11 +23997,11 @@
           <a:p>
             <a:pPr algn="l">
               <a:spcAft>
-                <a:spcPts val="200"/>
+                <a:spcPts val="100"/>
               </a:spcAft>
             </a:pPr>
             <a:r>
-              <a:rPr sz="1450" b="1">
+              <a:rPr sz="1350" b="1">
                 <a:solidFill>
                   <a:srgbClr val="D97706"/>
                 </a:solidFill>
@@ -21576,11 +24015,11 @@
           <a:p>
             <a:pPr algn="l">
               <a:spcAft>
-                <a:spcPts val="200"/>
+                <a:spcPts val="100"/>
               </a:spcAft>
             </a:pPr>
             <a:r>
-              <a:rPr sz="1100" b="0">
+              <a:rPr sz="1050" b="0">
                 <a:solidFill>
                   <a:srgbClr val="1F2937"/>
                 </a:solidFill>
@@ -21594,7 +24033,7 @@
           <a:p>
             <a:pPr algn="l"/>
             <a:r>
-              <a:rPr sz="1000" b="0">
+              <a:rPr sz="950" b="0">
                 <a:solidFill>
                   <a:srgbClr val="6B7280"/>
                 </a:solidFill>
@@ -21615,8 +24054,8 @@
         </p:nvSpPr>
         <p:spPr>
           <a:xfrm>
-            <a:off x="502920" y="4754880"/>
-            <a:ext cx="5394960" cy="1463040"/>
+            <a:off x="502920" y="4069080"/>
+            <a:ext cx="5394960" cy="1207008"/>
           </a:xfrm>
           <a:prstGeom prst="roundRect">
             <a:avLst>
@@ -21661,8 +24100,8 @@
         </p:nvSpPr>
         <p:spPr>
           <a:xfrm>
-            <a:off x="502920" y="4754880"/>
-            <a:ext cx="457200" cy="1463040"/>
+            <a:off x="502920" y="4069080"/>
+            <a:ext cx="457200" cy="1207008"/>
           </a:xfrm>
           <a:prstGeom prst="roundRect">
             <a:avLst>
@@ -21707,8 +24146,8 @@
         </p:nvSpPr>
         <p:spPr>
           <a:xfrm>
-            <a:off x="548640" y="4754880"/>
-            <a:ext cx="365760" cy="1463040"/>
+            <a:off x="548640" y="4069080"/>
+            <a:ext cx="365760" cy="1207008"/>
           </a:xfrm>
           <a:prstGeom prst="rect">
             <a:avLst/>
@@ -21723,7 +24162,7 @@
           <a:p>
             <a:pPr algn="ctr"/>
             <a:r>
-              <a:rPr sz="2000" b="1">
+              <a:rPr sz="1900" b="1">
                 <a:solidFill>
                   <a:srgbClr val="FFFFFF"/>
                 </a:solidFill>
@@ -21744,8 +24183,8 @@
         </p:nvSpPr>
         <p:spPr>
           <a:xfrm>
-            <a:off x="1097280" y="4846320"/>
-            <a:ext cx="4663440" cy="1325880"/>
+            <a:off x="1097280" y="4142232"/>
+            <a:ext cx="4663440" cy="1097280"/>
           </a:xfrm>
           <a:prstGeom prst="rect">
             <a:avLst/>
@@ -21760,11 +24199,11 @@
           <a:p>
             <a:pPr algn="l">
               <a:spcAft>
-                <a:spcPts val="200"/>
+                <a:spcPts val="100"/>
               </a:spcAft>
             </a:pPr>
             <a:r>
-              <a:rPr sz="1450" b="1">
+              <a:rPr sz="1350" b="1">
                 <a:solidFill>
                   <a:srgbClr val="059669"/>
                 </a:solidFill>
@@ -21778,11 +24217,11 @@
           <a:p>
             <a:pPr algn="l">
               <a:spcAft>
-                <a:spcPts val="200"/>
+                <a:spcPts val="100"/>
               </a:spcAft>
             </a:pPr>
             <a:r>
-              <a:rPr sz="1100" b="0">
+              <a:rPr sz="1050" b="0">
                 <a:solidFill>
                   <a:srgbClr val="1F2937"/>
                 </a:solidFill>
@@ -21796,7 +24235,7 @@
           <a:p>
             <a:pPr algn="l"/>
             <a:r>
-              <a:rPr sz="1000" b="0">
+              <a:rPr sz="950" b="0">
                 <a:solidFill>
                   <a:srgbClr val="6B7280"/>
                 </a:solidFill>
@@ -21817,8 +24256,8 @@
         </p:nvSpPr>
         <p:spPr>
           <a:xfrm>
-            <a:off x="6263640" y="4754880"/>
-            <a:ext cx="5394960" cy="1463040"/>
+            <a:off x="6263640" y="4069080"/>
+            <a:ext cx="5394960" cy="1207008"/>
           </a:xfrm>
           <a:prstGeom prst="roundRect">
             <a:avLst>
@@ -21863,8 +24302,8 @@
         </p:nvSpPr>
         <p:spPr>
           <a:xfrm>
-            <a:off x="6263640" y="4754880"/>
-            <a:ext cx="457200" cy="1463040"/>
+            <a:off x="6263640" y="4069080"/>
+            <a:ext cx="457200" cy="1207008"/>
           </a:xfrm>
           <a:prstGeom prst="roundRect">
             <a:avLst>
@@ -21909,8 +24348,8 @@
         </p:nvSpPr>
         <p:spPr>
           <a:xfrm>
-            <a:off x="6309359" y="4754880"/>
-            <a:ext cx="365760" cy="1463040"/>
+            <a:off x="6309359" y="4069080"/>
+            <a:ext cx="365760" cy="1207008"/>
           </a:xfrm>
           <a:prstGeom prst="rect">
             <a:avLst/>
@@ -21925,7 +24364,7 @@
           <a:p>
             <a:pPr algn="ctr"/>
             <a:r>
-              <a:rPr sz="2000" b="1">
+              <a:rPr sz="1900" b="1">
                 <a:solidFill>
                   <a:srgbClr val="FFFFFF"/>
                 </a:solidFill>
@@ -21946,8 +24385,8 @@
         </p:nvSpPr>
         <p:spPr>
           <a:xfrm>
-            <a:off x="6858000" y="4846320"/>
-            <a:ext cx="4663440" cy="1325880"/>
+            <a:off x="6858000" y="4142232"/>
+            <a:ext cx="4663440" cy="1097280"/>
           </a:xfrm>
           <a:prstGeom prst="rect">
             <a:avLst/>
@@ -21962,11 +24401,11 @@
           <a:p>
             <a:pPr algn="l">
               <a:spcAft>
-                <a:spcPts val="200"/>
+                <a:spcPts val="100"/>
               </a:spcAft>
             </a:pPr>
             <a:r>
-              <a:rPr sz="1450" b="1">
+              <a:rPr sz="1350" b="1">
                 <a:solidFill>
                   <a:srgbClr val="C2410C"/>
                 </a:solidFill>
@@ -21980,11 +24419,11 @@
           <a:p>
             <a:pPr algn="l">
               <a:spcAft>
-                <a:spcPts val="200"/>
+                <a:spcPts val="100"/>
               </a:spcAft>
             </a:pPr>
             <a:r>
-              <a:rPr sz="1100" b="0">
+              <a:rPr sz="1050" b="0">
                 <a:solidFill>
                   <a:srgbClr val="1F2937"/>
                 </a:solidFill>
@@ -21998,7 +24437,7 @@
           <a:p>
             <a:pPr algn="l"/>
             <a:r>
-              <a:rPr sz="1000" b="0">
+              <a:rPr sz="950" b="0">
                 <a:solidFill>
                   <a:srgbClr val="6B7280"/>
                 </a:solidFill>
@@ -22013,14 +24452,143 @@
       </p:sp>
       <p:sp>
         <p:nvSpPr>
-          <p:cNvPr id="29" name="TextBox 28"/>
+          <p:cNvPr id="29" name="Rounded Rectangle 28"/>
+          <p:cNvSpPr/>
+          <p:nvPr/>
+        </p:nvSpPr>
+        <p:spPr>
+          <a:xfrm>
+            <a:off x="502920" y="5413248"/>
+            <a:ext cx="11155680" cy="914400"/>
+          </a:xfrm>
+          <a:prstGeom prst="roundRect">
+            <a:avLst>
+              <a:gd name="adj" fmla="val 10000"/>
+            </a:avLst>
+          </a:prstGeom>
+          <a:solidFill>
+            <a:srgbClr val="E0E7FF"/>
+          </a:solidFill>
+          <a:ln>
+            <a:noFill/>
+          </a:ln>
+          <a:effectLst/>
+        </p:spPr>
+        <p:style>
+          <a:lnRef idx="1">
+            <a:schemeClr val="accent1"/>
+          </a:lnRef>
+          <a:fillRef idx="3">
+            <a:schemeClr val="accent1"/>
+          </a:fillRef>
+          <a:effectRef idx="2">
+            <a:schemeClr val="accent1"/>
+          </a:effectRef>
+          <a:fontRef idx="minor">
+            <a:schemeClr val="lt1"/>
+          </a:fontRef>
+        </p:style>
+        <p:txBody>
+          <a:bodyPr rtlCol="0" anchor="ctr"/>
+          <a:lstStyle/>
+          <a:p>
+            <a:pPr algn="ctr"/>
+          </a:p>
+        </p:txBody>
+      </p:sp>
+      <p:sp>
+        <p:nvSpPr>
+          <p:cNvPr id="30" name="Rounded Rectangle 29"/>
+          <p:cNvSpPr/>
+          <p:nvPr/>
+        </p:nvSpPr>
+        <p:spPr>
+          <a:xfrm>
+            <a:off x="502920" y="5413248"/>
+            <a:ext cx="457200" cy="914400"/>
+          </a:xfrm>
+          <a:prstGeom prst="roundRect">
+            <a:avLst>
+              <a:gd name="adj" fmla="val 10000"/>
+            </a:avLst>
+          </a:prstGeom>
+          <a:solidFill>
+            <a:srgbClr val="4F46E5"/>
+          </a:solidFill>
+          <a:ln>
+            <a:noFill/>
+          </a:ln>
+          <a:effectLst/>
+        </p:spPr>
+        <p:style>
+          <a:lnRef idx="1">
+            <a:schemeClr val="accent1"/>
+          </a:lnRef>
+          <a:fillRef idx="3">
+            <a:schemeClr val="accent1"/>
+          </a:fillRef>
+          <a:effectRef idx="2">
+            <a:schemeClr val="accent1"/>
+          </a:effectRef>
+          <a:fontRef idx="minor">
+            <a:schemeClr val="lt1"/>
+          </a:fontRef>
+        </p:style>
+        <p:txBody>
+          <a:bodyPr rtlCol="0" anchor="ctr"/>
+          <a:lstStyle/>
+          <a:p>
+            <a:pPr algn="ctr"/>
+          </a:p>
+        </p:txBody>
+      </p:sp>
+      <p:sp>
+        <p:nvSpPr>
+          <p:cNvPr id="31" name="TextBox 30"/>
           <p:cNvSpPr txBox="1"/>
           <p:nvPr/>
         </p:nvSpPr>
         <p:spPr>
           <a:xfrm>
-            <a:off x="502920" y="6473952"/>
-            <a:ext cx="10241280" cy="320040"/>
+            <a:off x="548640" y="5413248"/>
+            <a:ext cx="365760" cy="914400"/>
+          </a:xfrm>
+          <a:prstGeom prst="rect">
+            <a:avLst/>
+          </a:prstGeom>
+          <a:noFill/>
+        </p:spPr>
+        <p:txBody>
+          <a:bodyPr wrap="square" anchor="ctr" lIns="0" rIns="0" tIns="0" bIns="0">
+            <a:spAutoFit/>
+          </a:bodyPr>
+          <a:lstStyle/>
+          <a:p>
+            <a:pPr algn="ctr"/>
+            <a:r>
+              <a:rPr sz="1900" b="1">
+                <a:solidFill>
+                  <a:srgbClr val="FFFFFF"/>
+                </a:solidFill>
+                <a:latin typeface="Microsoft JhengHei"/>
+                <a:ea typeface="Microsoft JhengHei"/>
+                <a:cs typeface="Microsoft JhengHei"/>
+              </a:rPr>
+              <a:t>G</a:t>
+            </a:r>
+          </a:p>
+        </p:txBody>
+      </p:sp>
+      <p:sp>
+        <p:nvSpPr>
+          <p:cNvPr id="32" name="TextBox 31"/>
+          <p:cNvSpPr txBox="1"/>
+          <p:nvPr/>
+        </p:nvSpPr>
+        <p:spPr>
+          <a:xfrm>
+            <a:off x="1097280" y="5477256"/>
+            <a:ext cx="10424160" cy="822960"/>
           </a:xfrm>
           <a:prstGeom prst="rect">
             <a:avLst/>
@@ -22033,8 +24601,63 @@
           </a:bodyPr>
           <a:lstStyle/>
           <a:p>
+            <a:pPr algn="l">
+              <a:spcAft>
+                <a:spcPts val="100"/>
+              </a:spcAft>
+            </a:pPr>
+            <a:r>
+              <a:rPr sz="1350" b="1">
+                <a:solidFill>
+                  <a:srgbClr val="4F46E5"/>
+                </a:solidFill>
+                <a:latin typeface="Microsoft JhengHei"/>
+                <a:ea typeface="Microsoft JhengHei"/>
+                <a:cs typeface="Microsoft JhengHei"/>
+              </a:rPr>
+              <a:t>新戰線:activation 注入(2026)—— 不改字面、直接改「腦內狀態」</a:t>
+            </a:r>
+          </a:p>
+          <a:p>
             <a:pPr algn="l"/>
             <a:r>
+              <a:rPr sz="1050" b="0">
+                <a:solidFill>
+                  <a:srgbClr val="1F2937"/>
+                </a:solidFill>
+                <a:latin typeface="Microsoft JhengHei"/>
+                <a:ea typeface="Microsoft JhengHei"/>
+                <a:cs typeface="Microsoft JhengHei"/>
+              </a:rPr>
+              <a:t>免訓練、KB 級資產、零 context 成本;probe 證明「模型早就知道」再用向量/起筆把它「說出口」。代表:ASA、KnowWhen、Looking(+診斷 KDGap)</a:t>
+            </a:r>
+          </a:p>
+        </p:txBody>
+      </p:sp>
+      <p:sp>
+        <p:nvSpPr>
+          <p:cNvPr id="33" name="TextBox 32"/>
+          <p:cNvSpPr txBox="1"/>
+          <p:nvPr/>
+        </p:nvSpPr>
+        <p:spPr>
+          <a:xfrm>
+            <a:off x="502920" y="6473952"/>
+            <a:ext cx="10241280" cy="320040"/>
+          </a:xfrm>
+          <a:prstGeom prst="rect">
+            <a:avLst/>
+          </a:prstGeom>
+          <a:noFill/>
+        </p:spPr>
+        <p:txBody>
+          <a:bodyPr wrap="square" anchor="t" lIns="0" rIns="0" tIns="0" bIns="0">
+            <a:spAutoFit/>
+          </a:bodyPr>
+          <a:lstStyle/>
+          <a:p>
+            <a:pPr algn="l"/>
+            <a:r>
               <a:rPr sz="950" b="0">
                 <a:solidFill>
                   <a:srgbClr val="6B7280"/>
@@ -22050,7 +24673,7 @@
       </p:sp>
       <p:sp>
         <p:nvSpPr>
-          <p:cNvPr id="30" name="TextBox 29"/>
+          <p:cNvPr id="34" name="TextBox 33"/>
           <p:cNvSpPr txBox="1"/>
           <p:nvPr/>
         </p:nvSpPr>
